--- a/images/Logo.pptx
+++ b/images/Logo.pptx
@@ -6,6 +6,9 @@
   </p:sldMasterIdLst>
   <p:sldIdLst>
     <p:sldId id="256" r:id="rId2"/>
+    <p:sldId id="257" r:id="rId3"/>
+    <p:sldId id="258" r:id="rId4"/>
+    <p:sldId id="259" r:id="rId5"/>
   </p:sldIdLst>
   <p:sldSz cx="12192000" cy="6858000"/>
   <p:notesSz cx="6858000" cy="9144000"/>
@@ -104,6 +107,11 @@
       </a:defRPr>
     </a:lvl9pPr>
   </p:defaultTextStyle>
+  <p:extLst>
+    <p:ext uri="{EFAFB233-063F-42B5-8137-9DF3F51BA10A}">
+      <p15:sldGuideLst xmlns:p15="http://schemas.microsoft.com/office/powerpoint/2012/main"/>
+    </p:ext>
+  </p:extLst>
 </p:presentation>
 </file>
 
@@ -256,7 +264,7 @@
           <a:p>
             <a:fld id="{C7B30B39-B25F-9241-B1FA-1A9268F493D8}" type="datetimeFigureOut">
               <a:rPr lang="en-US" smtClean="0"/>
-              <a:t>11/24/19</a:t>
+              <a:t>11/25/19</a:t>
             </a:fld>
             <a:endParaRPr lang="en-US"/>
           </a:p>
@@ -456,7 +464,7 @@
           <a:p>
             <a:fld id="{C7B30B39-B25F-9241-B1FA-1A9268F493D8}" type="datetimeFigureOut">
               <a:rPr lang="en-US" smtClean="0"/>
-              <a:t>11/24/19</a:t>
+              <a:t>11/25/19</a:t>
             </a:fld>
             <a:endParaRPr lang="en-US"/>
           </a:p>
@@ -666,7 +674,7 @@
           <a:p>
             <a:fld id="{C7B30B39-B25F-9241-B1FA-1A9268F493D8}" type="datetimeFigureOut">
               <a:rPr lang="en-US" smtClean="0"/>
-              <a:t>11/24/19</a:t>
+              <a:t>11/25/19</a:t>
             </a:fld>
             <a:endParaRPr lang="en-US"/>
           </a:p>
@@ -866,7 +874,7 @@
           <a:p>
             <a:fld id="{C7B30B39-B25F-9241-B1FA-1A9268F493D8}" type="datetimeFigureOut">
               <a:rPr lang="en-US" smtClean="0"/>
-              <a:t>11/24/19</a:t>
+              <a:t>11/25/19</a:t>
             </a:fld>
             <a:endParaRPr lang="en-US"/>
           </a:p>
@@ -1142,7 +1150,7 @@
           <a:p>
             <a:fld id="{C7B30B39-B25F-9241-B1FA-1A9268F493D8}" type="datetimeFigureOut">
               <a:rPr lang="en-US" smtClean="0"/>
-              <a:t>11/24/19</a:t>
+              <a:t>11/25/19</a:t>
             </a:fld>
             <a:endParaRPr lang="en-US"/>
           </a:p>
@@ -1410,7 +1418,7 @@
           <a:p>
             <a:fld id="{C7B30B39-B25F-9241-B1FA-1A9268F493D8}" type="datetimeFigureOut">
               <a:rPr lang="en-US" smtClean="0"/>
-              <a:t>11/24/19</a:t>
+              <a:t>11/25/19</a:t>
             </a:fld>
             <a:endParaRPr lang="en-US"/>
           </a:p>
@@ -1825,7 +1833,7 @@
           <a:p>
             <a:fld id="{C7B30B39-B25F-9241-B1FA-1A9268F493D8}" type="datetimeFigureOut">
               <a:rPr lang="en-US" smtClean="0"/>
-              <a:t>11/24/19</a:t>
+              <a:t>11/25/19</a:t>
             </a:fld>
             <a:endParaRPr lang="en-US"/>
           </a:p>
@@ -1967,7 +1975,7 @@
           <a:p>
             <a:fld id="{C7B30B39-B25F-9241-B1FA-1A9268F493D8}" type="datetimeFigureOut">
               <a:rPr lang="en-US" smtClean="0"/>
-              <a:t>11/24/19</a:t>
+              <a:t>11/25/19</a:t>
             </a:fld>
             <a:endParaRPr lang="en-US"/>
           </a:p>
@@ -2080,7 +2088,7 @@
           <a:p>
             <a:fld id="{C7B30B39-B25F-9241-B1FA-1A9268F493D8}" type="datetimeFigureOut">
               <a:rPr lang="en-US" smtClean="0"/>
-              <a:t>11/24/19</a:t>
+              <a:t>11/25/19</a:t>
             </a:fld>
             <a:endParaRPr lang="en-US"/>
           </a:p>
@@ -2393,7 +2401,7 @@
           <a:p>
             <a:fld id="{C7B30B39-B25F-9241-B1FA-1A9268F493D8}" type="datetimeFigureOut">
               <a:rPr lang="en-US" smtClean="0"/>
-              <a:t>11/24/19</a:t>
+              <a:t>11/25/19</a:t>
             </a:fld>
             <a:endParaRPr lang="en-US"/>
           </a:p>
@@ -2682,7 +2690,7 @@
           <a:p>
             <a:fld id="{C7B30B39-B25F-9241-B1FA-1A9268F493D8}" type="datetimeFigureOut">
               <a:rPr lang="en-US" smtClean="0"/>
-              <a:t>11/24/19</a:t>
+              <a:t>11/25/19</a:t>
             </a:fld>
             <a:endParaRPr lang="en-US"/>
           </a:p>
@@ -2925,7 +2933,7 @@
           <a:p>
             <a:fld id="{C7B30B39-B25F-9241-B1FA-1A9268F493D8}" type="datetimeFigureOut">
               <a:rPr lang="en-US" smtClean="0"/>
-              <a:t>11/24/19</a:t>
+              <a:t>11/25/19</a:t>
             </a:fld>
             <a:endParaRPr lang="en-US"/>
           </a:p>
@@ -3796,6 +3804,1409 @@
 </p:sld>
 </file>
 
+<file path=ppt/slides/slide2.xml><?xml version="1.0" encoding="utf-8"?>
+<p:sld xmlns:a="http://schemas.openxmlformats.org/drawingml/2006/main" xmlns:r="http://schemas.openxmlformats.org/officeDocument/2006/relationships" xmlns:p="http://schemas.openxmlformats.org/presentationml/2006/main">
+  <p:cSld>
+    <p:spTree>
+      <p:nvGrpSpPr>
+        <p:cNvPr id="1" name=""/>
+        <p:cNvGrpSpPr/>
+        <p:nvPr/>
+      </p:nvGrpSpPr>
+      <p:grpSpPr>
+        <a:xfrm>
+          <a:off x="0" y="0"/>
+          <a:ext cx="0" cy="0"/>
+          <a:chOff x="0" y="0"/>
+          <a:chExt cx="0" cy="0"/>
+        </a:xfrm>
+      </p:grpSpPr>
+      <p:sp>
+        <p:nvSpPr>
+          <p:cNvPr id="6" name="Rectangle 5">
+            <a:extLst>
+              <a:ext uri="{FF2B5EF4-FFF2-40B4-BE49-F238E27FC236}">
+                <a16:creationId xmlns:a16="http://schemas.microsoft.com/office/drawing/2014/main" id="{F68F3E1A-564F-0945-A6DE-D9139DAF94D4}"/>
+              </a:ext>
+            </a:extLst>
+          </p:cNvPr>
+          <p:cNvSpPr/>
+          <p:nvPr/>
+        </p:nvSpPr>
+        <p:spPr>
+          <a:xfrm>
+            <a:off x="5965419" y="612828"/>
+            <a:ext cx="4996593" cy="4979208"/>
+          </a:xfrm>
+          <a:prstGeom prst="rect">
+            <a:avLst/>
+          </a:prstGeom>
+          <a:solidFill>
+            <a:srgbClr val="F6F7F8"/>
+          </a:solidFill>
+          <a:ln w="12700">
+            <a:solidFill>
+              <a:schemeClr val="bg2">
+                <a:lumMod val="75000"/>
+              </a:schemeClr>
+            </a:solidFill>
+          </a:ln>
+        </p:spPr>
+        <p:style>
+          <a:lnRef idx="2">
+            <a:schemeClr val="accent1">
+              <a:shade val="50000"/>
+            </a:schemeClr>
+          </a:lnRef>
+          <a:fillRef idx="1">
+            <a:schemeClr val="accent1"/>
+          </a:fillRef>
+          <a:effectRef idx="0">
+            <a:schemeClr val="accent1"/>
+          </a:effectRef>
+          <a:fontRef idx="minor">
+            <a:schemeClr val="lt1"/>
+          </a:fontRef>
+        </p:style>
+        <p:txBody>
+          <a:bodyPr rtlCol="0" anchor="ctr"/>
+          <a:lstStyle/>
+          <a:p>
+            <a:pPr algn="ctr"/>
+            <a:endParaRPr lang="en-US" dirty="0"/>
+          </a:p>
+        </p:txBody>
+      </p:sp>
+      <p:sp>
+        <p:nvSpPr>
+          <p:cNvPr id="9" name="Rectangle 8">
+            <a:extLst>
+              <a:ext uri="{FF2B5EF4-FFF2-40B4-BE49-F238E27FC236}">
+                <a16:creationId xmlns:a16="http://schemas.microsoft.com/office/drawing/2014/main" id="{C7BE2465-956D-3F4D-8178-F6F01871B930}"/>
+              </a:ext>
+            </a:extLst>
+          </p:cNvPr>
+          <p:cNvSpPr/>
+          <p:nvPr/>
+        </p:nvSpPr>
+        <p:spPr>
+          <a:xfrm>
+            <a:off x="6400799" y="2971800"/>
+            <a:ext cx="4136570" cy="2024743"/>
+          </a:xfrm>
+          <a:prstGeom prst="rect">
+            <a:avLst/>
+          </a:prstGeom>
+          <a:solidFill>
+            <a:srgbClr val="F59E9E"/>
+          </a:solidFill>
+          <a:ln w="12700">
+            <a:noFill/>
+          </a:ln>
+        </p:spPr>
+        <p:style>
+          <a:lnRef idx="2">
+            <a:schemeClr val="accent1">
+              <a:shade val="50000"/>
+            </a:schemeClr>
+          </a:lnRef>
+          <a:fillRef idx="1">
+            <a:schemeClr val="accent1"/>
+          </a:fillRef>
+          <a:effectRef idx="0">
+            <a:schemeClr val="accent1"/>
+          </a:effectRef>
+          <a:fontRef idx="minor">
+            <a:schemeClr val="lt1"/>
+          </a:fontRef>
+        </p:style>
+        <p:txBody>
+          <a:bodyPr rtlCol="0" anchor="ctr"/>
+          <a:lstStyle/>
+          <a:p>
+            <a:pPr algn="ctr"/>
+            <a:endParaRPr lang="en-US"/>
+          </a:p>
+        </p:txBody>
+      </p:sp>
+      <p:sp>
+        <p:nvSpPr>
+          <p:cNvPr id="12" name="Rectangle 11">
+            <a:extLst>
+              <a:ext uri="{FF2B5EF4-FFF2-40B4-BE49-F238E27FC236}">
+                <a16:creationId xmlns:a16="http://schemas.microsoft.com/office/drawing/2014/main" id="{6C28455C-761E-194F-B82D-137CC00E74BE}"/>
+              </a:ext>
+            </a:extLst>
+          </p:cNvPr>
+          <p:cNvSpPr/>
+          <p:nvPr/>
+        </p:nvSpPr>
+        <p:spPr>
+          <a:xfrm>
+            <a:off x="6400800" y="3233056"/>
+            <a:ext cx="4136570" cy="1763487"/>
+          </a:xfrm>
+          <a:prstGeom prst="rect">
+            <a:avLst/>
+          </a:prstGeom>
+          <a:solidFill>
+            <a:srgbClr val="F1727F"/>
+          </a:solidFill>
+          <a:ln w="12700">
+            <a:noFill/>
+          </a:ln>
+        </p:spPr>
+        <p:style>
+          <a:lnRef idx="2">
+            <a:schemeClr val="accent1">
+              <a:shade val="50000"/>
+            </a:schemeClr>
+          </a:lnRef>
+          <a:fillRef idx="1">
+            <a:schemeClr val="accent1"/>
+          </a:fillRef>
+          <a:effectRef idx="0">
+            <a:schemeClr val="accent1"/>
+          </a:effectRef>
+          <a:fontRef idx="minor">
+            <a:schemeClr val="lt1"/>
+          </a:fontRef>
+        </p:style>
+        <p:txBody>
+          <a:bodyPr rtlCol="0" anchor="ctr"/>
+          <a:lstStyle/>
+          <a:p>
+            <a:pPr algn="ctr"/>
+            <a:endParaRPr lang="en-US"/>
+          </a:p>
+        </p:txBody>
+      </p:sp>
+      <p:sp>
+        <p:nvSpPr>
+          <p:cNvPr id="13" name="Rectangle 12">
+            <a:extLst>
+              <a:ext uri="{FF2B5EF4-FFF2-40B4-BE49-F238E27FC236}">
+                <a16:creationId xmlns:a16="http://schemas.microsoft.com/office/drawing/2014/main" id="{59FB30AC-B01F-3E42-A10E-9A08927BB0B7}"/>
+              </a:ext>
+            </a:extLst>
+          </p:cNvPr>
+          <p:cNvSpPr/>
+          <p:nvPr/>
+        </p:nvSpPr>
+        <p:spPr>
+          <a:xfrm>
+            <a:off x="6400799" y="3494312"/>
+            <a:ext cx="4136571" cy="1502231"/>
+          </a:xfrm>
+          <a:prstGeom prst="rect">
+            <a:avLst/>
+          </a:prstGeom>
+          <a:solidFill>
+            <a:srgbClr val="C16C86"/>
+          </a:solidFill>
+          <a:ln w="12700">
+            <a:noFill/>
+          </a:ln>
+        </p:spPr>
+        <p:style>
+          <a:lnRef idx="2">
+            <a:schemeClr val="accent1">
+              <a:shade val="50000"/>
+            </a:schemeClr>
+          </a:lnRef>
+          <a:fillRef idx="1">
+            <a:schemeClr val="accent1"/>
+          </a:fillRef>
+          <a:effectRef idx="0">
+            <a:schemeClr val="accent1"/>
+          </a:effectRef>
+          <a:fontRef idx="minor">
+            <a:schemeClr val="lt1"/>
+          </a:fontRef>
+        </p:style>
+        <p:txBody>
+          <a:bodyPr rtlCol="0" anchor="ctr"/>
+          <a:lstStyle/>
+          <a:p>
+            <a:pPr algn="ctr"/>
+            <a:endParaRPr lang="en-US"/>
+          </a:p>
+        </p:txBody>
+      </p:sp>
+      <p:sp>
+        <p:nvSpPr>
+          <p:cNvPr id="14" name="Rectangle 13">
+            <a:extLst>
+              <a:ext uri="{FF2B5EF4-FFF2-40B4-BE49-F238E27FC236}">
+                <a16:creationId xmlns:a16="http://schemas.microsoft.com/office/drawing/2014/main" id="{0D9EA72A-FB9D-BD4A-B502-A59BE115DF32}"/>
+              </a:ext>
+            </a:extLst>
+          </p:cNvPr>
+          <p:cNvSpPr/>
+          <p:nvPr/>
+        </p:nvSpPr>
+        <p:spPr>
+          <a:xfrm>
+            <a:off x="6400799" y="3755568"/>
+            <a:ext cx="4136571" cy="1426037"/>
+          </a:xfrm>
+          <a:prstGeom prst="rect">
+            <a:avLst/>
+          </a:prstGeom>
+          <a:solidFill>
+            <a:srgbClr val="335C7E"/>
+          </a:solidFill>
+          <a:ln w="12700">
+            <a:noFill/>
+          </a:ln>
+        </p:spPr>
+        <p:style>
+          <a:lnRef idx="2">
+            <a:schemeClr val="accent1">
+              <a:shade val="50000"/>
+            </a:schemeClr>
+          </a:lnRef>
+          <a:fillRef idx="1">
+            <a:schemeClr val="accent1"/>
+          </a:fillRef>
+          <a:effectRef idx="0">
+            <a:schemeClr val="accent1"/>
+          </a:effectRef>
+          <a:fontRef idx="minor">
+            <a:schemeClr val="lt1"/>
+          </a:fontRef>
+        </p:style>
+        <p:txBody>
+          <a:bodyPr rtlCol="0" anchor="ctr"/>
+          <a:lstStyle/>
+          <a:p>
+            <a:pPr algn="ctr"/>
+            <a:endParaRPr lang="en-US"/>
+          </a:p>
+        </p:txBody>
+      </p:sp>
+      <p:sp>
+        <p:nvSpPr>
+          <p:cNvPr id="15" name="Rectangle 14">
+            <a:extLst>
+              <a:ext uri="{FF2B5EF4-FFF2-40B4-BE49-F238E27FC236}">
+                <a16:creationId xmlns:a16="http://schemas.microsoft.com/office/drawing/2014/main" id="{BFC01515-0C75-A94E-A507-2C5D301A0614}"/>
+              </a:ext>
+            </a:extLst>
+          </p:cNvPr>
+          <p:cNvSpPr/>
+          <p:nvPr/>
+        </p:nvSpPr>
+        <p:spPr>
+          <a:xfrm>
+            <a:off x="5829296" y="503965"/>
+            <a:ext cx="5192486" cy="5178378"/>
+          </a:xfrm>
+          <a:prstGeom prst="rect">
+            <a:avLst/>
+          </a:prstGeom>
+          <a:noFill/>
+          <a:ln w="12700">
+            <a:noFill/>
+          </a:ln>
+        </p:spPr>
+        <p:style>
+          <a:lnRef idx="2">
+            <a:schemeClr val="accent1">
+              <a:shade val="50000"/>
+            </a:schemeClr>
+          </a:lnRef>
+          <a:fillRef idx="1">
+            <a:schemeClr val="accent1"/>
+          </a:fillRef>
+          <a:effectRef idx="0">
+            <a:schemeClr val="accent1"/>
+          </a:effectRef>
+          <a:fontRef idx="minor">
+            <a:schemeClr val="lt1"/>
+          </a:fontRef>
+        </p:style>
+        <p:txBody>
+          <a:bodyPr rtlCol="0" anchor="ctr"/>
+          <a:lstStyle/>
+          <a:p>
+            <a:pPr algn="ctr"/>
+            <a:endParaRPr lang="en-US" dirty="0"/>
+          </a:p>
+        </p:txBody>
+      </p:sp>
+      <p:sp>
+        <p:nvSpPr>
+          <p:cNvPr id="11" name="TextBox 10">
+            <a:extLst>
+              <a:ext uri="{FF2B5EF4-FFF2-40B4-BE49-F238E27FC236}">
+                <a16:creationId xmlns:a16="http://schemas.microsoft.com/office/drawing/2014/main" id="{236DDD5B-F86E-2942-B8A4-3D1973AC4616}"/>
+              </a:ext>
+            </a:extLst>
+          </p:cNvPr>
+          <p:cNvSpPr txBox="1"/>
+          <p:nvPr/>
+        </p:nvSpPr>
+        <p:spPr>
+          <a:xfrm>
+            <a:off x="6542315" y="3183334"/>
+            <a:ext cx="3995054" cy="2215991"/>
+          </a:xfrm>
+          <a:prstGeom prst="rect">
+            <a:avLst/>
+          </a:prstGeom>
+          <a:noFill/>
+        </p:spPr>
+        <p:txBody>
+          <a:bodyPr wrap="square" rtlCol="0">
+            <a:spAutoFit/>
+          </a:bodyPr>
+          <a:lstStyle/>
+          <a:p>
+            <a:r>
+              <a:rPr lang="en-US" sz="13800" dirty="0">
+                <a:solidFill>
+                  <a:srgbClr val="F6F6F8"/>
+                </a:solidFill>
+                <a:latin typeface="SignPainter HouseScript" panose="02000006070000020004" pitchFamily="2" charset="0"/>
+                <a:cs typeface="Forte" panose="020F0502020204030204" pitchFamily="34" charset="0"/>
+              </a:rPr>
+              <a:t>Arpit</a:t>
+            </a:r>
+            <a:r>
+              <a:rPr lang="en-US" sz="9600" dirty="0">
+                <a:solidFill>
+                  <a:srgbClr val="F6F6F8"/>
+                </a:solidFill>
+                <a:latin typeface="IBM Plex Mono ExtraLight" panose="020B0309050203000203" pitchFamily="49" charset="77"/>
+              </a:rPr>
+              <a:t> </a:t>
+            </a:r>
+          </a:p>
+        </p:txBody>
+      </p:sp>
+      <p:sp>
+        <p:nvSpPr>
+          <p:cNvPr id="16" name="TextBox 15">
+            <a:extLst>
+              <a:ext uri="{FF2B5EF4-FFF2-40B4-BE49-F238E27FC236}">
+                <a16:creationId xmlns:a16="http://schemas.microsoft.com/office/drawing/2014/main" id="{A829F524-8735-6445-BDB9-D34750F6F8E1}"/>
+              </a:ext>
+            </a:extLst>
+          </p:cNvPr>
+          <p:cNvSpPr txBox="1"/>
+          <p:nvPr/>
+        </p:nvSpPr>
+        <p:spPr>
+          <a:xfrm>
+            <a:off x="8463715" y="4616983"/>
+            <a:ext cx="1360718" cy="584775"/>
+          </a:xfrm>
+          <a:prstGeom prst="rect">
+            <a:avLst/>
+          </a:prstGeom>
+          <a:noFill/>
+        </p:spPr>
+        <p:txBody>
+          <a:bodyPr wrap="square" rtlCol="0">
+            <a:spAutoFit/>
+          </a:bodyPr>
+          <a:lstStyle/>
+          <a:p>
+            <a:r>
+              <a:rPr lang="en-US" sz="3200" b="1" dirty="0">
+                <a:solidFill>
+                  <a:srgbClr val="F6F6F8"/>
+                </a:solidFill>
+                <a:latin typeface="Google Sans" panose="020B0503030502040204" pitchFamily="34" charset="0"/>
+              </a:rPr>
+              <a:t>JAIN.</a:t>
+            </a:r>
+            <a:r>
+              <a:rPr lang="en-US" sz="2400" b="1" dirty="0">
+                <a:solidFill>
+                  <a:srgbClr val="F6F6F8"/>
+                </a:solidFill>
+                <a:latin typeface="Google Sans Medium" panose="020B0503030502040204" pitchFamily="34" charset="0"/>
+              </a:rPr>
+              <a:t> </a:t>
+            </a:r>
+          </a:p>
+        </p:txBody>
+      </p:sp>
+    </p:spTree>
+    <p:extLst>
+      <p:ext uri="{BB962C8B-B14F-4D97-AF65-F5344CB8AC3E}">
+        <p14:creationId xmlns:p14="http://schemas.microsoft.com/office/powerpoint/2010/main" val="2174413045"/>
+      </p:ext>
+    </p:extLst>
+  </p:cSld>
+  <p:clrMapOvr>
+    <a:masterClrMapping/>
+  </p:clrMapOvr>
+</p:sld>
+</file>
+
+<file path=ppt/slides/slide3.xml><?xml version="1.0" encoding="utf-8"?>
+<p:sld xmlns:a="http://schemas.openxmlformats.org/drawingml/2006/main" xmlns:r="http://schemas.openxmlformats.org/officeDocument/2006/relationships" xmlns:p="http://schemas.openxmlformats.org/presentationml/2006/main">
+  <p:cSld>
+    <p:spTree>
+      <p:nvGrpSpPr>
+        <p:cNvPr id="1" name=""/>
+        <p:cNvGrpSpPr/>
+        <p:nvPr/>
+      </p:nvGrpSpPr>
+      <p:grpSpPr>
+        <a:xfrm>
+          <a:off x="0" y="0"/>
+          <a:ext cx="0" cy="0"/>
+          <a:chOff x="0" y="0"/>
+          <a:chExt cx="0" cy="0"/>
+        </a:xfrm>
+      </p:grpSpPr>
+      <p:sp>
+        <p:nvSpPr>
+          <p:cNvPr id="6" name="Rectangle 5">
+            <a:extLst>
+              <a:ext uri="{FF2B5EF4-FFF2-40B4-BE49-F238E27FC236}">
+                <a16:creationId xmlns:a16="http://schemas.microsoft.com/office/drawing/2014/main" id="{F68F3E1A-564F-0945-A6DE-D9139DAF94D4}"/>
+              </a:ext>
+            </a:extLst>
+          </p:cNvPr>
+          <p:cNvSpPr/>
+          <p:nvPr/>
+        </p:nvSpPr>
+        <p:spPr>
+          <a:xfrm>
+            <a:off x="5965419" y="612828"/>
+            <a:ext cx="4996593" cy="4979208"/>
+          </a:xfrm>
+          <a:prstGeom prst="rect">
+            <a:avLst/>
+          </a:prstGeom>
+          <a:solidFill>
+            <a:srgbClr val="F6F7F8"/>
+          </a:solidFill>
+          <a:ln w="12700">
+            <a:solidFill>
+              <a:schemeClr val="bg2">
+                <a:lumMod val="75000"/>
+              </a:schemeClr>
+            </a:solidFill>
+          </a:ln>
+        </p:spPr>
+        <p:style>
+          <a:lnRef idx="2">
+            <a:schemeClr val="accent1">
+              <a:shade val="50000"/>
+            </a:schemeClr>
+          </a:lnRef>
+          <a:fillRef idx="1">
+            <a:schemeClr val="accent1"/>
+          </a:fillRef>
+          <a:effectRef idx="0">
+            <a:schemeClr val="accent1"/>
+          </a:effectRef>
+          <a:fontRef idx="minor">
+            <a:schemeClr val="lt1"/>
+          </a:fontRef>
+        </p:style>
+        <p:txBody>
+          <a:bodyPr rtlCol="0" anchor="ctr"/>
+          <a:lstStyle/>
+          <a:p>
+            <a:pPr algn="ctr"/>
+            <a:endParaRPr lang="en-US" dirty="0"/>
+          </a:p>
+        </p:txBody>
+      </p:sp>
+      <p:sp>
+        <p:nvSpPr>
+          <p:cNvPr id="15" name="Rectangle 14">
+            <a:extLst>
+              <a:ext uri="{FF2B5EF4-FFF2-40B4-BE49-F238E27FC236}">
+                <a16:creationId xmlns:a16="http://schemas.microsoft.com/office/drawing/2014/main" id="{BFC01515-0C75-A94E-A507-2C5D301A0614}"/>
+              </a:ext>
+            </a:extLst>
+          </p:cNvPr>
+          <p:cNvSpPr/>
+          <p:nvPr/>
+        </p:nvSpPr>
+        <p:spPr>
+          <a:xfrm>
+            <a:off x="5829296" y="503965"/>
+            <a:ext cx="5192486" cy="5178378"/>
+          </a:xfrm>
+          <a:prstGeom prst="rect">
+            <a:avLst/>
+          </a:prstGeom>
+          <a:noFill/>
+          <a:ln w="12700">
+            <a:noFill/>
+          </a:ln>
+        </p:spPr>
+        <p:style>
+          <a:lnRef idx="2">
+            <a:schemeClr val="accent1">
+              <a:shade val="50000"/>
+            </a:schemeClr>
+          </a:lnRef>
+          <a:fillRef idx="1">
+            <a:schemeClr val="accent1"/>
+          </a:fillRef>
+          <a:effectRef idx="0">
+            <a:schemeClr val="accent1"/>
+          </a:effectRef>
+          <a:fontRef idx="minor">
+            <a:schemeClr val="lt1"/>
+          </a:fontRef>
+        </p:style>
+        <p:txBody>
+          <a:bodyPr rtlCol="0" anchor="ctr"/>
+          <a:lstStyle/>
+          <a:p>
+            <a:pPr algn="ctr"/>
+            <a:endParaRPr lang="en-US" dirty="0"/>
+          </a:p>
+        </p:txBody>
+      </p:sp>
+      <p:sp>
+        <p:nvSpPr>
+          <p:cNvPr id="11" name="TextBox 10">
+            <a:extLst>
+              <a:ext uri="{FF2B5EF4-FFF2-40B4-BE49-F238E27FC236}">
+                <a16:creationId xmlns:a16="http://schemas.microsoft.com/office/drawing/2014/main" id="{236DDD5B-F86E-2942-B8A4-3D1973AC4616}"/>
+              </a:ext>
+            </a:extLst>
+          </p:cNvPr>
+          <p:cNvSpPr txBox="1"/>
+          <p:nvPr/>
+        </p:nvSpPr>
+        <p:spPr>
+          <a:xfrm>
+            <a:off x="5965419" y="3183334"/>
+            <a:ext cx="4849540" cy="2215991"/>
+          </a:xfrm>
+          <a:prstGeom prst="rect">
+            <a:avLst/>
+          </a:prstGeom>
+          <a:noFill/>
+        </p:spPr>
+        <p:txBody>
+          <a:bodyPr wrap="square" rtlCol="0">
+            <a:spAutoFit/>
+          </a:bodyPr>
+          <a:lstStyle/>
+          <a:p>
+            <a:pPr algn="ctr"/>
+            <a:r>
+              <a:rPr lang="en-US" sz="13800" dirty="0">
+                <a:solidFill>
+                  <a:srgbClr val="335C7E"/>
+                </a:solidFill>
+                <a:latin typeface="SignPainter HouseScript" panose="02000006070000020004" pitchFamily="2" charset="0"/>
+                <a:cs typeface="Forte" panose="020F0502020204030204" pitchFamily="34" charset="0"/>
+              </a:rPr>
+              <a:t>Arpit</a:t>
+            </a:r>
+            <a:r>
+              <a:rPr lang="en-US" sz="9600" dirty="0">
+                <a:blipFill dpi="0" rotWithShape="1">
+                  <a:blip r:embed="rId2">
+                    <a:extLst>
+                      <a:ext uri="{28A0092B-C50C-407E-A947-70E740481C1C}">
+                        <a14:useLocalDpi xmlns:a14="http://schemas.microsoft.com/office/drawing/2010/main" val="0"/>
+                      </a:ext>
+                    </a:extLst>
+                  </a:blip>
+                  <a:srcRect/>
+                  <a:tile tx="-165100" ty="0" sx="30000" sy="50000" flip="none" algn="tl"/>
+                </a:blipFill>
+                <a:latin typeface="IBM Plex Mono ExtraLight" panose="020B0309050203000203" pitchFamily="49" charset="77"/>
+              </a:rPr>
+              <a:t> </a:t>
+            </a:r>
+          </a:p>
+        </p:txBody>
+      </p:sp>
+      <p:sp>
+        <p:nvSpPr>
+          <p:cNvPr id="16" name="TextBox 15">
+            <a:extLst>
+              <a:ext uri="{FF2B5EF4-FFF2-40B4-BE49-F238E27FC236}">
+                <a16:creationId xmlns:a16="http://schemas.microsoft.com/office/drawing/2014/main" id="{A829F524-8735-6445-BDB9-D34750F6F8E1}"/>
+              </a:ext>
+            </a:extLst>
+          </p:cNvPr>
+          <p:cNvSpPr txBox="1"/>
+          <p:nvPr/>
+        </p:nvSpPr>
+        <p:spPr>
+          <a:xfrm>
+            <a:off x="8809496" y="4651176"/>
+            <a:ext cx="1248904" cy="584775"/>
+          </a:xfrm>
+          <a:prstGeom prst="rect">
+            <a:avLst/>
+          </a:prstGeom>
+          <a:noFill/>
+        </p:spPr>
+        <p:txBody>
+          <a:bodyPr wrap="square" rtlCol="0">
+            <a:spAutoFit/>
+          </a:bodyPr>
+          <a:lstStyle/>
+          <a:p>
+            <a:r>
+              <a:rPr lang="en-US" sz="3200" b="1" dirty="0">
+                <a:solidFill>
+                  <a:srgbClr val="335C7E"/>
+                </a:solidFill>
+                <a:latin typeface="Google Sans" panose="020B0503030502040204" pitchFamily="34" charset="0"/>
+              </a:rPr>
+              <a:t>JAIN.</a:t>
+            </a:r>
+            <a:r>
+              <a:rPr lang="en-US" sz="2400" b="1" dirty="0">
+                <a:solidFill>
+                  <a:srgbClr val="335C7E"/>
+                </a:solidFill>
+                <a:latin typeface="Google Sans Medium" panose="020B0503030502040204" pitchFamily="34" charset="0"/>
+              </a:rPr>
+              <a:t> </a:t>
+            </a:r>
+          </a:p>
+        </p:txBody>
+      </p:sp>
+      <p:sp>
+        <p:nvSpPr>
+          <p:cNvPr id="2" name="Sun 1">
+            <a:extLst>
+              <a:ext uri="{FF2B5EF4-FFF2-40B4-BE49-F238E27FC236}">
+                <a16:creationId xmlns:a16="http://schemas.microsoft.com/office/drawing/2014/main" id="{6D16354A-BC87-504E-886D-F8DDF0F32742}"/>
+              </a:ext>
+            </a:extLst>
+          </p:cNvPr>
+          <p:cNvSpPr/>
+          <p:nvPr/>
+        </p:nvSpPr>
+        <p:spPr>
+          <a:xfrm>
+            <a:off x="7647286" y="2016401"/>
+            <a:ext cx="1632857" cy="1697434"/>
+          </a:xfrm>
+          <a:prstGeom prst="sun">
+            <a:avLst>
+              <a:gd name="adj" fmla="val 46875"/>
+            </a:avLst>
+          </a:prstGeom>
+          <a:solidFill>
+            <a:srgbClr val="F1727F"/>
+          </a:solidFill>
+          <a:ln>
+            <a:solidFill>
+              <a:srgbClr val="F1727F"/>
+            </a:solidFill>
+          </a:ln>
+        </p:spPr>
+        <p:style>
+          <a:lnRef idx="2">
+            <a:schemeClr val="accent1">
+              <a:shade val="50000"/>
+            </a:schemeClr>
+          </a:lnRef>
+          <a:fillRef idx="1">
+            <a:schemeClr val="accent1"/>
+          </a:fillRef>
+          <a:effectRef idx="0">
+            <a:schemeClr val="accent1"/>
+          </a:effectRef>
+          <a:fontRef idx="minor">
+            <a:schemeClr val="lt1"/>
+          </a:fontRef>
+        </p:style>
+        <p:txBody>
+          <a:bodyPr rtlCol="0" anchor="ctr"/>
+          <a:lstStyle/>
+          <a:p>
+            <a:pPr algn="ctr"/>
+            <a:endParaRPr lang="en-US"/>
+          </a:p>
+        </p:txBody>
+      </p:sp>
+      <p:sp>
+        <p:nvSpPr>
+          <p:cNvPr id="18" name="Rectangle 17">
+            <a:extLst>
+              <a:ext uri="{FF2B5EF4-FFF2-40B4-BE49-F238E27FC236}">
+                <a16:creationId xmlns:a16="http://schemas.microsoft.com/office/drawing/2014/main" id="{6D60967A-5C64-3F43-8D6D-A2B42DD03D0E}"/>
+              </a:ext>
+            </a:extLst>
+          </p:cNvPr>
+          <p:cNvSpPr/>
+          <p:nvPr/>
+        </p:nvSpPr>
+        <p:spPr>
+          <a:xfrm>
+            <a:off x="8809496" y="5495979"/>
+            <a:ext cx="2160000" cy="108000"/>
+          </a:xfrm>
+          <a:prstGeom prst="rect">
+            <a:avLst/>
+          </a:prstGeom>
+          <a:solidFill>
+            <a:srgbClr val="F59E9E"/>
+          </a:solidFill>
+          <a:ln w="12700">
+            <a:noFill/>
+          </a:ln>
+        </p:spPr>
+        <p:style>
+          <a:lnRef idx="2">
+            <a:schemeClr val="accent1">
+              <a:shade val="50000"/>
+            </a:schemeClr>
+          </a:lnRef>
+          <a:fillRef idx="1">
+            <a:schemeClr val="accent1"/>
+          </a:fillRef>
+          <a:effectRef idx="0">
+            <a:schemeClr val="accent1"/>
+          </a:effectRef>
+          <a:fontRef idx="minor">
+            <a:schemeClr val="lt1"/>
+          </a:fontRef>
+        </p:style>
+        <p:txBody>
+          <a:bodyPr rtlCol="0" anchor="ctr"/>
+          <a:lstStyle/>
+          <a:p>
+            <a:pPr algn="ctr"/>
+            <a:endParaRPr lang="en-US"/>
+          </a:p>
+        </p:txBody>
+      </p:sp>
+      <p:sp>
+        <p:nvSpPr>
+          <p:cNvPr id="19" name="Rectangle 18">
+            <a:extLst>
+              <a:ext uri="{FF2B5EF4-FFF2-40B4-BE49-F238E27FC236}">
+                <a16:creationId xmlns:a16="http://schemas.microsoft.com/office/drawing/2014/main" id="{E6E91D9A-3F17-CD48-80AF-BE2201A25D59}"/>
+              </a:ext>
+            </a:extLst>
+          </p:cNvPr>
+          <p:cNvSpPr/>
+          <p:nvPr/>
+        </p:nvSpPr>
+        <p:spPr>
+          <a:xfrm>
+            <a:off x="10883897" y="612828"/>
+            <a:ext cx="108000" cy="2160000"/>
+          </a:xfrm>
+          <a:prstGeom prst="rect">
+            <a:avLst/>
+          </a:prstGeom>
+          <a:solidFill>
+            <a:srgbClr val="F1727F"/>
+          </a:solidFill>
+          <a:ln w="12700">
+            <a:noFill/>
+          </a:ln>
+        </p:spPr>
+        <p:style>
+          <a:lnRef idx="2">
+            <a:schemeClr val="accent1">
+              <a:shade val="50000"/>
+            </a:schemeClr>
+          </a:lnRef>
+          <a:fillRef idx="1">
+            <a:schemeClr val="accent1"/>
+          </a:fillRef>
+          <a:effectRef idx="0">
+            <a:schemeClr val="accent1"/>
+          </a:effectRef>
+          <a:fontRef idx="minor">
+            <a:schemeClr val="lt1"/>
+          </a:fontRef>
+        </p:style>
+        <p:txBody>
+          <a:bodyPr rtlCol="0" anchor="ctr"/>
+          <a:lstStyle/>
+          <a:p>
+            <a:pPr algn="ctr"/>
+            <a:endParaRPr lang="en-US"/>
+          </a:p>
+        </p:txBody>
+      </p:sp>
+      <p:sp>
+        <p:nvSpPr>
+          <p:cNvPr id="20" name="Rectangle 19">
+            <a:extLst>
+              <a:ext uri="{FF2B5EF4-FFF2-40B4-BE49-F238E27FC236}">
+                <a16:creationId xmlns:a16="http://schemas.microsoft.com/office/drawing/2014/main" id="{7E7A09BF-47D5-7249-8FDD-25D8B773A542}"/>
+              </a:ext>
+            </a:extLst>
+          </p:cNvPr>
+          <p:cNvSpPr/>
+          <p:nvPr/>
+        </p:nvSpPr>
+        <p:spPr>
+          <a:xfrm>
+            <a:off x="5965395" y="612828"/>
+            <a:ext cx="2160000" cy="108000"/>
+          </a:xfrm>
+          <a:prstGeom prst="rect">
+            <a:avLst/>
+          </a:prstGeom>
+          <a:solidFill>
+            <a:srgbClr val="C16C86"/>
+          </a:solidFill>
+          <a:ln w="12700">
+            <a:noFill/>
+          </a:ln>
+        </p:spPr>
+        <p:style>
+          <a:lnRef idx="2">
+            <a:schemeClr val="accent1">
+              <a:shade val="50000"/>
+            </a:schemeClr>
+          </a:lnRef>
+          <a:fillRef idx="1">
+            <a:schemeClr val="accent1"/>
+          </a:fillRef>
+          <a:effectRef idx="0">
+            <a:schemeClr val="accent1"/>
+          </a:effectRef>
+          <a:fontRef idx="minor">
+            <a:schemeClr val="lt1"/>
+          </a:fontRef>
+        </p:style>
+        <p:txBody>
+          <a:bodyPr rtlCol="0" anchor="ctr"/>
+          <a:lstStyle/>
+          <a:p>
+            <a:pPr algn="ctr"/>
+            <a:endParaRPr lang="en-US"/>
+          </a:p>
+        </p:txBody>
+      </p:sp>
+      <p:sp>
+        <p:nvSpPr>
+          <p:cNvPr id="21" name="Rectangle 20">
+            <a:extLst>
+              <a:ext uri="{FF2B5EF4-FFF2-40B4-BE49-F238E27FC236}">
+                <a16:creationId xmlns:a16="http://schemas.microsoft.com/office/drawing/2014/main" id="{8AF850E0-8C52-7B4C-A384-A31B2EAC3111}"/>
+              </a:ext>
+            </a:extLst>
+          </p:cNvPr>
+          <p:cNvSpPr/>
+          <p:nvPr/>
+        </p:nvSpPr>
+        <p:spPr>
+          <a:xfrm>
+            <a:off x="5965395" y="3432036"/>
+            <a:ext cx="108000" cy="2160000"/>
+          </a:xfrm>
+          <a:prstGeom prst="rect">
+            <a:avLst/>
+          </a:prstGeom>
+          <a:solidFill>
+            <a:srgbClr val="335C7E"/>
+          </a:solidFill>
+          <a:ln w="12700">
+            <a:noFill/>
+          </a:ln>
+        </p:spPr>
+        <p:style>
+          <a:lnRef idx="2">
+            <a:schemeClr val="accent1">
+              <a:shade val="50000"/>
+            </a:schemeClr>
+          </a:lnRef>
+          <a:fillRef idx="1">
+            <a:schemeClr val="accent1"/>
+          </a:fillRef>
+          <a:effectRef idx="0">
+            <a:schemeClr val="accent1"/>
+          </a:effectRef>
+          <a:fontRef idx="minor">
+            <a:schemeClr val="lt1"/>
+          </a:fontRef>
+        </p:style>
+        <p:txBody>
+          <a:bodyPr rtlCol="0" anchor="ctr"/>
+          <a:lstStyle/>
+          <a:p>
+            <a:pPr algn="ctr"/>
+            <a:endParaRPr lang="en-US"/>
+          </a:p>
+        </p:txBody>
+      </p:sp>
+    </p:spTree>
+    <p:extLst>
+      <p:ext uri="{BB962C8B-B14F-4D97-AF65-F5344CB8AC3E}">
+        <p14:creationId xmlns:p14="http://schemas.microsoft.com/office/powerpoint/2010/main" val="2585057381"/>
+      </p:ext>
+    </p:extLst>
+  </p:cSld>
+  <p:clrMapOvr>
+    <a:masterClrMapping/>
+  </p:clrMapOvr>
+</p:sld>
+</file>
+
+<file path=ppt/slides/slide4.xml><?xml version="1.0" encoding="utf-8"?>
+<p:sld xmlns:a="http://schemas.openxmlformats.org/drawingml/2006/main" xmlns:r="http://schemas.openxmlformats.org/officeDocument/2006/relationships" xmlns:p="http://schemas.openxmlformats.org/presentationml/2006/main">
+  <p:cSld>
+    <p:spTree>
+      <p:nvGrpSpPr>
+        <p:cNvPr id="1" name=""/>
+        <p:cNvGrpSpPr/>
+        <p:nvPr/>
+      </p:nvGrpSpPr>
+      <p:grpSpPr>
+        <a:xfrm>
+          <a:off x="0" y="0"/>
+          <a:ext cx="0" cy="0"/>
+          <a:chOff x="0" y="0"/>
+          <a:chExt cx="0" cy="0"/>
+        </a:xfrm>
+      </p:grpSpPr>
+      <p:sp>
+        <p:nvSpPr>
+          <p:cNvPr id="6" name="Rectangle 5">
+            <a:extLst>
+              <a:ext uri="{FF2B5EF4-FFF2-40B4-BE49-F238E27FC236}">
+                <a16:creationId xmlns:a16="http://schemas.microsoft.com/office/drawing/2014/main" id="{F68F3E1A-564F-0945-A6DE-D9139DAF94D4}"/>
+              </a:ext>
+            </a:extLst>
+          </p:cNvPr>
+          <p:cNvSpPr/>
+          <p:nvPr/>
+        </p:nvSpPr>
+        <p:spPr>
+          <a:xfrm>
+            <a:off x="5965419" y="612828"/>
+            <a:ext cx="4996593" cy="4979208"/>
+          </a:xfrm>
+          <a:prstGeom prst="rect">
+            <a:avLst/>
+          </a:prstGeom>
+          <a:solidFill>
+            <a:srgbClr val="F6F7F8"/>
+          </a:solidFill>
+          <a:ln w="12700">
+            <a:solidFill>
+              <a:schemeClr val="bg2">
+                <a:lumMod val="75000"/>
+              </a:schemeClr>
+            </a:solidFill>
+          </a:ln>
+        </p:spPr>
+        <p:style>
+          <a:lnRef idx="2">
+            <a:schemeClr val="accent1">
+              <a:shade val="50000"/>
+            </a:schemeClr>
+          </a:lnRef>
+          <a:fillRef idx="1">
+            <a:schemeClr val="accent1"/>
+          </a:fillRef>
+          <a:effectRef idx="0">
+            <a:schemeClr val="accent1"/>
+          </a:effectRef>
+          <a:fontRef idx="minor">
+            <a:schemeClr val="lt1"/>
+          </a:fontRef>
+        </p:style>
+        <p:txBody>
+          <a:bodyPr rtlCol="0" anchor="ctr"/>
+          <a:lstStyle/>
+          <a:p>
+            <a:pPr algn="ctr"/>
+            <a:endParaRPr lang="en-US" dirty="0"/>
+          </a:p>
+        </p:txBody>
+      </p:sp>
+      <p:sp>
+        <p:nvSpPr>
+          <p:cNvPr id="15" name="Rectangle 14">
+            <a:extLst>
+              <a:ext uri="{FF2B5EF4-FFF2-40B4-BE49-F238E27FC236}">
+                <a16:creationId xmlns:a16="http://schemas.microsoft.com/office/drawing/2014/main" id="{BFC01515-0C75-A94E-A507-2C5D301A0614}"/>
+              </a:ext>
+            </a:extLst>
+          </p:cNvPr>
+          <p:cNvSpPr/>
+          <p:nvPr/>
+        </p:nvSpPr>
+        <p:spPr>
+          <a:xfrm>
+            <a:off x="5829296" y="503965"/>
+            <a:ext cx="5192486" cy="5178378"/>
+          </a:xfrm>
+          <a:prstGeom prst="rect">
+            <a:avLst/>
+          </a:prstGeom>
+          <a:noFill/>
+          <a:ln w="12700">
+            <a:noFill/>
+          </a:ln>
+        </p:spPr>
+        <p:style>
+          <a:lnRef idx="2">
+            <a:schemeClr val="accent1">
+              <a:shade val="50000"/>
+            </a:schemeClr>
+          </a:lnRef>
+          <a:fillRef idx="1">
+            <a:schemeClr val="accent1"/>
+          </a:fillRef>
+          <a:effectRef idx="0">
+            <a:schemeClr val="accent1"/>
+          </a:effectRef>
+          <a:fontRef idx="minor">
+            <a:schemeClr val="lt1"/>
+          </a:fontRef>
+        </p:style>
+        <p:txBody>
+          <a:bodyPr rtlCol="0" anchor="ctr"/>
+          <a:lstStyle/>
+          <a:p>
+            <a:pPr algn="ctr"/>
+            <a:endParaRPr lang="en-US" dirty="0"/>
+          </a:p>
+        </p:txBody>
+      </p:sp>
+      <p:sp>
+        <p:nvSpPr>
+          <p:cNvPr id="11" name="TextBox 10">
+            <a:extLst>
+              <a:ext uri="{FF2B5EF4-FFF2-40B4-BE49-F238E27FC236}">
+                <a16:creationId xmlns:a16="http://schemas.microsoft.com/office/drawing/2014/main" id="{236DDD5B-F86E-2942-B8A4-3D1973AC4616}"/>
+              </a:ext>
+            </a:extLst>
+          </p:cNvPr>
+          <p:cNvSpPr txBox="1"/>
+          <p:nvPr/>
+        </p:nvSpPr>
+        <p:spPr>
+          <a:xfrm>
+            <a:off x="5965419" y="3183334"/>
+            <a:ext cx="4849540" cy="2215991"/>
+          </a:xfrm>
+          <a:prstGeom prst="rect">
+            <a:avLst/>
+          </a:prstGeom>
+          <a:noFill/>
+        </p:spPr>
+        <p:txBody>
+          <a:bodyPr wrap="square" rtlCol="0">
+            <a:spAutoFit/>
+          </a:bodyPr>
+          <a:lstStyle/>
+          <a:p>
+            <a:pPr algn="ctr"/>
+            <a:r>
+              <a:rPr lang="en-US" sz="13800" dirty="0">
+                <a:solidFill>
+                  <a:srgbClr val="335C7E"/>
+                </a:solidFill>
+                <a:latin typeface="SignPainter HouseScript" panose="02000006070000020004" pitchFamily="2" charset="0"/>
+                <a:cs typeface="Forte" panose="020F0502020204030204" pitchFamily="34" charset="0"/>
+              </a:rPr>
+              <a:t>Arpit</a:t>
+            </a:r>
+            <a:r>
+              <a:rPr lang="en-US" sz="9600" dirty="0">
+                <a:blipFill dpi="0" rotWithShape="1">
+                  <a:blip r:embed="rId2">
+                    <a:extLst>
+                      <a:ext uri="{28A0092B-C50C-407E-A947-70E740481C1C}">
+                        <a14:useLocalDpi xmlns:a14="http://schemas.microsoft.com/office/drawing/2010/main" val="0"/>
+                      </a:ext>
+                    </a:extLst>
+                  </a:blip>
+                  <a:srcRect/>
+                  <a:tile tx="-165100" ty="0" sx="30000" sy="50000" flip="none" algn="tl"/>
+                </a:blipFill>
+                <a:latin typeface="IBM Plex Mono ExtraLight" panose="020B0309050203000203" pitchFamily="49" charset="77"/>
+              </a:rPr>
+              <a:t> </a:t>
+            </a:r>
+          </a:p>
+        </p:txBody>
+      </p:sp>
+      <p:sp>
+        <p:nvSpPr>
+          <p:cNvPr id="16" name="TextBox 15">
+            <a:extLst>
+              <a:ext uri="{FF2B5EF4-FFF2-40B4-BE49-F238E27FC236}">
+                <a16:creationId xmlns:a16="http://schemas.microsoft.com/office/drawing/2014/main" id="{A829F524-8735-6445-BDB9-D34750F6F8E1}"/>
+              </a:ext>
+            </a:extLst>
+          </p:cNvPr>
+          <p:cNvSpPr txBox="1"/>
+          <p:nvPr/>
+        </p:nvSpPr>
+        <p:spPr>
+          <a:xfrm>
+            <a:off x="8809496" y="4651176"/>
+            <a:ext cx="1248904" cy="584775"/>
+          </a:xfrm>
+          <a:prstGeom prst="rect">
+            <a:avLst/>
+          </a:prstGeom>
+          <a:noFill/>
+        </p:spPr>
+        <p:txBody>
+          <a:bodyPr wrap="square" rtlCol="0">
+            <a:spAutoFit/>
+          </a:bodyPr>
+          <a:lstStyle/>
+          <a:p>
+            <a:r>
+              <a:rPr lang="en-US" sz="3200" b="1" dirty="0">
+                <a:solidFill>
+                  <a:srgbClr val="335C7E"/>
+                </a:solidFill>
+                <a:latin typeface="Google Sans" panose="020B0503030502040204" pitchFamily="34" charset="0"/>
+              </a:rPr>
+              <a:t>JAIN.</a:t>
+            </a:r>
+            <a:r>
+              <a:rPr lang="en-US" sz="2400" b="1" dirty="0">
+                <a:solidFill>
+                  <a:srgbClr val="335C7E"/>
+                </a:solidFill>
+                <a:latin typeface="Google Sans Medium" panose="020B0503030502040204" pitchFamily="34" charset="0"/>
+              </a:rPr>
+              <a:t> </a:t>
+            </a:r>
+          </a:p>
+        </p:txBody>
+      </p:sp>
+      <p:sp>
+        <p:nvSpPr>
+          <p:cNvPr id="18" name="Rectangle 17">
+            <a:extLst>
+              <a:ext uri="{FF2B5EF4-FFF2-40B4-BE49-F238E27FC236}">
+                <a16:creationId xmlns:a16="http://schemas.microsoft.com/office/drawing/2014/main" id="{6D60967A-5C64-3F43-8D6D-A2B42DD03D0E}"/>
+              </a:ext>
+            </a:extLst>
+          </p:cNvPr>
+          <p:cNvSpPr/>
+          <p:nvPr/>
+        </p:nvSpPr>
+        <p:spPr>
+          <a:xfrm>
+            <a:off x="8809496" y="5495979"/>
+            <a:ext cx="2160000" cy="108000"/>
+          </a:xfrm>
+          <a:prstGeom prst="rect">
+            <a:avLst/>
+          </a:prstGeom>
+          <a:solidFill>
+            <a:srgbClr val="F59E9E"/>
+          </a:solidFill>
+          <a:ln w="12700">
+            <a:noFill/>
+          </a:ln>
+        </p:spPr>
+        <p:style>
+          <a:lnRef idx="2">
+            <a:schemeClr val="accent1">
+              <a:shade val="50000"/>
+            </a:schemeClr>
+          </a:lnRef>
+          <a:fillRef idx="1">
+            <a:schemeClr val="accent1"/>
+          </a:fillRef>
+          <a:effectRef idx="0">
+            <a:schemeClr val="accent1"/>
+          </a:effectRef>
+          <a:fontRef idx="minor">
+            <a:schemeClr val="lt1"/>
+          </a:fontRef>
+        </p:style>
+        <p:txBody>
+          <a:bodyPr rtlCol="0" anchor="ctr"/>
+          <a:lstStyle/>
+          <a:p>
+            <a:pPr algn="ctr"/>
+            <a:endParaRPr lang="en-US"/>
+          </a:p>
+        </p:txBody>
+      </p:sp>
+      <p:sp>
+        <p:nvSpPr>
+          <p:cNvPr id="19" name="Rectangle 18">
+            <a:extLst>
+              <a:ext uri="{FF2B5EF4-FFF2-40B4-BE49-F238E27FC236}">
+                <a16:creationId xmlns:a16="http://schemas.microsoft.com/office/drawing/2014/main" id="{E6E91D9A-3F17-CD48-80AF-BE2201A25D59}"/>
+              </a:ext>
+            </a:extLst>
+          </p:cNvPr>
+          <p:cNvSpPr/>
+          <p:nvPr/>
+        </p:nvSpPr>
+        <p:spPr>
+          <a:xfrm>
+            <a:off x="10883897" y="612828"/>
+            <a:ext cx="108000" cy="2160000"/>
+          </a:xfrm>
+          <a:prstGeom prst="rect">
+            <a:avLst/>
+          </a:prstGeom>
+          <a:solidFill>
+            <a:srgbClr val="F1727F"/>
+          </a:solidFill>
+          <a:ln w="12700">
+            <a:noFill/>
+          </a:ln>
+        </p:spPr>
+        <p:style>
+          <a:lnRef idx="2">
+            <a:schemeClr val="accent1">
+              <a:shade val="50000"/>
+            </a:schemeClr>
+          </a:lnRef>
+          <a:fillRef idx="1">
+            <a:schemeClr val="accent1"/>
+          </a:fillRef>
+          <a:effectRef idx="0">
+            <a:schemeClr val="accent1"/>
+          </a:effectRef>
+          <a:fontRef idx="minor">
+            <a:schemeClr val="lt1"/>
+          </a:fontRef>
+        </p:style>
+        <p:txBody>
+          <a:bodyPr rtlCol="0" anchor="ctr"/>
+          <a:lstStyle/>
+          <a:p>
+            <a:pPr algn="ctr"/>
+            <a:endParaRPr lang="en-US"/>
+          </a:p>
+        </p:txBody>
+      </p:sp>
+      <p:sp>
+        <p:nvSpPr>
+          <p:cNvPr id="20" name="Rectangle 19">
+            <a:extLst>
+              <a:ext uri="{FF2B5EF4-FFF2-40B4-BE49-F238E27FC236}">
+                <a16:creationId xmlns:a16="http://schemas.microsoft.com/office/drawing/2014/main" id="{7E7A09BF-47D5-7249-8FDD-25D8B773A542}"/>
+              </a:ext>
+            </a:extLst>
+          </p:cNvPr>
+          <p:cNvSpPr/>
+          <p:nvPr/>
+        </p:nvSpPr>
+        <p:spPr>
+          <a:xfrm>
+            <a:off x="5965395" y="612828"/>
+            <a:ext cx="2160000" cy="108000"/>
+          </a:xfrm>
+          <a:prstGeom prst="rect">
+            <a:avLst/>
+          </a:prstGeom>
+          <a:solidFill>
+            <a:srgbClr val="C16C86"/>
+          </a:solidFill>
+          <a:ln w="12700">
+            <a:noFill/>
+          </a:ln>
+        </p:spPr>
+        <p:style>
+          <a:lnRef idx="2">
+            <a:schemeClr val="accent1">
+              <a:shade val="50000"/>
+            </a:schemeClr>
+          </a:lnRef>
+          <a:fillRef idx="1">
+            <a:schemeClr val="accent1"/>
+          </a:fillRef>
+          <a:effectRef idx="0">
+            <a:schemeClr val="accent1"/>
+          </a:effectRef>
+          <a:fontRef idx="minor">
+            <a:schemeClr val="lt1"/>
+          </a:fontRef>
+        </p:style>
+        <p:txBody>
+          <a:bodyPr rtlCol="0" anchor="ctr"/>
+          <a:lstStyle/>
+          <a:p>
+            <a:pPr algn="ctr"/>
+            <a:endParaRPr lang="en-US"/>
+          </a:p>
+        </p:txBody>
+      </p:sp>
+      <p:sp>
+        <p:nvSpPr>
+          <p:cNvPr id="21" name="Rectangle 20">
+            <a:extLst>
+              <a:ext uri="{FF2B5EF4-FFF2-40B4-BE49-F238E27FC236}">
+                <a16:creationId xmlns:a16="http://schemas.microsoft.com/office/drawing/2014/main" id="{8AF850E0-8C52-7B4C-A384-A31B2EAC3111}"/>
+              </a:ext>
+            </a:extLst>
+          </p:cNvPr>
+          <p:cNvSpPr/>
+          <p:nvPr/>
+        </p:nvSpPr>
+        <p:spPr>
+          <a:xfrm>
+            <a:off x="5965395" y="3432036"/>
+            <a:ext cx="108000" cy="2160000"/>
+          </a:xfrm>
+          <a:prstGeom prst="rect">
+            <a:avLst/>
+          </a:prstGeom>
+          <a:solidFill>
+            <a:srgbClr val="335C7E"/>
+          </a:solidFill>
+          <a:ln w="12700">
+            <a:noFill/>
+          </a:ln>
+        </p:spPr>
+        <p:style>
+          <a:lnRef idx="2">
+            <a:schemeClr val="accent1">
+              <a:shade val="50000"/>
+            </a:schemeClr>
+          </a:lnRef>
+          <a:fillRef idx="1">
+            <a:schemeClr val="accent1"/>
+          </a:fillRef>
+          <a:effectRef idx="0">
+            <a:schemeClr val="accent1"/>
+          </a:effectRef>
+          <a:fontRef idx="minor">
+            <a:schemeClr val="lt1"/>
+          </a:fontRef>
+        </p:style>
+        <p:txBody>
+          <a:bodyPr rtlCol="0" anchor="ctr"/>
+          <a:lstStyle/>
+          <a:p>
+            <a:pPr algn="ctr"/>
+            <a:endParaRPr lang="en-US"/>
+          </a:p>
+        </p:txBody>
+      </p:sp>
+    </p:spTree>
+    <p:extLst>
+      <p:ext uri="{BB962C8B-B14F-4D97-AF65-F5344CB8AC3E}">
+        <p14:creationId xmlns:p14="http://schemas.microsoft.com/office/powerpoint/2010/main" val="3940778331"/>
+      </p:ext>
+    </p:extLst>
+  </p:cSld>
+  <p:clrMapOvr>
+    <a:masterClrMapping/>
+  </p:clrMapOvr>
+</p:sld>
+</file>
+
 <file path=ppt/theme/theme1.xml><?xml version="1.0" encoding="utf-8"?>
 <a:theme xmlns:a="http://schemas.openxmlformats.org/drawingml/2006/main" name="Office Theme">
   <a:themeElements>

--- a/images/Logo.pptx
+++ b/images/Logo.pptx
@@ -9,6 +9,9 @@
     <p:sldId id="257" r:id="rId3"/>
     <p:sldId id="258" r:id="rId4"/>
     <p:sldId id="259" r:id="rId5"/>
+    <p:sldId id="260" r:id="rId6"/>
+    <p:sldId id="261" r:id="rId7"/>
+    <p:sldId id="262" r:id="rId8"/>
   </p:sldIdLst>
   <p:sldSz cx="12192000" cy="6858000"/>
   <p:notesSz cx="6858000" cy="9144000"/>
@@ -264,7 +267,7 @@
           <a:p>
             <a:fld id="{C7B30B39-B25F-9241-B1FA-1A9268F493D8}" type="datetimeFigureOut">
               <a:rPr lang="en-US" smtClean="0"/>
-              <a:t>11/25/19</a:t>
+              <a:t>12/7/19</a:t>
             </a:fld>
             <a:endParaRPr lang="en-US"/>
           </a:p>
@@ -464,7 +467,7 @@
           <a:p>
             <a:fld id="{C7B30B39-B25F-9241-B1FA-1A9268F493D8}" type="datetimeFigureOut">
               <a:rPr lang="en-US" smtClean="0"/>
-              <a:t>11/25/19</a:t>
+              <a:t>12/7/19</a:t>
             </a:fld>
             <a:endParaRPr lang="en-US"/>
           </a:p>
@@ -674,7 +677,7 @@
           <a:p>
             <a:fld id="{C7B30B39-B25F-9241-B1FA-1A9268F493D8}" type="datetimeFigureOut">
               <a:rPr lang="en-US" smtClean="0"/>
-              <a:t>11/25/19</a:t>
+              <a:t>12/7/19</a:t>
             </a:fld>
             <a:endParaRPr lang="en-US"/>
           </a:p>
@@ -874,7 +877,7 @@
           <a:p>
             <a:fld id="{C7B30B39-B25F-9241-B1FA-1A9268F493D8}" type="datetimeFigureOut">
               <a:rPr lang="en-US" smtClean="0"/>
-              <a:t>11/25/19</a:t>
+              <a:t>12/7/19</a:t>
             </a:fld>
             <a:endParaRPr lang="en-US"/>
           </a:p>
@@ -1150,7 +1153,7 @@
           <a:p>
             <a:fld id="{C7B30B39-B25F-9241-B1FA-1A9268F493D8}" type="datetimeFigureOut">
               <a:rPr lang="en-US" smtClean="0"/>
-              <a:t>11/25/19</a:t>
+              <a:t>12/7/19</a:t>
             </a:fld>
             <a:endParaRPr lang="en-US"/>
           </a:p>
@@ -1418,7 +1421,7 @@
           <a:p>
             <a:fld id="{C7B30B39-B25F-9241-B1FA-1A9268F493D8}" type="datetimeFigureOut">
               <a:rPr lang="en-US" smtClean="0"/>
-              <a:t>11/25/19</a:t>
+              <a:t>12/7/19</a:t>
             </a:fld>
             <a:endParaRPr lang="en-US"/>
           </a:p>
@@ -1833,7 +1836,7 @@
           <a:p>
             <a:fld id="{C7B30B39-B25F-9241-B1FA-1A9268F493D8}" type="datetimeFigureOut">
               <a:rPr lang="en-US" smtClean="0"/>
-              <a:t>11/25/19</a:t>
+              <a:t>12/7/19</a:t>
             </a:fld>
             <a:endParaRPr lang="en-US"/>
           </a:p>
@@ -1975,7 +1978,7 @@
           <a:p>
             <a:fld id="{C7B30B39-B25F-9241-B1FA-1A9268F493D8}" type="datetimeFigureOut">
               <a:rPr lang="en-US" smtClean="0"/>
-              <a:t>11/25/19</a:t>
+              <a:t>12/7/19</a:t>
             </a:fld>
             <a:endParaRPr lang="en-US"/>
           </a:p>
@@ -2088,7 +2091,7 @@
           <a:p>
             <a:fld id="{C7B30B39-B25F-9241-B1FA-1A9268F493D8}" type="datetimeFigureOut">
               <a:rPr lang="en-US" smtClean="0"/>
-              <a:t>11/25/19</a:t>
+              <a:t>12/7/19</a:t>
             </a:fld>
             <a:endParaRPr lang="en-US"/>
           </a:p>
@@ -2401,7 +2404,7 @@
           <a:p>
             <a:fld id="{C7B30B39-B25F-9241-B1FA-1A9268F493D8}" type="datetimeFigureOut">
               <a:rPr lang="en-US" smtClean="0"/>
-              <a:t>11/25/19</a:t>
+              <a:t>12/7/19</a:t>
             </a:fld>
             <a:endParaRPr lang="en-US"/>
           </a:p>
@@ -2690,7 +2693,7 @@
           <a:p>
             <a:fld id="{C7B30B39-B25F-9241-B1FA-1A9268F493D8}" type="datetimeFigureOut">
               <a:rPr lang="en-US" smtClean="0"/>
-              <a:t>11/25/19</a:t>
+              <a:t>12/7/19</a:t>
             </a:fld>
             <a:endParaRPr lang="en-US"/>
           </a:p>
@@ -2933,7 +2936,7 @@
           <a:p>
             <a:fld id="{C7B30B39-B25F-9241-B1FA-1A9268F493D8}" type="datetimeFigureOut">
               <a:rPr lang="en-US" smtClean="0"/>
-              <a:t>11/25/19</a:t>
+              <a:t>12/7/19</a:t>
             </a:fld>
             <a:endParaRPr lang="en-US"/>
           </a:p>
@@ -5207,6 +5210,1083 @@
 </p:sld>
 </file>
 
+<file path=ppt/slides/slide5.xml><?xml version="1.0" encoding="utf-8"?>
+<p:sld xmlns:a="http://schemas.openxmlformats.org/drawingml/2006/main" xmlns:r="http://schemas.openxmlformats.org/officeDocument/2006/relationships" xmlns:p="http://schemas.openxmlformats.org/presentationml/2006/main">
+  <p:cSld>
+    <p:spTree>
+      <p:nvGrpSpPr>
+        <p:cNvPr id="1" name=""/>
+        <p:cNvGrpSpPr/>
+        <p:nvPr/>
+      </p:nvGrpSpPr>
+      <p:grpSpPr>
+        <a:xfrm>
+          <a:off x="0" y="0"/>
+          <a:ext cx="0" cy="0"/>
+          <a:chOff x="0" y="0"/>
+          <a:chExt cx="0" cy="0"/>
+        </a:xfrm>
+      </p:grpSpPr>
+      <p:sp>
+        <p:nvSpPr>
+          <p:cNvPr id="6" name="Rectangle 5">
+            <a:extLst>
+              <a:ext uri="{FF2B5EF4-FFF2-40B4-BE49-F238E27FC236}">
+                <a16:creationId xmlns:a16="http://schemas.microsoft.com/office/drawing/2014/main" id="{F68F3E1A-564F-0945-A6DE-D9139DAF94D4}"/>
+              </a:ext>
+            </a:extLst>
+          </p:cNvPr>
+          <p:cNvSpPr/>
+          <p:nvPr/>
+        </p:nvSpPr>
+        <p:spPr>
+          <a:xfrm>
+            <a:off x="5965419" y="612828"/>
+            <a:ext cx="4996593" cy="4979208"/>
+          </a:xfrm>
+          <a:prstGeom prst="rect">
+            <a:avLst/>
+          </a:prstGeom>
+          <a:solidFill>
+            <a:srgbClr val="F6F7F8"/>
+          </a:solidFill>
+          <a:ln w="12700">
+            <a:solidFill>
+              <a:schemeClr val="bg2">
+                <a:lumMod val="75000"/>
+              </a:schemeClr>
+            </a:solidFill>
+          </a:ln>
+        </p:spPr>
+        <p:style>
+          <a:lnRef idx="2">
+            <a:schemeClr val="accent1">
+              <a:shade val="50000"/>
+            </a:schemeClr>
+          </a:lnRef>
+          <a:fillRef idx="1">
+            <a:schemeClr val="accent1"/>
+          </a:fillRef>
+          <a:effectRef idx="0">
+            <a:schemeClr val="accent1"/>
+          </a:effectRef>
+          <a:fontRef idx="minor">
+            <a:schemeClr val="lt1"/>
+          </a:fontRef>
+        </p:style>
+        <p:txBody>
+          <a:bodyPr rtlCol="0" anchor="ctr"/>
+          <a:lstStyle/>
+          <a:p>
+            <a:pPr algn="ctr"/>
+            <a:endParaRPr lang="en-US" dirty="0"/>
+          </a:p>
+        </p:txBody>
+      </p:sp>
+      <p:sp>
+        <p:nvSpPr>
+          <p:cNvPr id="15" name="Rectangle 14">
+            <a:extLst>
+              <a:ext uri="{FF2B5EF4-FFF2-40B4-BE49-F238E27FC236}">
+                <a16:creationId xmlns:a16="http://schemas.microsoft.com/office/drawing/2014/main" id="{BFC01515-0C75-A94E-A507-2C5D301A0614}"/>
+              </a:ext>
+            </a:extLst>
+          </p:cNvPr>
+          <p:cNvSpPr/>
+          <p:nvPr/>
+        </p:nvSpPr>
+        <p:spPr>
+          <a:xfrm>
+            <a:off x="5829296" y="503965"/>
+            <a:ext cx="5192486" cy="5178378"/>
+          </a:xfrm>
+          <a:prstGeom prst="rect">
+            <a:avLst/>
+          </a:prstGeom>
+          <a:noFill/>
+          <a:ln w="12700">
+            <a:noFill/>
+          </a:ln>
+        </p:spPr>
+        <p:style>
+          <a:lnRef idx="2">
+            <a:schemeClr val="accent1">
+              <a:shade val="50000"/>
+            </a:schemeClr>
+          </a:lnRef>
+          <a:fillRef idx="1">
+            <a:schemeClr val="accent1"/>
+          </a:fillRef>
+          <a:effectRef idx="0">
+            <a:schemeClr val="accent1"/>
+          </a:effectRef>
+          <a:fontRef idx="minor">
+            <a:schemeClr val="lt1"/>
+          </a:fontRef>
+        </p:style>
+        <p:txBody>
+          <a:bodyPr rtlCol="0" anchor="ctr"/>
+          <a:lstStyle/>
+          <a:p>
+            <a:pPr algn="ctr"/>
+            <a:endParaRPr lang="en-US" dirty="0"/>
+          </a:p>
+        </p:txBody>
+      </p:sp>
+      <p:sp>
+        <p:nvSpPr>
+          <p:cNvPr id="16" name="TextBox 15">
+            <a:extLst>
+              <a:ext uri="{FF2B5EF4-FFF2-40B4-BE49-F238E27FC236}">
+                <a16:creationId xmlns:a16="http://schemas.microsoft.com/office/drawing/2014/main" id="{A829F524-8735-6445-BDB9-D34750F6F8E1}"/>
+              </a:ext>
+            </a:extLst>
+          </p:cNvPr>
+          <p:cNvSpPr txBox="1"/>
+          <p:nvPr/>
+        </p:nvSpPr>
+        <p:spPr>
+          <a:xfrm>
+            <a:off x="8809496" y="4651176"/>
+            <a:ext cx="1412190" cy="584775"/>
+          </a:xfrm>
+          <a:prstGeom prst="rect">
+            <a:avLst/>
+          </a:prstGeom>
+          <a:noFill/>
+        </p:spPr>
+        <p:txBody>
+          <a:bodyPr wrap="square" rtlCol="0">
+            <a:spAutoFit/>
+          </a:bodyPr>
+          <a:lstStyle/>
+          <a:p>
+            <a:r>
+              <a:rPr lang="en-US" sz="3200" b="1" dirty="0">
+                <a:solidFill>
+                  <a:srgbClr val="335C7E"/>
+                </a:solidFill>
+                <a:latin typeface="Google Sans" panose="020B0503030502040204" pitchFamily="34" charset="0"/>
+              </a:rPr>
+              <a:t>BACK</a:t>
+            </a:r>
+            <a:r>
+              <a:rPr lang="en-US" sz="2400" b="1" dirty="0">
+                <a:solidFill>
+                  <a:srgbClr val="335C7E"/>
+                </a:solidFill>
+                <a:latin typeface="Google Sans Medium" panose="020B0503030502040204" pitchFamily="34" charset="0"/>
+              </a:rPr>
+              <a:t> </a:t>
+            </a:r>
+          </a:p>
+        </p:txBody>
+      </p:sp>
+      <p:sp>
+        <p:nvSpPr>
+          <p:cNvPr id="18" name="Rectangle 17">
+            <a:extLst>
+              <a:ext uri="{FF2B5EF4-FFF2-40B4-BE49-F238E27FC236}">
+                <a16:creationId xmlns:a16="http://schemas.microsoft.com/office/drawing/2014/main" id="{6D60967A-5C64-3F43-8D6D-A2B42DD03D0E}"/>
+              </a:ext>
+            </a:extLst>
+          </p:cNvPr>
+          <p:cNvSpPr/>
+          <p:nvPr/>
+        </p:nvSpPr>
+        <p:spPr>
+          <a:xfrm>
+            <a:off x="8809496" y="5495979"/>
+            <a:ext cx="2160000" cy="108000"/>
+          </a:xfrm>
+          <a:prstGeom prst="rect">
+            <a:avLst/>
+          </a:prstGeom>
+          <a:solidFill>
+            <a:srgbClr val="F59E9E"/>
+          </a:solidFill>
+          <a:ln w="12700">
+            <a:noFill/>
+          </a:ln>
+        </p:spPr>
+        <p:style>
+          <a:lnRef idx="2">
+            <a:schemeClr val="accent1">
+              <a:shade val="50000"/>
+            </a:schemeClr>
+          </a:lnRef>
+          <a:fillRef idx="1">
+            <a:schemeClr val="accent1"/>
+          </a:fillRef>
+          <a:effectRef idx="0">
+            <a:schemeClr val="accent1"/>
+          </a:effectRef>
+          <a:fontRef idx="minor">
+            <a:schemeClr val="lt1"/>
+          </a:fontRef>
+        </p:style>
+        <p:txBody>
+          <a:bodyPr rtlCol="0" anchor="ctr"/>
+          <a:lstStyle/>
+          <a:p>
+            <a:pPr algn="ctr"/>
+            <a:endParaRPr lang="en-US"/>
+          </a:p>
+        </p:txBody>
+      </p:sp>
+      <p:sp>
+        <p:nvSpPr>
+          <p:cNvPr id="19" name="Rectangle 18">
+            <a:extLst>
+              <a:ext uri="{FF2B5EF4-FFF2-40B4-BE49-F238E27FC236}">
+                <a16:creationId xmlns:a16="http://schemas.microsoft.com/office/drawing/2014/main" id="{E6E91D9A-3F17-CD48-80AF-BE2201A25D59}"/>
+              </a:ext>
+            </a:extLst>
+          </p:cNvPr>
+          <p:cNvSpPr/>
+          <p:nvPr/>
+        </p:nvSpPr>
+        <p:spPr>
+          <a:xfrm>
+            <a:off x="10883897" y="612828"/>
+            <a:ext cx="108000" cy="2160000"/>
+          </a:xfrm>
+          <a:prstGeom prst="rect">
+            <a:avLst/>
+          </a:prstGeom>
+          <a:solidFill>
+            <a:srgbClr val="F1727F"/>
+          </a:solidFill>
+          <a:ln w="12700">
+            <a:noFill/>
+          </a:ln>
+        </p:spPr>
+        <p:style>
+          <a:lnRef idx="2">
+            <a:schemeClr val="accent1">
+              <a:shade val="50000"/>
+            </a:schemeClr>
+          </a:lnRef>
+          <a:fillRef idx="1">
+            <a:schemeClr val="accent1"/>
+          </a:fillRef>
+          <a:effectRef idx="0">
+            <a:schemeClr val="accent1"/>
+          </a:effectRef>
+          <a:fontRef idx="minor">
+            <a:schemeClr val="lt1"/>
+          </a:fontRef>
+        </p:style>
+        <p:txBody>
+          <a:bodyPr rtlCol="0" anchor="ctr"/>
+          <a:lstStyle/>
+          <a:p>
+            <a:pPr algn="ctr"/>
+            <a:endParaRPr lang="en-US"/>
+          </a:p>
+        </p:txBody>
+      </p:sp>
+      <p:sp>
+        <p:nvSpPr>
+          <p:cNvPr id="20" name="Rectangle 19">
+            <a:extLst>
+              <a:ext uri="{FF2B5EF4-FFF2-40B4-BE49-F238E27FC236}">
+                <a16:creationId xmlns:a16="http://schemas.microsoft.com/office/drawing/2014/main" id="{7E7A09BF-47D5-7249-8FDD-25D8B773A542}"/>
+              </a:ext>
+            </a:extLst>
+          </p:cNvPr>
+          <p:cNvSpPr/>
+          <p:nvPr/>
+        </p:nvSpPr>
+        <p:spPr>
+          <a:xfrm>
+            <a:off x="5965395" y="612828"/>
+            <a:ext cx="2160000" cy="108000"/>
+          </a:xfrm>
+          <a:prstGeom prst="rect">
+            <a:avLst/>
+          </a:prstGeom>
+          <a:solidFill>
+            <a:srgbClr val="C16C86"/>
+          </a:solidFill>
+          <a:ln w="12700">
+            <a:noFill/>
+          </a:ln>
+        </p:spPr>
+        <p:style>
+          <a:lnRef idx="2">
+            <a:schemeClr val="accent1">
+              <a:shade val="50000"/>
+            </a:schemeClr>
+          </a:lnRef>
+          <a:fillRef idx="1">
+            <a:schemeClr val="accent1"/>
+          </a:fillRef>
+          <a:effectRef idx="0">
+            <a:schemeClr val="accent1"/>
+          </a:effectRef>
+          <a:fontRef idx="minor">
+            <a:schemeClr val="lt1"/>
+          </a:fontRef>
+        </p:style>
+        <p:txBody>
+          <a:bodyPr rtlCol="0" anchor="ctr"/>
+          <a:lstStyle/>
+          <a:p>
+            <a:pPr algn="ctr"/>
+            <a:endParaRPr lang="en-US"/>
+          </a:p>
+        </p:txBody>
+      </p:sp>
+      <p:sp>
+        <p:nvSpPr>
+          <p:cNvPr id="21" name="Rectangle 20">
+            <a:extLst>
+              <a:ext uri="{FF2B5EF4-FFF2-40B4-BE49-F238E27FC236}">
+                <a16:creationId xmlns:a16="http://schemas.microsoft.com/office/drawing/2014/main" id="{8AF850E0-8C52-7B4C-A384-A31B2EAC3111}"/>
+              </a:ext>
+            </a:extLst>
+          </p:cNvPr>
+          <p:cNvSpPr/>
+          <p:nvPr/>
+        </p:nvSpPr>
+        <p:spPr>
+          <a:xfrm>
+            <a:off x="5965395" y="3432036"/>
+            <a:ext cx="108000" cy="2160000"/>
+          </a:xfrm>
+          <a:prstGeom prst="rect">
+            <a:avLst/>
+          </a:prstGeom>
+          <a:solidFill>
+            <a:srgbClr val="335C7E"/>
+          </a:solidFill>
+          <a:ln w="12700">
+            <a:noFill/>
+          </a:ln>
+        </p:spPr>
+        <p:style>
+          <a:lnRef idx="2">
+            <a:schemeClr val="accent1">
+              <a:shade val="50000"/>
+            </a:schemeClr>
+          </a:lnRef>
+          <a:fillRef idx="1">
+            <a:schemeClr val="accent1"/>
+          </a:fillRef>
+          <a:effectRef idx="0">
+            <a:schemeClr val="accent1"/>
+          </a:effectRef>
+          <a:fontRef idx="minor">
+            <a:schemeClr val="lt1"/>
+          </a:fontRef>
+        </p:style>
+        <p:txBody>
+          <a:bodyPr rtlCol="0" anchor="ctr"/>
+          <a:lstStyle/>
+          <a:p>
+            <a:pPr algn="ctr"/>
+            <a:endParaRPr lang="en-US"/>
+          </a:p>
+        </p:txBody>
+      </p:sp>
+      <p:sp>
+        <p:nvSpPr>
+          <p:cNvPr id="3" name="L-shape 2">
+            <a:extLst>
+              <a:ext uri="{FF2B5EF4-FFF2-40B4-BE49-F238E27FC236}">
+                <a16:creationId xmlns:a16="http://schemas.microsoft.com/office/drawing/2014/main" id="{9DAFBCD1-02A0-C243-AD90-AE00844EA27C}"/>
+              </a:ext>
+            </a:extLst>
+          </p:cNvPr>
+          <p:cNvSpPr/>
+          <p:nvPr/>
+        </p:nvSpPr>
+        <p:spPr>
+          <a:xfrm rot="2652370">
+            <a:off x="7264995" y="2242032"/>
+            <a:ext cx="1720800" cy="1720800"/>
+          </a:xfrm>
+          <a:prstGeom prst="corner">
+            <a:avLst>
+              <a:gd name="adj1" fmla="val 28205"/>
+              <a:gd name="adj2" fmla="val 27564"/>
+            </a:avLst>
+          </a:prstGeom>
+          <a:solidFill>
+            <a:srgbClr val="335C7E"/>
+          </a:solidFill>
+          <a:ln>
+            <a:noFill/>
+          </a:ln>
+        </p:spPr>
+        <p:style>
+          <a:lnRef idx="2">
+            <a:schemeClr val="accent1">
+              <a:shade val="50000"/>
+            </a:schemeClr>
+          </a:lnRef>
+          <a:fillRef idx="1">
+            <a:schemeClr val="accent1"/>
+          </a:fillRef>
+          <a:effectRef idx="0">
+            <a:schemeClr val="accent1"/>
+          </a:effectRef>
+          <a:fontRef idx="minor">
+            <a:schemeClr val="lt1"/>
+          </a:fontRef>
+        </p:style>
+        <p:txBody>
+          <a:bodyPr rtlCol="0" anchor="ctr"/>
+          <a:lstStyle/>
+          <a:p>
+            <a:pPr algn="ctr"/>
+            <a:endParaRPr lang="en-US"/>
+          </a:p>
+        </p:txBody>
+      </p:sp>
+      <p:sp>
+        <p:nvSpPr>
+          <p:cNvPr id="7" name="Rectangle 6">
+            <a:extLst>
+              <a:ext uri="{FF2B5EF4-FFF2-40B4-BE49-F238E27FC236}">
+                <a16:creationId xmlns:a16="http://schemas.microsoft.com/office/drawing/2014/main" id="{3F22B226-3D3D-0C4D-A38D-EAFD59989359}"/>
+              </a:ext>
+            </a:extLst>
+          </p:cNvPr>
+          <p:cNvSpPr/>
+          <p:nvPr/>
+        </p:nvSpPr>
+        <p:spPr>
+          <a:xfrm>
+            <a:off x="7409009" y="2825903"/>
+            <a:ext cx="2069182" cy="553057"/>
+          </a:xfrm>
+          <a:prstGeom prst="rect">
+            <a:avLst/>
+          </a:prstGeom>
+          <a:solidFill>
+            <a:srgbClr val="335C7E"/>
+          </a:solidFill>
+          <a:ln>
+            <a:noFill/>
+          </a:ln>
+        </p:spPr>
+        <p:style>
+          <a:lnRef idx="2">
+            <a:schemeClr val="accent1">
+              <a:shade val="50000"/>
+            </a:schemeClr>
+          </a:lnRef>
+          <a:fillRef idx="1">
+            <a:schemeClr val="accent1"/>
+          </a:fillRef>
+          <a:effectRef idx="0">
+            <a:schemeClr val="accent1"/>
+          </a:effectRef>
+          <a:fontRef idx="minor">
+            <a:schemeClr val="lt1"/>
+          </a:fontRef>
+        </p:style>
+        <p:txBody>
+          <a:bodyPr rtlCol="0" anchor="ctr"/>
+          <a:lstStyle/>
+          <a:p>
+            <a:pPr algn="ctr"/>
+            <a:endParaRPr lang="en-US"/>
+          </a:p>
+        </p:txBody>
+      </p:sp>
+    </p:spTree>
+    <p:extLst>
+      <p:ext uri="{BB962C8B-B14F-4D97-AF65-F5344CB8AC3E}">
+        <p14:creationId xmlns:p14="http://schemas.microsoft.com/office/powerpoint/2010/main" val="1818785394"/>
+      </p:ext>
+    </p:extLst>
+  </p:cSld>
+  <p:clrMapOvr>
+    <a:masterClrMapping/>
+  </p:clrMapOvr>
+</p:sld>
+</file>
+
+<file path=ppt/slides/slide6.xml><?xml version="1.0" encoding="utf-8"?>
+<p:sld xmlns:a="http://schemas.openxmlformats.org/drawingml/2006/main" xmlns:r="http://schemas.openxmlformats.org/officeDocument/2006/relationships" xmlns:p="http://schemas.openxmlformats.org/presentationml/2006/main">
+  <p:cSld>
+    <p:spTree>
+      <p:nvGrpSpPr>
+        <p:cNvPr id="1" name=""/>
+        <p:cNvGrpSpPr/>
+        <p:nvPr/>
+      </p:nvGrpSpPr>
+      <p:grpSpPr>
+        <a:xfrm>
+          <a:off x="0" y="0"/>
+          <a:ext cx="0" cy="0"/>
+          <a:chOff x="0" y="0"/>
+          <a:chExt cx="0" cy="0"/>
+        </a:xfrm>
+      </p:grpSpPr>
+      <p:sp>
+        <p:nvSpPr>
+          <p:cNvPr id="6" name="Rectangle 5">
+            <a:extLst>
+              <a:ext uri="{FF2B5EF4-FFF2-40B4-BE49-F238E27FC236}">
+                <a16:creationId xmlns:a16="http://schemas.microsoft.com/office/drawing/2014/main" id="{F68F3E1A-564F-0945-A6DE-D9139DAF94D4}"/>
+              </a:ext>
+            </a:extLst>
+          </p:cNvPr>
+          <p:cNvSpPr/>
+          <p:nvPr/>
+        </p:nvSpPr>
+        <p:spPr>
+          <a:xfrm>
+            <a:off x="7064877" y="612828"/>
+            <a:ext cx="4996593" cy="4979208"/>
+          </a:xfrm>
+          <a:prstGeom prst="rect">
+            <a:avLst/>
+          </a:prstGeom>
+          <a:solidFill>
+            <a:srgbClr val="F6F7F8"/>
+          </a:solidFill>
+          <a:ln w="12700">
+            <a:noFill/>
+          </a:ln>
+        </p:spPr>
+        <p:style>
+          <a:lnRef idx="2">
+            <a:schemeClr val="accent1">
+              <a:shade val="50000"/>
+            </a:schemeClr>
+          </a:lnRef>
+          <a:fillRef idx="1">
+            <a:schemeClr val="accent1"/>
+          </a:fillRef>
+          <a:effectRef idx="0">
+            <a:schemeClr val="accent1"/>
+          </a:effectRef>
+          <a:fontRef idx="minor">
+            <a:schemeClr val="lt1"/>
+          </a:fontRef>
+        </p:style>
+        <p:txBody>
+          <a:bodyPr rtlCol="0" anchor="ctr"/>
+          <a:lstStyle/>
+          <a:p>
+            <a:pPr algn="ctr"/>
+            <a:endParaRPr lang="en-US" dirty="0"/>
+          </a:p>
+        </p:txBody>
+      </p:sp>
+      <p:sp>
+        <p:nvSpPr>
+          <p:cNvPr id="15" name="Rectangle 14">
+            <a:extLst>
+              <a:ext uri="{FF2B5EF4-FFF2-40B4-BE49-F238E27FC236}">
+                <a16:creationId xmlns:a16="http://schemas.microsoft.com/office/drawing/2014/main" id="{BFC01515-0C75-A94E-A507-2C5D301A0614}"/>
+              </a:ext>
+            </a:extLst>
+          </p:cNvPr>
+          <p:cNvSpPr/>
+          <p:nvPr/>
+        </p:nvSpPr>
+        <p:spPr>
+          <a:xfrm>
+            <a:off x="6928754" y="503965"/>
+            <a:ext cx="5192486" cy="5178378"/>
+          </a:xfrm>
+          <a:prstGeom prst="rect">
+            <a:avLst/>
+          </a:prstGeom>
+          <a:noFill/>
+          <a:ln w="12700">
+            <a:noFill/>
+          </a:ln>
+        </p:spPr>
+        <p:style>
+          <a:lnRef idx="2">
+            <a:schemeClr val="accent1">
+              <a:shade val="50000"/>
+            </a:schemeClr>
+          </a:lnRef>
+          <a:fillRef idx="1">
+            <a:schemeClr val="accent1"/>
+          </a:fillRef>
+          <a:effectRef idx="0">
+            <a:schemeClr val="accent1"/>
+          </a:effectRef>
+          <a:fontRef idx="minor">
+            <a:schemeClr val="lt1"/>
+          </a:fontRef>
+        </p:style>
+        <p:txBody>
+          <a:bodyPr rtlCol="0" anchor="ctr"/>
+          <a:lstStyle/>
+          <a:p>
+            <a:pPr algn="ctr"/>
+            <a:endParaRPr lang="en-US" dirty="0"/>
+          </a:p>
+        </p:txBody>
+      </p:sp>
+      <p:sp>
+        <p:nvSpPr>
+          <p:cNvPr id="16" name="TextBox 15">
+            <a:extLst>
+              <a:ext uri="{FF2B5EF4-FFF2-40B4-BE49-F238E27FC236}">
+                <a16:creationId xmlns:a16="http://schemas.microsoft.com/office/drawing/2014/main" id="{A829F524-8735-6445-BDB9-D34750F6F8E1}"/>
+              </a:ext>
+            </a:extLst>
+          </p:cNvPr>
+          <p:cNvSpPr txBox="1"/>
+          <p:nvPr/>
+        </p:nvSpPr>
+        <p:spPr>
+          <a:xfrm>
+            <a:off x="9908954" y="4651176"/>
+            <a:ext cx="1412190" cy="584775"/>
+          </a:xfrm>
+          <a:prstGeom prst="rect">
+            <a:avLst/>
+          </a:prstGeom>
+          <a:noFill/>
+        </p:spPr>
+        <p:txBody>
+          <a:bodyPr wrap="square" rtlCol="0">
+            <a:spAutoFit/>
+          </a:bodyPr>
+          <a:lstStyle/>
+          <a:p>
+            <a:r>
+              <a:rPr lang="en-US" sz="3200" b="1" dirty="0">
+                <a:solidFill>
+                  <a:srgbClr val="335C7E"/>
+                </a:solidFill>
+                <a:latin typeface="Google Sans" panose="020B0503030502040204" pitchFamily="34" charset="0"/>
+              </a:rPr>
+              <a:t>BACK</a:t>
+            </a:r>
+            <a:r>
+              <a:rPr lang="en-US" sz="2400" b="1" dirty="0">
+                <a:solidFill>
+                  <a:srgbClr val="335C7E"/>
+                </a:solidFill>
+                <a:latin typeface="Google Sans Medium" panose="020B0503030502040204" pitchFamily="34" charset="0"/>
+              </a:rPr>
+              <a:t> </a:t>
+            </a:r>
+          </a:p>
+        </p:txBody>
+      </p:sp>
+      <p:sp>
+        <p:nvSpPr>
+          <p:cNvPr id="3" name="L-shape 2">
+            <a:extLst>
+              <a:ext uri="{FF2B5EF4-FFF2-40B4-BE49-F238E27FC236}">
+                <a16:creationId xmlns:a16="http://schemas.microsoft.com/office/drawing/2014/main" id="{9DAFBCD1-02A0-C243-AD90-AE00844EA27C}"/>
+              </a:ext>
+            </a:extLst>
+          </p:cNvPr>
+          <p:cNvSpPr/>
+          <p:nvPr/>
+        </p:nvSpPr>
+        <p:spPr>
+          <a:xfrm rot="2652370">
+            <a:off x="8364453" y="2242032"/>
+            <a:ext cx="1720800" cy="1720800"/>
+          </a:xfrm>
+          <a:prstGeom prst="corner">
+            <a:avLst>
+              <a:gd name="adj1" fmla="val 28205"/>
+              <a:gd name="adj2" fmla="val 27564"/>
+            </a:avLst>
+          </a:prstGeom>
+          <a:solidFill>
+            <a:srgbClr val="335C7E"/>
+          </a:solidFill>
+          <a:ln>
+            <a:noFill/>
+          </a:ln>
+        </p:spPr>
+        <p:style>
+          <a:lnRef idx="2">
+            <a:schemeClr val="accent1">
+              <a:shade val="50000"/>
+            </a:schemeClr>
+          </a:lnRef>
+          <a:fillRef idx="1">
+            <a:schemeClr val="accent1"/>
+          </a:fillRef>
+          <a:effectRef idx="0">
+            <a:schemeClr val="accent1"/>
+          </a:effectRef>
+          <a:fontRef idx="minor">
+            <a:schemeClr val="lt1"/>
+          </a:fontRef>
+        </p:style>
+        <p:txBody>
+          <a:bodyPr rtlCol="0" anchor="ctr"/>
+          <a:lstStyle/>
+          <a:p>
+            <a:pPr algn="ctr"/>
+            <a:endParaRPr lang="en-US"/>
+          </a:p>
+        </p:txBody>
+      </p:sp>
+      <p:sp>
+        <p:nvSpPr>
+          <p:cNvPr id="7" name="Rectangle 6">
+            <a:extLst>
+              <a:ext uri="{FF2B5EF4-FFF2-40B4-BE49-F238E27FC236}">
+                <a16:creationId xmlns:a16="http://schemas.microsoft.com/office/drawing/2014/main" id="{3F22B226-3D3D-0C4D-A38D-EAFD59989359}"/>
+              </a:ext>
+            </a:extLst>
+          </p:cNvPr>
+          <p:cNvSpPr/>
+          <p:nvPr/>
+        </p:nvSpPr>
+        <p:spPr>
+          <a:xfrm>
+            <a:off x="8508467" y="2825903"/>
+            <a:ext cx="2069182" cy="553057"/>
+          </a:xfrm>
+          <a:prstGeom prst="rect">
+            <a:avLst/>
+          </a:prstGeom>
+          <a:solidFill>
+            <a:srgbClr val="335C7E"/>
+          </a:solidFill>
+          <a:ln>
+            <a:noFill/>
+          </a:ln>
+        </p:spPr>
+        <p:style>
+          <a:lnRef idx="2">
+            <a:schemeClr val="accent1">
+              <a:shade val="50000"/>
+            </a:schemeClr>
+          </a:lnRef>
+          <a:fillRef idx="1">
+            <a:schemeClr val="accent1"/>
+          </a:fillRef>
+          <a:effectRef idx="0">
+            <a:schemeClr val="accent1"/>
+          </a:effectRef>
+          <a:fontRef idx="minor">
+            <a:schemeClr val="lt1"/>
+          </a:fontRef>
+        </p:style>
+        <p:txBody>
+          <a:bodyPr rtlCol="0" anchor="ctr"/>
+          <a:lstStyle/>
+          <a:p>
+            <a:pPr algn="ctr"/>
+            <a:endParaRPr lang="en-US"/>
+          </a:p>
+        </p:txBody>
+      </p:sp>
+      <p:sp>
+        <p:nvSpPr>
+          <p:cNvPr id="14" name="L-shape 13">
+            <a:extLst>
+              <a:ext uri="{FF2B5EF4-FFF2-40B4-BE49-F238E27FC236}">
+                <a16:creationId xmlns:a16="http://schemas.microsoft.com/office/drawing/2014/main" id="{485B310F-9058-C34C-857B-7E8BBF30E2DF}"/>
+              </a:ext>
+            </a:extLst>
+          </p:cNvPr>
+          <p:cNvSpPr/>
+          <p:nvPr/>
+        </p:nvSpPr>
+        <p:spPr>
+          <a:xfrm rot="2652370">
+            <a:off x="1243808" y="1642009"/>
+            <a:ext cx="1720800" cy="1720800"/>
+          </a:xfrm>
+          <a:prstGeom prst="corner">
+            <a:avLst>
+              <a:gd name="adj1" fmla="val 23254"/>
+              <a:gd name="adj2" fmla="val 21743"/>
+            </a:avLst>
+          </a:prstGeom>
+          <a:solidFill>
+            <a:srgbClr val="F3F1F4"/>
+          </a:solidFill>
+          <a:ln>
+            <a:noFill/>
+          </a:ln>
+        </p:spPr>
+        <p:style>
+          <a:lnRef idx="2">
+            <a:schemeClr val="accent1">
+              <a:shade val="50000"/>
+            </a:schemeClr>
+          </a:lnRef>
+          <a:fillRef idx="1">
+            <a:schemeClr val="accent1"/>
+          </a:fillRef>
+          <a:effectRef idx="0">
+            <a:schemeClr val="accent1"/>
+          </a:effectRef>
+          <a:fontRef idx="minor">
+            <a:schemeClr val="lt1"/>
+          </a:fontRef>
+        </p:style>
+        <p:txBody>
+          <a:bodyPr rtlCol="0" anchor="ctr"/>
+          <a:lstStyle/>
+          <a:p>
+            <a:pPr algn="ctr"/>
+            <a:endParaRPr lang="en-US"/>
+          </a:p>
+        </p:txBody>
+      </p:sp>
+      <p:sp>
+        <p:nvSpPr>
+          <p:cNvPr id="17" name="Rectangle 16">
+            <a:extLst>
+              <a:ext uri="{FF2B5EF4-FFF2-40B4-BE49-F238E27FC236}">
+                <a16:creationId xmlns:a16="http://schemas.microsoft.com/office/drawing/2014/main" id="{057DA880-815F-7147-B000-379DD7AB3ACF}"/>
+              </a:ext>
+            </a:extLst>
+          </p:cNvPr>
+          <p:cNvSpPr/>
+          <p:nvPr/>
+        </p:nvSpPr>
+        <p:spPr>
+          <a:xfrm>
+            <a:off x="1387822" y="2299483"/>
+            <a:ext cx="2069182" cy="405851"/>
+          </a:xfrm>
+          <a:prstGeom prst="rect">
+            <a:avLst/>
+          </a:prstGeom>
+          <a:solidFill>
+            <a:srgbClr val="F3F1F4"/>
+          </a:solidFill>
+          <a:ln>
+            <a:noFill/>
+          </a:ln>
+        </p:spPr>
+        <p:style>
+          <a:lnRef idx="2">
+            <a:schemeClr val="accent1">
+              <a:shade val="50000"/>
+            </a:schemeClr>
+          </a:lnRef>
+          <a:fillRef idx="1">
+            <a:schemeClr val="accent1"/>
+          </a:fillRef>
+          <a:effectRef idx="0">
+            <a:schemeClr val="accent1"/>
+          </a:effectRef>
+          <a:fontRef idx="minor">
+            <a:schemeClr val="lt1"/>
+          </a:fontRef>
+        </p:style>
+        <p:txBody>
+          <a:bodyPr rtlCol="0" anchor="ctr"/>
+          <a:lstStyle/>
+          <a:p>
+            <a:pPr algn="ctr"/>
+            <a:endParaRPr lang="en-US"/>
+          </a:p>
+        </p:txBody>
+      </p:sp>
+      <p:sp>
+        <p:nvSpPr>
+          <p:cNvPr id="5" name="Rectangle 4">
+            <a:extLst>
+              <a:ext uri="{FF2B5EF4-FFF2-40B4-BE49-F238E27FC236}">
+                <a16:creationId xmlns:a16="http://schemas.microsoft.com/office/drawing/2014/main" id="{9A427F68-04E0-7C40-B84B-D8B8ADB897CF}"/>
+              </a:ext>
+            </a:extLst>
+          </p:cNvPr>
+          <p:cNvSpPr/>
+          <p:nvPr/>
+        </p:nvSpPr>
+        <p:spPr>
+          <a:xfrm>
+            <a:off x="154684" y="438303"/>
+            <a:ext cx="5756259" cy="4580011"/>
+          </a:xfrm>
+          <a:prstGeom prst="rect">
+            <a:avLst/>
+          </a:prstGeom>
+          <a:noFill/>
+          <a:ln>
+            <a:noFill/>
+          </a:ln>
+        </p:spPr>
+        <p:style>
+          <a:lnRef idx="2">
+            <a:schemeClr val="accent1">
+              <a:shade val="50000"/>
+            </a:schemeClr>
+          </a:lnRef>
+          <a:fillRef idx="1">
+            <a:schemeClr val="accent1"/>
+          </a:fillRef>
+          <a:effectRef idx="0">
+            <a:schemeClr val="accent1"/>
+          </a:effectRef>
+          <a:fontRef idx="minor">
+            <a:schemeClr val="lt1"/>
+          </a:fontRef>
+        </p:style>
+        <p:txBody>
+          <a:bodyPr rtlCol="0" anchor="ctr"/>
+          <a:lstStyle/>
+          <a:p>
+            <a:pPr algn="ctr"/>
+            <a:endParaRPr lang="en-US"/>
+          </a:p>
+        </p:txBody>
+      </p:sp>
+    </p:spTree>
+    <p:extLst>
+      <p:ext uri="{BB962C8B-B14F-4D97-AF65-F5344CB8AC3E}">
+        <p14:creationId xmlns:p14="http://schemas.microsoft.com/office/powerpoint/2010/main" val="4276385129"/>
+      </p:ext>
+    </p:extLst>
+  </p:cSld>
+  <p:clrMapOvr>
+    <a:masterClrMapping/>
+  </p:clrMapOvr>
+</p:sld>
+</file>
+
+<file path=ppt/slides/slide7.xml><?xml version="1.0" encoding="utf-8"?>
+<p:sld xmlns:a="http://schemas.openxmlformats.org/drawingml/2006/main" xmlns:r="http://schemas.openxmlformats.org/officeDocument/2006/relationships" xmlns:p="http://schemas.openxmlformats.org/presentationml/2006/main">
+  <p:cSld>
+    <p:spTree>
+      <p:nvGrpSpPr>
+        <p:cNvPr id="1" name=""/>
+        <p:cNvGrpSpPr/>
+        <p:nvPr/>
+      </p:nvGrpSpPr>
+      <p:grpSpPr>
+        <a:xfrm>
+          <a:off x="0" y="0"/>
+          <a:ext cx="0" cy="0"/>
+          <a:chOff x="0" y="0"/>
+          <a:chExt cx="0" cy="0"/>
+        </a:xfrm>
+      </p:grpSpPr>
+      <p:sp>
+        <p:nvSpPr>
+          <p:cNvPr id="5" name="Rectangle 4">
+            <a:extLst>
+              <a:ext uri="{FF2B5EF4-FFF2-40B4-BE49-F238E27FC236}">
+                <a16:creationId xmlns:a16="http://schemas.microsoft.com/office/drawing/2014/main" id="{9A427F68-04E0-7C40-B84B-D8B8ADB897CF}"/>
+              </a:ext>
+            </a:extLst>
+          </p:cNvPr>
+          <p:cNvSpPr/>
+          <p:nvPr/>
+        </p:nvSpPr>
+        <p:spPr>
+          <a:xfrm>
+            <a:off x="154684" y="438303"/>
+            <a:ext cx="5756259" cy="4580011"/>
+          </a:xfrm>
+          <a:prstGeom prst="rect">
+            <a:avLst/>
+          </a:prstGeom>
+          <a:noFill/>
+          <a:ln>
+            <a:noFill/>
+          </a:ln>
+        </p:spPr>
+        <p:style>
+          <a:lnRef idx="2">
+            <a:schemeClr val="accent1">
+              <a:shade val="50000"/>
+            </a:schemeClr>
+          </a:lnRef>
+          <a:fillRef idx="1">
+            <a:schemeClr val="accent1"/>
+          </a:fillRef>
+          <a:effectRef idx="0">
+            <a:schemeClr val="accent1"/>
+          </a:effectRef>
+          <a:fontRef idx="minor">
+            <a:schemeClr val="lt1"/>
+          </a:fontRef>
+        </p:style>
+        <p:txBody>
+          <a:bodyPr rtlCol="0" anchor="ctr"/>
+          <a:lstStyle/>
+          <a:p>
+            <a:pPr algn="ctr"/>
+            <a:endParaRPr lang="en-US"/>
+          </a:p>
+        </p:txBody>
+      </p:sp>
+      <p:sp>
+        <p:nvSpPr>
+          <p:cNvPr id="8" name="Rectangle 7">
+            <a:extLst>
+              <a:ext uri="{FF2B5EF4-FFF2-40B4-BE49-F238E27FC236}">
+                <a16:creationId xmlns:a16="http://schemas.microsoft.com/office/drawing/2014/main" id="{A1685247-8415-414F-B3CE-089251D6C360}"/>
+              </a:ext>
+            </a:extLst>
+          </p:cNvPr>
+          <p:cNvSpPr/>
+          <p:nvPr/>
+        </p:nvSpPr>
+        <p:spPr>
+          <a:xfrm>
+            <a:off x="12700" y="3000375"/>
+            <a:ext cx="12166600" cy="148514"/>
+          </a:xfrm>
+          <a:prstGeom prst="rect">
+            <a:avLst/>
+          </a:prstGeom>
+          <a:solidFill>
+            <a:srgbClr val="339889"/>
+          </a:solidFill>
+          <a:ln>
+            <a:noFill/>
+          </a:ln>
+        </p:spPr>
+        <p:style>
+          <a:lnRef idx="2">
+            <a:schemeClr val="accent1">
+              <a:shade val="50000"/>
+            </a:schemeClr>
+          </a:lnRef>
+          <a:fillRef idx="1">
+            <a:schemeClr val="accent1"/>
+          </a:fillRef>
+          <a:effectRef idx="0">
+            <a:schemeClr val="accent1"/>
+          </a:effectRef>
+          <a:fontRef idx="minor">
+            <a:schemeClr val="lt1"/>
+          </a:fontRef>
+        </p:style>
+        <p:txBody>
+          <a:bodyPr rtlCol="0" anchor="ctr"/>
+          <a:lstStyle/>
+          <a:p>
+            <a:pPr algn="ctr"/>
+            <a:endParaRPr lang="en-US"/>
+          </a:p>
+        </p:txBody>
+      </p:sp>
+    </p:spTree>
+    <p:extLst>
+      <p:ext uri="{BB962C8B-B14F-4D97-AF65-F5344CB8AC3E}">
+        <p14:creationId xmlns:p14="http://schemas.microsoft.com/office/powerpoint/2010/main" val="4143478526"/>
+      </p:ext>
+    </p:extLst>
+  </p:cSld>
+  <p:clrMapOvr>
+    <a:masterClrMapping/>
+  </p:clrMapOvr>
+</p:sld>
+</file>
+
 <file path=ppt/theme/theme1.xml><?xml version="1.0" encoding="utf-8"?>
 <a:theme xmlns:a="http://schemas.openxmlformats.org/drawingml/2006/main" name="Office Theme">
   <a:themeElements>

--- a/images/Logo.pptx
+++ b/images/Logo.pptx
@@ -267,7 +267,7 @@
           <a:p>
             <a:fld id="{C7B30B39-B25F-9241-B1FA-1A9268F493D8}" type="datetimeFigureOut">
               <a:rPr lang="en-US" smtClean="0"/>
-              <a:t>12/7/19</a:t>
+              <a:t>12/23/19</a:t>
             </a:fld>
             <a:endParaRPr lang="en-US"/>
           </a:p>
@@ -467,7 +467,7 @@
           <a:p>
             <a:fld id="{C7B30B39-B25F-9241-B1FA-1A9268F493D8}" type="datetimeFigureOut">
               <a:rPr lang="en-US" smtClean="0"/>
-              <a:t>12/7/19</a:t>
+              <a:t>12/23/19</a:t>
             </a:fld>
             <a:endParaRPr lang="en-US"/>
           </a:p>
@@ -677,7 +677,7 @@
           <a:p>
             <a:fld id="{C7B30B39-B25F-9241-B1FA-1A9268F493D8}" type="datetimeFigureOut">
               <a:rPr lang="en-US" smtClean="0"/>
-              <a:t>12/7/19</a:t>
+              <a:t>12/23/19</a:t>
             </a:fld>
             <a:endParaRPr lang="en-US"/>
           </a:p>
@@ -877,7 +877,7 @@
           <a:p>
             <a:fld id="{C7B30B39-B25F-9241-B1FA-1A9268F493D8}" type="datetimeFigureOut">
               <a:rPr lang="en-US" smtClean="0"/>
-              <a:t>12/7/19</a:t>
+              <a:t>12/23/19</a:t>
             </a:fld>
             <a:endParaRPr lang="en-US"/>
           </a:p>
@@ -1153,7 +1153,7 @@
           <a:p>
             <a:fld id="{C7B30B39-B25F-9241-B1FA-1A9268F493D8}" type="datetimeFigureOut">
               <a:rPr lang="en-US" smtClean="0"/>
-              <a:t>12/7/19</a:t>
+              <a:t>12/23/19</a:t>
             </a:fld>
             <a:endParaRPr lang="en-US"/>
           </a:p>
@@ -1421,7 +1421,7 @@
           <a:p>
             <a:fld id="{C7B30B39-B25F-9241-B1FA-1A9268F493D8}" type="datetimeFigureOut">
               <a:rPr lang="en-US" smtClean="0"/>
-              <a:t>12/7/19</a:t>
+              <a:t>12/23/19</a:t>
             </a:fld>
             <a:endParaRPr lang="en-US"/>
           </a:p>
@@ -1836,7 +1836,7 @@
           <a:p>
             <a:fld id="{C7B30B39-B25F-9241-B1FA-1A9268F493D8}" type="datetimeFigureOut">
               <a:rPr lang="en-US" smtClean="0"/>
-              <a:t>12/7/19</a:t>
+              <a:t>12/23/19</a:t>
             </a:fld>
             <a:endParaRPr lang="en-US"/>
           </a:p>
@@ -1978,7 +1978,7 @@
           <a:p>
             <a:fld id="{C7B30B39-B25F-9241-B1FA-1A9268F493D8}" type="datetimeFigureOut">
               <a:rPr lang="en-US" smtClean="0"/>
-              <a:t>12/7/19</a:t>
+              <a:t>12/23/19</a:t>
             </a:fld>
             <a:endParaRPr lang="en-US"/>
           </a:p>
@@ -2091,7 +2091,7 @@
           <a:p>
             <a:fld id="{C7B30B39-B25F-9241-B1FA-1A9268F493D8}" type="datetimeFigureOut">
               <a:rPr lang="en-US" smtClean="0"/>
-              <a:t>12/7/19</a:t>
+              <a:t>12/23/19</a:t>
             </a:fld>
             <a:endParaRPr lang="en-US"/>
           </a:p>
@@ -2404,7 +2404,7 @@
           <a:p>
             <a:fld id="{C7B30B39-B25F-9241-B1FA-1A9268F493D8}" type="datetimeFigureOut">
               <a:rPr lang="en-US" smtClean="0"/>
-              <a:t>12/7/19</a:t>
+              <a:t>12/23/19</a:t>
             </a:fld>
             <a:endParaRPr lang="en-US"/>
           </a:p>
@@ -2693,7 +2693,7 @@
           <a:p>
             <a:fld id="{C7B30B39-B25F-9241-B1FA-1A9268F493D8}" type="datetimeFigureOut">
               <a:rPr lang="en-US" smtClean="0"/>
-              <a:t>12/7/19</a:t>
+              <a:t>12/23/19</a:t>
             </a:fld>
             <a:endParaRPr lang="en-US"/>
           </a:p>
@@ -2936,7 +2936,7 @@
           <a:p>
             <a:fld id="{C7B30B39-B25F-9241-B1FA-1A9268F493D8}" type="datetimeFigureOut">
               <a:rPr lang="en-US" smtClean="0"/>
-              <a:t>12/7/19</a:t>
+              <a:t>12/23/19</a:t>
             </a:fld>
             <a:endParaRPr lang="en-US"/>
           </a:p>
@@ -5010,7 +5010,7 @@
             <a:avLst/>
           </a:prstGeom>
           <a:solidFill>
-            <a:srgbClr val="F59E9E"/>
+            <a:srgbClr val="339889"/>
           </a:solidFill>
           <a:ln w="12700">
             <a:noFill/>
@@ -5062,7 +5062,7 @@
             <a:avLst/>
           </a:prstGeom>
           <a:solidFill>
-            <a:srgbClr val="F1727F"/>
+            <a:srgbClr val="339889"/>
           </a:solidFill>
           <a:ln w="12700">
             <a:noFill/>
@@ -5114,7 +5114,7 @@
             <a:avLst/>
           </a:prstGeom>
           <a:solidFill>
-            <a:srgbClr val="C16C86"/>
+            <a:srgbClr val="339889"/>
           </a:solidFill>
           <a:ln w="12700">
             <a:noFill/>
@@ -5166,7 +5166,7 @@
             <a:avLst/>
           </a:prstGeom>
           <a:solidFill>
-            <a:srgbClr val="335C7E"/>
+            <a:srgbClr val="339889"/>
           </a:solidFill>
           <a:ln w="12700">
             <a:noFill/>

--- a/images/Logo.pptx
+++ b/images/Logo.pptx
@@ -9,9 +9,11 @@
     <p:sldId id="257" r:id="rId3"/>
     <p:sldId id="258" r:id="rId4"/>
     <p:sldId id="259" r:id="rId5"/>
-    <p:sldId id="260" r:id="rId6"/>
-    <p:sldId id="261" r:id="rId7"/>
-    <p:sldId id="262" r:id="rId8"/>
+    <p:sldId id="263" r:id="rId6"/>
+    <p:sldId id="264" r:id="rId7"/>
+    <p:sldId id="260" r:id="rId8"/>
+    <p:sldId id="261" r:id="rId9"/>
+    <p:sldId id="262" r:id="rId10"/>
   </p:sldIdLst>
   <p:sldSz cx="12192000" cy="6858000"/>
   <p:notesSz cx="6858000" cy="9144000"/>
@@ -267,7 +269,7 @@
           <a:p>
             <a:fld id="{C7B30B39-B25F-9241-B1FA-1A9268F493D8}" type="datetimeFigureOut">
               <a:rPr lang="en-US" smtClean="0"/>
-              <a:t>12/23/19</a:t>
+              <a:t>4/27/20</a:t>
             </a:fld>
             <a:endParaRPr lang="en-US"/>
           </a:p>
@@ -467,7 +469,7 @@
           <a:p>
             <a:fld id="{C7B30B39-B25F-9241-B1FA-1A9268F493D8}" type="datetimeFigureOut">
               <a:rPr lang="en-US" smtClean="0"/>
-              <a:t>12/23/19</a:t>
+              <a:t>4/27/20</a:t>
             </a:fld>
             <a:endParaRPr lang="en-US"/>
           </a:p>
@@ -677,7 +679,7 @@
           <a:p>
             <a:fld id="{C7B30B39-B25F-9241-B1FA-1A9268F493D8}" type="datetimeFigureOut">
               <a:rPr lang="en-US" smtClean="0"/>
-              <a:t>12/23/19</a:t>
+              <a:t>4/27/20</a:t>
             </a:fld>
             <a:endParaRPr lang="en-US"/>
           </a:p>
@@ -877,7 +879,7 @@
           <a:p>
             <a:fld id="{C7B30B39-B25F-9241-B1FA-1A9268F493D8}" type="datetimeFigureOut">
               <a:rPr lang="en-US" smtClean="0"/>
-              <a:t>12/23/19</a:t>
+              <a:t>4/27/20</a:t>
             </a:fld>
             <a:endParaRPr lang="en-US"/>
           </a:p>
@@ -1153,7 +1155,7 @@
           <a:p>
             <a:fld id="{C7B30B39-B25F-9241-B1FA-1A9268F493D8}" type="datetimeFigureOut">
               <a:rPr lang="en-US" smtClean="0"/>
-              <a:t>12/23/19</a:t>
+              <a:t>4/27/20</a:t>
             </a:fld>
             <a:endParaRPr lang="en-US"/>
           </a:p>
@@ -1421,7 +1423,7 @@
           <a:p>
             <a:fld id="{C7B30B39-B25F-9241-B1FA-1A9268F493D8}" type="datetimeFigureOut">
               <a:rPr lang="en-US" smtClean="0"/>
-              <a:t>12/23/19</a:t>
+              <a:t>4/27/20</a:t>
             </a:fld>
             <a:endParaRPr lang="en-US"/>
           </a:p>
@@ -1836,7 +1838,7 @@
           <a:p>
             <a:fld id="{C7B30B39-B25F-9241-B1FA-1A9268F493D8}" type="datetimeFigureOut">
               <a:rPr lang="en-US" smtClean="0"/>
-              <a:t>12/23/19</a:t>
+              <a:t>4/27/20</a:t>
             </a:fld>
             <a:endParaRPr lang="en-US"/>
           </a:p>
@@ -1978,7 +1980,7 @@
           <a:p>
             <a:fld id="{C7B30B39-B25F-9241-B1FA-1A9268F493D8}" type="datetimeFigureOut">
               <a:rPr lang="en-US" smtClean="0"/>
-              <a:t>12/23/19</a:t>
+              <a:t>4/27/20</a:t>
             </a:fld>
             <a:endParaRPr lang="en-US"/>
           </a:p>
@@ -2091,7 +2093,7 @@
           <a:p>
             <a:fld id="{C7B30B39-B25F-9241-B1FA-1A9268F493D8}" type="datetimeFigureOut">
               <a:rPr lang="en-US" smtClean="0"/>
-              <a:t>12/23/19</a:t>
+              <a:t>4/27/20</a:t>
             </a:fld>
             <a:endParaRPr lang="en-US"/>
           </a:p>
@@ -2404,7 +2406,7 @@
           <a:p>
             <a:fld id="{C7B30B39-B25F-9241-B1FA-1A9268F493D8}" type="datetimeFigureOut">
               <a:rPr lang="en-US" smtClean="0"/>
-              <a:t>12/23/19</a:t>
+              <a:t>4/27/20</a:t>
             </a:fld>
             <a:endParaRPr lang="en-US"/>
           </a:p>
@@ -2693,7 +2695,7 @@
           <a:p>
             <a:fld id="{C7B30B39-B25F-9241-B1FA-1A9268F493D8}" type="datetimeFigureOut">
               <a:rPr lang="en-US" smtClean="0"/>
-              <a:t>12/23/19</a:t>
+              <a:t>4/27/20</a:t>
             </a:fld>
             <a:endParaRPr lang="en-US"/>
           </a:p>
@@ -2936,7 +2938,7 @@
           <a:p>
             <a:fld id="{C7B30B39-B25F-9241-B1FA-1A9268F493D8}" type="datetimeFigureOut">
               <a:rPr lang="en-US" smtClean="0"/>
-              <a:t>12/23/19</a:t>
+              <a:t>4/27/20</a:t>
             </a:fld>
             <a:endParaRPr lang="en-US"/>
           </a:p>
@@ -5241,8 +5243,8 @@
         </p:nvSpPr>
         <p:spPr>
           <a:xfrm>
-            <a:off x="5965419" y="612828"/>
-            <a:ext cx="4996593" cy="4979208"/>
+            <a:off x="5965419" y="3077736"/>
+            <a:ext cx="4996593" cy="2514299"/>
           </a:xfrm>
           <a:prstGeom prst="rect">
             <a:avLst/>
@@ -5335,10 +5337,10 @@
       </p:sp>
       <p:sp>
         <p:nvSpPr>
-          <p:cNvPr id="16" name="TextBox 15">
-            <a:extLst>
-              <a:ext uri="{FF2B5EF4-FFF2-40B4-BE49-F238E27FC236}">
-                <a16:creationId xmlns:a16="http://schemas.microsoft.com/office/drawing/2014/main" id="{A829F524-8735-6445-BDB9-D34750F6F8E1}"/>
+          <p:cNvPr id="11" name="TextBox 10">
+            <a:extLst>
+              <a:ext uri="{FF2B5EF4-FFF2-40B4-BE49-F238E27FC236}">
+                <a16:creationId xmlns:a16="http://schemas.microsoft.com/office/drawing/2014/main" id="{236DDD5B-F86E-2942-B8A4-3D1973AC4616}"/>
               </a:ext>
             </a:extLst>
           </p:cNvPr>
@@ -5347,8 +5349,67 @@
         </p:nvSpPr>
         <p:spPr>
           <a:xfrm>
+            <a:off x="5965419" y="3183334"/>
+            <a:ext cx="4849540" cy="2215991"/>
+          </a:xfrm>
+          <a:prstGeom prst="rect">
+            <a:avLst/>
+          </a:prstGeom>
+          <a:noFill/>
+        </p:spPr>
+        <p:txBody>
+          <a:bodyPr wrap="square" rtlCol="0">
+            <a:spAutoFit/>
+          </a:bodyPr>
+          <a:lstStyle/>
+          <a:p>
+            <a:pPr algn="ctr"/>
+            <a:r>
+              <a:rPr lang="en-US" sz="13800" dirty="0">
+                <a:solidFill>
+                  <a:srgbClr val="335C7E"/>
+                </a:solidFill>
+                <a:latin typeface="SignPainter HouseScript" panose="02000006070000020004" pitchFamily="2" charset="0"/>
+                <a:cs typeface="Forte" panose="020F0502020204030204" pitchFamily="34" charset="0"/>
+              </a:rPr>
+              <a:t>Arpit</a:t>
+            </a:r>
+            <a:r>
+              <a:rPr lang="en-US" sz="9600" dirty="0">
+                <a:blipFill dpi="0" rotWithShape="1">
+                  <a:blip r:embed="rId2">
+                    <a:extLst>
+                      <a:ext uri="{28A0092B-C50C-407E-A947-70E740481C1C}">
+                        <a14:useLocalDpi xmlns:a14="http://schemas.microsoft.com/office/drawing/2010/main" val="0"/>
+                      </a:ext>
+                    </a:extLst>
+                  </a:blip>
+                  <a:srcRect/>
+                  <a:tile tx="-165100" ty="0" sx="30000" sy="50000" flip="none" algn="tl"/>
+                </a:blipFill>
+                <a:latin typeface="IBM Plex Mono ExtraLight" panose="020B0309050203000203" pitchFamily="49" charset="77"/>
+              </a:rPr>
+              <a:t> </a:t>
+            </a:r>
+          </a:p>
+        </p:txBody>
+      </p:sp>
+      <p:sp>
+        <p:nvSpPr>
+          <p:cNvPr id="16" name="TextBox 15">
+            <a:extLst>
+              <a:ext uri="{FF2B5EF4-FFF2-40B4-BE49-F238E27FC236}">
+                <a16:creationId xmlns:a16="http://schemas.microsoft.com/office/drawing/2014/main" id="{A829F524-8735-6445-BDB9-D34750F6F8E1}"/>
+              </a:ext>
+            </a:extLst>
+          </p:cNvPr>
+          <p:cNvSpPr txBox="1"/>
+          <p:nvPr/>
+        </p:nvSpPr>
+        <p:spPr>
+          <a:xfrm>
             <a:off x="8809496" y="4651176"/>
-            <a:ext cx="1412190" cy="584775"/>
+            <a:ext cx="1248904" cy="584775"/>
           </a:xfrm>
           <a:prstGeom prst="rect">
             <a:avLst/>
@@ -5368,7 +5429,7 @@
                 </a:solidFill>
                 <a:latin typeface="Google Sans" panose="020B0503030502040204" pitchFamily="34" charset="0"/>
               </a:rPr>
-              <a:t>BACK</a:t>
+              <a:t>JAIN.</a:t>
             </a:r>
             <a:r>
               <a:rPr lang="en-US" sz="2400" b="1" dirty="0">
@@ -5396,14 +5457,14 @@
         </p:nvSpPr>
         <p:spPr>
           <a:xfrm>
-            <a:off x="8809496" y="5495979"/>
-            <a:ext cx="2160000" cy="108000"/>
+            <a:off x="6989164" y="5189171"/>
+            <a:ext cx="2953062" cy="108000"/>
           </a:xfrm>
           <a:prstGeom prst="rect">
             <a:avLst/>
           </a:prstGeom>
           <a:solidFill>
-            <a:srgbClr val="F59E9E"/>
+            <a:srgbClr val="339889"/>
           </a:solidFill>
           <a:ln w="12700">
             <a:noFill/>
@@ -5430,277 +5491,14 @@
           <a:lstStyle/>
           <a:p>
             <a:pPr algn="ctr"/>
-            <a:endParaRPr lang="en-US"/>
-          </a:p>
-        </p:txBody>
-      </p:sp>
-      <p:sp>
-        <p:nvSpPr>
-          <p:cNvPr id="19" name="Rectangle 18">
-            <a:extLst>
-              <a:ext uri="{FF2B5EF4-FFF2-40B4-BE49-F238E27FC236}">
-                <a16:creationId xmlns:a16="http://schemas.microsoft.com/office/drawing/2014/main" id="{E6E91D9A-3F17-CD48-80AF-BE2201A25D59}"/>
-              </a:ext>
-            </a:extLst>
-          </p:cNvPr>
-          <p:cNvSpPr/>
-          <p:nvPr/>
-        </p:nvSpPr>
-        <p:spPr>
-          <a:xfrm>
-            <a:off x="10883897" y="612828"/>
-            <a:ext cx="108000" cy="2160000"/>
-          </a:xfrm>
-          <a:prstGeom prst="rect">
-            <a:avLst/>
-          </a:prstGeom>
-          <a:solidFill>
-            <a:srgbClr val="F1727F"/>
-          </a:solidFill>
-          <a:ln w="12700">
-            <a:noFill/>
-          </a:ln>
-        </p:spPr>
-        <p:style>
-          <a:lnRef idx="2">
-            <a:schemeClr val="accent1">
-              <a:shade val="50000"/>
-            </a:schemeClr>
-          </a:lnRef>
-          <a:fillRef idx="1">
-            <a:schemeClr val="accent1"/>
-          </a:fillRef>
-          <a:effectRef idx="0">
-            <a:schemeClr val="accent1"/>
-          </a:effectRef>
-          <a:fontRef idx="minor">
-            <a:schemeClr val="lt1"/>
-          </a:fontRef>
-        </p:style>
-        <p:txBody>
-          <a:bodyPr rtlCol="0" anchor="ctr"/>
-          <a:lstStyle/>
-          <a:p>
-            <a:pPr algn="ctr"/>
-            <a:endParaRPr lang="en-US"/>
-          </a:p>
-        </p:txBody>
-      </p:sp>
-      <p:sp>
-        <p:nvSpPr>
-          <p:cNvPr id="20" name="Rectangle 19">
-            <a:extLst>
-              <a:ext uri="{FF2B5EF4-FFF2-40B4-BE49-F238E27FC236}">
-                <a16:creationId xmlns:a16="http://schemas.microsoft.com/office/drawing/2014/main" id="{7E7A09BF-47D5-7249-8FDD-25D8B773A542}"/>
-              </a:ext>
-            </a:extLst>
-          </p:cNvPr>
-          <p:cNvSpPr/>
-          <p:nvPr/>
-        </p:nvSpPr>
-        <p:spPr>
-          <a:xfrm>
-            <a:off x="5965395" y="612828"/>
-            <a:ext cx="2160000" cy="108000"/>
-          </a:xfrm>
-          <a:prstGeom prst="rect">
-            <a:avLst/>
-          </a:prstGeom>
-          <a:solidFill>
-            <a:srgbClr val="C16C86"/>
-          </a:solidFill>
-          <a:ln w="12700">
-            <a:noFill/>
-          </a:ln>
-        </p:spPr>
-        <p:style>
-          <a:lnRef idx="2">
-            <a:schemeClr val="accent1">
-              <a:shade val="50000"/>
-            </a:schemeClr>
-          </a:lnRef>
-          <a:fillRef idx="1">
-            <a:schemeClr val="accent1"/>
-          </a:fillRef>
-          <a:effectRef idx="0">
-            <a:schemeClr val="accent1"/>
-          </a:effectRef>
-          <a:fontRef idx="minor">
-            <a:schemeClr val="lt1"/>
-          </a:fontRef>
-        </p:style>
-        <p:txBody>
-          <a:bodyPr rtlCol="0" anchor="ctr"/>
-          <a:lstStyle/>
-          <a:p>
-            <a:pPr algn="ctr"/>
-            <a:endParaRPr lang="en-US"/>
-          </a:p>
-        </p:txBody>
-      </p:sp>
-      <p:sp>
-        <p:nvSpPr>
-          <p:cNvPr id="21" name="Rectangle 20">
-            <a:extLst>
-              <a:ext uri="{FF2B5EF4-FFF2-40B4-BE49-F238E27FC236}">
-                <a16:creationId xmlns:a16="http://schemas.microsoft.com/office/drawing/2014/main" id="{8AF850E0-8C52-7B4C-A384-A31B2EAC3111}"/>
-              </a:ext>
-            </a:extLst>
-          </p:cNvPr>
-          <p:cNvSpPr/>
-          <p:nvPr/>
-        </p:nvSpPr>
-        <p:spPr>
-          <a:xfrm>
-            <a:off x="5965395" y="3432036"/>
-            <a:ext cx="108000" cy="2160000"/>
-          </a:xfrm>
-          <a:prstGeom prst="rect">
-            <a:avLst/>
-          </a:prstGeom>
-          <a:solidFill>
-            <a:srgbClr val="335C7E"/>
-          </a:solidFill>
-          <a:ln w="12700">
-            <a:noFill/>
-          </a:ln>
-        </p:spPr>
-        <p:style>
-          <a:lnRef idx="2">
-            <a:schemeClr val="accent1">
-              <a:shade val="50000"/>
-            </a:schemeClr>
-          </a:lnRef>
-          <a:fillRef idx="1">
-            <a:schemeClr val="accent1"/>
-          </a:fillRef>
-          <a:effectRef idx="0">
-            <a:schemeClr val="accent1"/>
-          </a:effectRef>
-          <a:fontRef idx="minor">
-            <a:schemeClr val="lt1"/>
-          </a:fontRef>
-        </p:style>
-        <p:txBody>
-          <a:bodyPr rtlCol="0" anchor="ctr"/>
-          <a:lstStyle/>
-          <a:p>
-            <a:pPr algn="ctr"/>
-            <a:endParaRPr lang="en-US"/>
-          </a:p>
-        </p:txBody>
-      </p:sp>
-      <p:sp>
-        <p:nvSpPr>
-          <p:cNvPr id="3" name="L-shape 2">
-            <a:extLst>
-              <a:ext uri="{FF2B5EF4-FFF2-40B4-BE49-F238E27FC236}">
-                <a16:creationId xmlns:a16="http://schemas.microsoft.com/office/drawing/2014/main" id="{9DAFBCD1-02A0-C243-AD90-AE00844EA27C}"/>
-              </a:ext>
-            </a:extLst>
-          </p:cNvPr>
-          <p:cNvSpPr/>
-          <p:nvPr/>
-        </p:nvSpPr>
-        <p:spPr>
-          <a:xfrm rot="2652370">
-            <a:off x="7264995" y="2242032"/>
-            <a:ext cx="1720800" cy="1720800"/>
-          </a:xfrm>
-          <a:prstGeom prst="corner">
-            <a:avLst>
-              <a:gd name="adj1" fmla="val 28205"/>
-              <a:gd name="adj2" fmla="val 27564"/>
-            </a:avLst>
-          </a:prstGeom>
-          <a:solidFill>
-            <a:srgbClr val="335C7E"/>
-          </a:solidFill>
-          <a:ln>
-            <a:noFill/>
-          </a:ln>
-        </p:spPr>
-        <p:style>
-          <a:lnRef idx="2">
-            <a:schemeClr val="accent1">
-              <a:shade val="50000"/>
-            </a:schemeClr>
-          </a:lnRef>
-          <a:fillRef idx="1">
-            <a:schemeClr val="accent1"/>
-          </a:fillRef>
-          <a:effectRef idx="0">
-            <a:schemeClr val="accent1"/>
-          </a:effectRef>
-          <a:fontRef idx="minor">
-            <a:schemeClr val="lt1"/>
-          </a:fontRef>
-        </p:style>
-        <p:txBody>
-          <a:bodyPr rtlCol="0" anchor="ctr"/>
-          <a:lstStyle/>
-          <a:p>
-            <a:pPr algn="ctr"/>
-            <a:endParaRPr lang="en-US"/>
-          </a:p>
-        </p:txBody>
-      </p:sp>
-      <p:sp>
-        <p:nvSpPr>
-          <p:cNvPr id="7" name="Rectangle 6">
-            <a:extLst>
-              <a:ext uri="{FF2B5EF4-FFF2-40B4-BE49-F238E27FC236}">
-                <a16:creationId xmlns:a16="http://schemas.microsoft.com/office/drawing/2014/main" id="{3F22B226-3D3D-0C4D-A38D-EAFD59989359}"/>
-              </a:ext>
-            </a:extLst>
-          </p:cNvPr>
-          <p:cNvSpPr/>
-          <p:nvPr/>
-        </p:nvSpPr>
-        <p:spPr>
-          <a:xfrm>
-            <a:off x="7409009" y="2825903"/>
-            <a:ext cx="2069182" cy="553057"/>
-          </a:xfrm>
-          <a:prstGeom prst="rect">
-            <a:avLst/>
-          </a:prstGeom>
-          <a:solidFill>
-            <a:srgbClr val="335C7E"/>
-          </a:solidFill>
-          <a:ln>
-            <a:noFill/>
-          </a:ln>
-        </p:spPr>
-        <p:style>
-          <a:lnRef idx="2">
-            <a:schemeClr val="accent1">
-              <a:shade val="50000"/>
-            </a:schemeClr>
-          </a:lnRef>
-          <a:fillRef idx="1">
-            <a:schemeClr val="accent1"/>
-          </a:fillRef>
-          <a:effectRef idx="0">
-            <a:schemeClr val="accent1"/>
-          </a:effectRef>
-          <a:fontRef idx="minor">
-            <a:schemeClr val="lt1"/>
-          </a:fontRef>
-        </p:style>
-        <p:txBody>
-          <a:bodyPr rtlCol="0" anchor="ctr"/>
-          <a:lstStyle/>
-          <a:p>
-            <a:pPr algn="ctr"/>
-            <a:endParaRPr lang="en-US"/>
+            <a:endParaRPr lang="en-US" dirty="0"/>
           </a:p>
         </p:txBody>
       </p:sp>
     </p:spTree>
     <p:extLst>
       <p:ext uri="{BB962C8B-B14F-4D97-AF65-F5344CB8AC3E}">
-        <p14:creationId xmlns:p14="http://schemas.microsoft.com/office/powerpoint/2010/main" val="1818785394"/>
+        <p14:creationId xmlns:p14="http://schemas.microsoft.com/office/powerpoint/2010/main" val="2398693873"/>
       </p:ext>
     </p:extLst>
   </p:cSld>
@@ -5741,6 +5539,997 @@
         </p:nvSpPr>
         <p:spPr>
           <a:xfrm>
+            <a:off x="6240257" y="3106168"/>
+            <a:ext cx="4003064" cy="2666418"/>
+          </a:xfrm>
+          <a:prstGeom prst="rect">
+            <a:avLst/>
+          </a:prstGeom>
+          <a:solidFill>
+            <a:srgbClr val="F6F7F8"/>
+          </a:solidFill>
+          <a:ln w="12700">
+            <a:noFill/>
+          </a:ln>
+        </p:spPr>
+        <p:style>
+          <a:lnRef idx="2">
+            <a:schemeClr val="accent1">
+              <a:shade val="50000"/>
+            </a:schemeClr>
+          </a:lnRef>
+          <a:fillRef idx="1">
+            <a:schemeClr val="accent1"/>
+          </a:fillRef>
+          <a:effectRef idx="0">
+            <a:schemeClr val="accent1"/>
+          </a:effectRef>
+          <a:fontRef idx="minor">
+            <a:schemeClr val="lt1"/>
+          </a:fontRef>
+        </p:style>
+        <p:txBody>
+          <a:bodyPr rtlCol="0" anchor="ctr"/>
+          <a:lstStyle/>
+          <a:p>
+            <a:pPr algn="ctr"/>
+            <a:endParaRPr lang="en-US" dirty="0"/>
+          </a:p>
+        </p:txBody>
+      </p:sp>
+      <p:sp>
+        <p:nvSpPr>
+          <p:cNvPr id="8" name="TextBox 7">
+            <a:extLst>
+              <a:ext uri="{FF2B5EF4-FFF2-40B4-BE49-F238E27FC236}">
+                <a16:creationId xmlns:a16="http://schemas.microsoft.com/office/drawing/2014/main" id="{102572D4-543B-C547-A8F1-ACBD4D0435CC}"/>
+              </a:ext>
+            </a:extLst>
+          </p:cNvPr>
+          <p:cNvSpPr txBox="1"/>
+          <p:nvPr/>
+        </p:nvSpPr>
+        <p:spPr>
+          <a:xfrm rot="10800000" flipH="1">
+            <a:off x="6368435" y="3823780"/>
+            <a:ext cx="3929204" cy="1785104"/>
+          </a:xfrm>
+          <a:prstGeom prst="rect">
+            <a:avLst/>
+          </a:prstGeom>
+          <a:noFill/>
+        </p:spPr>
+        <p:txBody>
+          <a:bodyPr wrap="square" rtlCol="0">
+            <a:spAutoFit/>
+          </a:bodyPr>
+          <a:lstStyle/>
+          <a:p>
+            <a:pPr algn="ctr"/>
+            <a:r>
+              <a:rPr lang="hi-IN" sz="11000" b="1" dirty="0">
+                <a:solidFill>
+                  <a:srgbClr val="339889"/>
+                </a:solidFill>
+                <a:latin typeface="Google Sans" panose="020B0503030502040204" pitchFamily="34" charset="0"/>
+              </a:rPr>
+              <a:t>अर्पित</a:t>
+            </a:r>
+            <a:r>
+              <a:rPr lang="en-US" sz="8000" b="1" dirty="0">
+                <a:solidFill>
+                  <a:srgbClr val="339889"/>
+                </a:solidFill>
+                <a:latin typeface="Google Sans" panose="020B0503030502040204" pitchFamily="34" charset="0"/>
+              </a:rPr>
+              <a:t> </a:t>
+            </a:r>
+          </a:p>
+        </p:txBody>
+      </p:sp>
+      <p:sp>
+        <p:nvSpPr>
+          <p:cNvPr id="7" name="TextBox 6">
+            <a:extLst>
+              <a:ext uri="{FF2B5EF4-FFF2-40B4-BE49-F238E27FC236}">
+                <a16:creationId xmlns:a16="http://schemas.microsoft.com/office/drawing/2014/main" id="{53902F90-FD5E-FF4C-AA58-8E79559E6E9D}"/>
+              </a:ext>
+            </a:extLst>
+          </p:cNvPr>
+          <p:cNvSpPr txBox="1"/>
+          <p:nvPr/>
+        </p:nvSpPr>
+        <p:spPr>
+          <a:xfrm>
+            <a:off x="6553439" y="3255761"/>
+            <a:ext cx="3689882" cy="1446550"/>
+          </a:xfrm>
+          <a:prstGeom prst="rect">
+            <a:avLst/>
+          </a:prstGeom>
+          <a:noFill/>
+        </p:spPr>
+        <p:txBody>
+          <a:bodyPr wrap="square" rtlCol="0">
+            <a:spAutoFit/>
+          </a:bodyPr>
+          <a:lstStyle/>
+          <a:p>
+            <a:pPr algn="ctr"/>
+            <a:r>
+              <a:rPr lang="en-US" sz="8800" b="1" dirty="0">
+                <a:solidFill>
+                  <a:srgbClr val="339889"/>
+                </a:solidFill>
+                <a:latin typeface="Google Sans" panose="020B0503030502040204" pitchFamily="34" charset="0"/>
+              </a:rPr>
+              <a:t>ARPIT</a:t>
+            </a:r>
+            <a:r>
+              <a:rPr lang="en-US" sz="8000" b="1" dirty="0">
+                <a:solidFill>
+                  <a:srgbClr val="339889"/>
+                </a:solidFill>
+                <a:latin typeface="Google Sans" panose="020B0503030502040204" pitchFamily="34" charset="0"/>
+              </a:rPr>
+              <a:t> </a:t>
+            </a:r>
+          </a:p>
+        </p:txBody>
+      </p:sp>
+      <p:sp>
+        <p:nvSpPr>
+          <p:cNvPr id="16" name="TextBox 15">
+            <a:extLst>
+              <a:ext uri="{FF2B5EF4-FFF2-40B4-BE49-F238E27FC236}">
+                <a16:creationId xmlns:a16="http://schemas.microsoft.com/office/drawing/2014/main" id="{A829F524-8735-6445-BDB9-D34750F6F8E1}"/>
+              </a:ext>
+            </a:extLst>
+          </p:cNvPr>
+          <p:cNvSpPr txBox="1"/>
+          <p:nvPr/>
+        </p:nvSpPr>
+        <p:spPr>
+          <a:xfrm>
+            <a:off x="9281527" y="2795937"/>
+            <a:ext cx="790833" cy="923330"/>
+          </a:xfrm>
+          <a:prstGeom prst="rect">
+            <a:avLst/>
+          </a:prstGeom>
+          <a:noFill/>
+        </p:spPr>
+        <p:txBody>
+          <a:bodyPr wrap="square" rtlCol="0">
+            <a:spAutoFit/>
+          </a:bodyPr>
+          <a:lstStyle/>
+          <a:p>
+            <a:r>
+              <a:rPr lang="en-US" sz="2000" b="1" dirty="0">
+                <a:solidFill>
+                  <a:srgbClr val="339889"/>
+                </a:solidFill>
+                <a:latin typeface="Google Sans" panose="020B0503030502040204" pitchFamily="34" charset="0"/>
+              </a:rPr>
+              <a:t>JAIN</a:t>
+            </a:r>
+            <a:r>
+              <a:rPr lang="en-US" sz="5400" b="1" dirty="0">
+                <a:solidFill>
+                  <a:srgbClr val="335C7E"/>
+                </a:solidFill>
+                <a:latin typeface="Google Sans Medium" panose="020B0503030502040204" pitchFamily="34" charset="0"/>
+              </a:rPr>
+              <a:t> </a:t>
+            </a:r>
+          </a:p>
+        </p:txBody>
+      </p:sp>
+      <p:sp>
+        <p:nvSpPr>
+          <p:cNvPr id="9" name="Rectangle 8">
+            <a:extLst>
+              <a:ext uri="{FF2B5EF4-FFF2-40B4-BE49-F238E27FC236}">
+                <a16:creationId xmlns:a16="http://schemas.microsoft.com/office/drawing/2014/main" id="{9C0332C3-83A8-6448-ACCE-4B373BF094FA}"/>
+              </a:ext>
+            </a:extLst>
+          </p:cNvPr>
+          <p:cNvSpPr/>
+          <p:nvPr/>
+        </p:nvSpPr>
+        <p:spPr>
+          <a:xfrm>
+            <a:off x="6698589" y="4175609"/>
+            <a:ext cx="130686" cy="487423"/>
+          </a:xfrm>
+          <a:prstGeom prst="rect">
+            <a:avLst/>
+          </a:prstGeom>
+          <a:solidFill>
+            <a:srgbClr val="F6F7F8"/>
+          </a:solidFill>
+          <a:ln w="12700">
+            <a:noFill/>
+          </a:ln>
+        </p:spPr>
+        <p:style>
+          <a:lnRef idx="2">
+            <a:schemeClr val="accent1">
+              <a:shade val="50000"/>
+            </a:schemeClr>
+          </a:lnRef>
+          <a:fillRef idx="1">
+            <a:schemeClr val="accent1"/>
+          </a:fillRef>
+          <a:effectRef idx="0">
+            <a:schemeClr val="accent1"/>
+          </a:effectRef>
+          <a:fontRef idx="minor">
+            <a:schemeClr val="lt1"/>
+          </a:fontRef>
+        </p:style>
+        <p:txBody>
+          <a:bodyPr rtlCol="0" anchor="ctr"/>
+          <a:lstStyle/>
+          <a:p>
+            <a:pPr algn="ctr"/>
+            <a:endParaRPr lang="en-US" dirty="0"/>
+          </a:p>
+        </p:txBody>
+      </p:sp>
+      <p:sp>
+        <p:nvSpPr>
+          <p:cNvPr id="10" name="Rectangle 9">
+            <a:extLst>
+              <a:ext uri="{FF2B5EF4-FFF2-40B4-BE49-F238E27FC236}">
+                <a16:creationId xmlns:a16="http://schemas.microsoft.com/office/drawing/2014/main" id="{2C6D7C0E-C3B4-4B4A-93ED-A445237BE813}"/>
+              </a:ext>
+            </a:extLst>
+          </p:cNvPr>
+          <p:cNvSpPr/>
+          <p:nvPr/>
+        </p:nvSpPr>
+        <p:spPr>
+          <a:xfrm>
+            <a:off x="6995141" y="4322233"/>
+            <a:ext cx="130686" cy="405341"/>
+          </a:xfrm>
+          <a:prstGeom prst="rect">
+            <a:avLst/>
+          </a:prstGeom>
+          <a:solidFill>
+            <a:srgbClr val="F6F7F8"/>
+          </a:solidFill>
+          <a:ln w="12700">
+            <a:noFill/>
+          </a:ln>
+        </p:spPr>
+        <p:style>
+          <a:lnRef idx="2">
+            <a:schemeClr val="accent1">
+              <a:shade val="50000"/>
+            </a:schemeClr>
+          </a:lnRef>
+          <a:fillRef idx="1">
+            <a:schemeClr val="accent1"/>
+          </a:fillRef>
+          <a:effectRef idx="0">
+            <a:schemeClr val="accent1"/>
+          </a:effectRef>
+          <a:fontRef idx="minor">
+            <a:schemeClr val="lt1"/>
+          </a:fontRef>
+        </p:style>
+        <p:txBody>
+          <a:bodyPr rtlCol="0" anchor="ctr"/>
+          <a:lstStyle/>
+          <a:p>
+            <a:pPr algn="ctr"/>
+            <a:endParaRPr lang="en-US" dirty="0"/>
+          </a:p>
+        </p:txBody>
+      </p:sp>
+      <p:sp>
+        <p:nvSpPr>
+          <p:cNvPr id="12" name="Rectangle 11">
+            <a:extLst>
+              <a:ext uri="{FF2B5EF4-FFF2-40B4-BE49-F238E27FC236}">
+                <a16:creationId xmlns:a16="http://schemas.microsoft.com/office/drawing/2014/main" id="{AED9B19C-967A-D146-94CB-6138C259257F}"/>
+              </a:ext>
+            </a:extLst>
+          </p:cNvPr>
+          <p:cNvSpPr/>
+          <p:nvPr/>
+        </p:nvSpPr>
+        <p:spPr>
+          <a:xfrm>
+            <a:off x="9032875" y="3514726"/>
+            <a:ext cx="63540" cy="1549400"/>
+          </a:xfrm>
+          <a:prstGeom prst="rect">
+            <a:avLst/>
+          </a:prstGeom>
+          <a:solidFill>
+            <a:srgbClr val="F6F7F8"/>
+          </a:solidFill>
+          <a:ln w="12700">
+            <a:noFill/>
+          </a:ln>
+        </p:spPr>
+        <p:style>
+          <a:lnRef idx="2">
+            <a:schemeClr val="accent1">
+              <a:shade val="50000"/>
+            </a:schemeClr>
+          </a:lnRef>
+          <a:fillRef idx="1">
+            <a:schemeClr val="accent1"/>
+          </a:fillRef>
+          <a:effectRef idx="0">
+            <a:schemeClr val="accent1"/>
+          </a:effectRef>
+          <a:fontRef idx="minor">
+            <a:schemeClr val="lt1"/>
+          </a:fontRef>
+        </p:style>
+        <p:txBody>
+          <a:bodyPr rtlCol="0" anchor="ctr"/>
+          <a:lstStyle/>
+          <a:p>
+            <a:pPr algn="ctr"/>
+            <a:endParaRPr lang="en-US" dirty="0"/>
+          </a:p>
+        </p:txBody>
+      </p:sp>
+      <p:sp>
+        <p:nvSpPr>
+          <p:cNvPr id="13" name="Rectangle 12">
+            <a:extLst>
+              <a:ext uri="{FF2B5EF4-FFF2-40B4-BE49-F238E27FC236}">
+                <a16:creationId xmlns:a16="http://schemas.microsoft.com/office/drawing/2014/main" id="{36E8FF7F-B4C3-C84F-ADD1-39A58A04296A}"/>
+              </a:ext>
+            </a:extLst>
+          </p:cNvPr>
+          <p:cNvSpPr/>
+          <p:nvPr/>
+        </p:nvSpPr>
+        <p:spPr>
+          <a:xfrm>
+            <a:off x="7635342" y="3458030"/>
+            <a:ext cx="130686" cy="972456"/>
+          </a:xfrm>
+          <a:prstGeom prst="rect">
+            <a:avLst/>
+          </a:prstGeom>
+          <a:solidFill>
+            <a:srgbClr val="F6F7F8"/>
+          </a:solidFill>
+          <a:ln w="12700">
+            <a:noFill/>
+          </a:ln>
+        </p:spPr>
+        <p:style>
+          <a:lnRef idx="2">
+            <a:schemeClr val="accent1">
+              <a:shade val="50000"/>
+            </a:schemeClr>
+          </a:lnRef>
+          <a:fillRef idx="1">
+            <a:schemeClr val="accent1"/>
+          </a:fillRef>
+          <a:effectRef idx="0">
+            <a:schemeClr val="accent1"/>
+          </a:effectRef>
+          <a:fontRef idx="minor">
+            <a:schemeClr val="lt1"/>
+          </a:fontRef>
+        </p:style>
+        <p:txBody>
+          <a:bodyPr rtlCol="0" anchor="ctr"/>
+          <a:lstStyle/>
+          <a:p>
+            <a:pPr algn="ctr"/>
+            <a:endParaRPr lang="en-US" dirty="0"/>
+          </a:p>
+        </p:txBody>
+      </p:sp>
+      <p:sp>
+        <p:nvSpPr>
+          <p:cNvPr id="14" name="Rectangle 13">
+            <a:extLst>
+              <a:ext uri="{FF2B5EF4-FFF2-40B4-BE49-F238E27FC236}">
+                <a16:creationId xmlns:a16="http://schemas.microsoft.com/office/drawing/2014/main" id="{4D8046A0-6631-E342-9604-76B471D4492E}"/>
+              </a:ext>
+            </a:extLst>
+          </p:cNvPr>
+          <p:cNvSpPr/>
+          <p:nvPr/>
+        </p:nvSpPr>
+        <p:spPr>
+          <a:xfrm>
+            <a:off x="7808466" y="3542156"/>
+            <a:ext cx="130686" cy="837530"/>
+          </a:xfrm>
+          <a:prstGeom prst="rect">
+            <a:avLst/>
+          </a:prstGeom>
+          <a:solidFill>
+            <a:srgbClr val="339889"/>
+          </a:solidFill>
+          <a:ln w="12700">
+            <a:noFill/>
+          </a:ln>
+        </p:spPr>
+        <p:style>
+          <a:lnRef idx="2">
+            <a:schemeClr val="accent1">
+              <a:shade val="50000"/>
+            </a:schemeClr>
+          </a:lnRef>
+          <a:fillRef idx="1">
+            <a:schemeClr val="accent1"/>
+          </a:fillRef>
+          <a:effectRef idx="0">
+            <a:schemeClr val="accent1"/>
+          </a:effectRef>
+          <a:fontRef idx="minor">
+            <a:schemeClr val="lt1"/>
+          </a:fontRef>
+        </p:style>
+        <p:txBody>
+          <a:bodyPr rtlCol="0" anchor="ctr"/>
+          <a:lstStyle/>
+          <a:p>
+            <a:pPr algn="ctr"/>
+            <a:endParaRPr lang="en-US" dirty="0"/>
+          </a:p>
+        </p:txBody>
+      </p:sp>
+    </p:spTree>
+    <p:extLst>
+      <p:ext uri="{BB962C8B-B14F-4D97-AF65-F5344CB8AC3E}">
+        <p14:creationId xmlns:p14="http://schemas.microsoft.com/office/powerpoint/2010/main" val="2276941650"/>
+      </p:ext>
+    </p:extLst>
+  </p:cSld>
+  <p:clrMapOvr>
+    <a:masterClrMapping/>
+  </p:clrMapOvr>
+</p:sld>
+</file>
+
+<file path=ppt/slides/slide7.xml><?xml version="1.0" encoding="utf-8"?>
+<p:sld xmlns:a="http://schemas.openxmlformats.org/drawingml/2006/main" xmlns:r="http://schemas.openxmlformats.org/officeDocument/2006/relationships" xmlns:p="http://schemas.openxmlformats.org/presentationml/2006/main">
+  <p:cSld>
+    <p:spTree>
+      <p:nvGrpSpPr>
+        <p:cNvPr id="1" name=""/>
+        <p:cNvGrpSpPr/>
+        <p:nvPr/>
+      </p:nvGrpSpPr>
+      <p:grpSpPr>
+        <a:xfrm>
+          <a:off x="0" y="0"/>
+          <a:ext cx="0" cy="0"/>
+          <a:chOff x="0" y="0"/>
+          <a:chExt cx="0" cy="0"/>
+        </a:xfrm>
+      </p:grpSpPr>
+      <p:sp>
+        <p:nvSpPr>
+          <p:cNvPr id="6" name="Rectangle 5">
+            <a:extLst>
+              <a:ext uri="{FF2B5EF4-FFF2-40B4-BE49-F238E27FC236}">
+                <a16:creationId xmlns:a16="http://schemas.microsoft.com/office/drawing/2014/main" id="{F68F3E1A-564F-0945-A6DE-D9139DAF94D4}"/>
+              </a:ext>
+            </a:extLst>
+          </p:cNvPr>
+          <p:cNvSpPr/>
+          <p:nvPr/>
+        </p:nvSpPr>
+        <p:spPr>
+          <a:xfrm>
+            <a:off x="5965419" y="612828"/>
+            <a:ext cx="4996593" cy="4979208"/>
+          </a:xfrm>
+          <a:prstGeom prst="rect">
+            <a:avLst/>
+          </a:prstGeom>
+          <a:solidFill>
+            <a:srgbClr val="F6F7F8"/>
+          </a:solidFill>
+          <a:ln w="12700">
+            <a:solidFill>
+              <a:schemeClr val="bg2">
+                <a:lumMod val="75000"/>
+              </a:schemeClr>
+            </a:solidFill>
+          </a:ln>
+        </p:spPr>
+        <p:style>
+          <a:lnRef idx="2">
+            <a:schemeClr val="accent1">
+              <a:shade val="50000"/>
+            </a:schemeClr>
+          </a:lnRef>
+          <a:fillRef idx="1">
+            <a:schemeClr val="accent1"/>
+          </a:fillRef>
+          <a:effectRef idx="0">
+            <a:schemeClr val="accent1"/>
+          </a:effectRef>
+          <a:fontRef idx="minor">
+            <a:schemeClr val="lt1"/>
+          </a:fontRef>
+        </p:style>
+        <p:txBody>
+          <a:bodyPr rtlCol="0" anchor="ctr"/>
+          <a:lstStyle/>
+          <a:p>
+            <a:pPr algn="ctr"/>
+            <a:endParaRPr lang="en-US" dirty="0"/>
+          </a:p>
+        </p:txBody>
+      </p:sp>
+      <p:sp>
+        <p:nvSpPr>
+          <p:cNvPr id="15" name="Rectangle 14">
+            <a:extLst>
+              <a:ext uri="{FF2B5EF4-FFF2-40B4-BE49-F238E27FC236}">
+                <a16:creationId xmlns:a16="http://schemas.microsoft.com/office/drawing/2014/main" id="{BFC01515-0C75-A94E-A507-2C5D301A0614}"/>
+              </a:ext>
+            </a:extLst>
+          </p:cNvPr>
+          <p:cNvSpPr/>
+          <p:nvPr/>
+        </p:nvSpPr>
+        <p:spPr>
+          <a:xfrm>
+            <a:off x="5829296" y="503965"/>
+            <a:ext cx="5192486" cy="5178378"/>
+          </a:xfrm>
+          <a:prstGeom prst="rect">
+            <a:avLst/>
+          </a:prstGeom>
+          <a:noFill/>
+          <a:ln w="12700">
+            <a:noFill/>
+          </a:ln>
+        </p:spPr>
+        <p:style>
+          <a:lnRef idx="2">
+            <a:schemeClr val="accent1">
+              <a:shade val="50000"/>
+            </a:schemeClr>
+          </a:lnRef>
+          <a:fillRef idx="1">
+            <a:schemeClr val="accent1"/>
+          </a:fillRef>
+          <a:effectRef idx="0">
+            <a:schemeClr val="accent1"/>
+          </a:effectRef>
+          <a:fontRef idx="minor">
+            <a:schemeClr val="lt1"/>
+          </a:fontRef>
+        </p:style>
+        <p:txBody>
+          <a:bodyPr rtlCol="0" anchor="ctr"/>
+          <a:lstStyle/>
+          <a:p>
+            <a:pPr algn="ctr"/>
+            <a:endParaRPr lang="en-US" dirty="0"/>
+          </a:p>
+        </p:txBody>
+      </p:sp>
+      <p:sp>
+        <p:nvSpPr>
+          <p:cNvPr id="16" name="TextBox 15">
+            <a:extLst>
+              <a:ext uri="{FF2B5EF4-FFF2-40B4-BE49-F238E27FC236}">
+                <a16:creationId xmlns:a16="http://schemas.microsoft.com/office/drawing/2014/main" id="{A829F524-8735-6445-BDB9-D34750F6F8E1}"/>
+              </a:ext>
+            </a:extLst>
+          </p:cNvPr>
+          <p:cNvSpPr txBox="1"/>
+          <p:nvPr/>
+        </p:nvSpPr>
+        <p:spPr>
+          <a:xfrm>
+            <a:off x="8809496" y="4651176"/>
+            <a:ext cx="1412190" cy="584775"/>
+          </a:xfrm>
+          <a:prstGeom prst="rect">
+            <a:avLst/>
+          </a:prstGeom>
+          <a:noFill/>
+        </p:spPr>
+        <p:txBody>
+          <a:bodyPr wrap="square" rtlCol="0">
+            <a:spAutoFit/>
+          </a:bodyPr>
+          <a:lstStyle/>
+          <a:p>
+            <a:r>
+              <a:rPr lang="en-US" sz="3200" b="1" dirty="0">
+                <a:solidFill>
+                  <a:srgbClr val="335C7E"/>
+                </a:solidFill>
+                <a:latin typeface="Google Sans" panose="020B0503030502040204" pitchFamily="34" charset="0"/>
+              </a:rPr>
+              <a:t>BACK</a:t>
+            </a:r>
+            <a:r>
+              <a:rPr lang="en-US" sz="2400" b="1" dirty="0">
+                <a:solidFill>
+                  <a:srgbClr val="335C7E"/>
+                </a:solidFill>
+                <a:latin typeface="Google Sans Medium" panose="020B0503030502040204" pitchFamily="34" charset="0"/>
+              </a:rPr>
+              <a:t> </a:t>
+            </a:r>
+          </a:p>
+        </p:txBody>
+      </p:sp>
+      <p:sp>
+        <p:nvSpPr>
+          <p:cNvPr id="18" name="Rectangle 17">
+            <a:extLst>
+              <a:ext uri="{FF2B5EF4-FFF2-40B4-BE49-F238E27FC236}">
+                <a16:creationId xmlns:a16="http://schemas.microsoft.com/office/drawing/2014/main" id="{6D60967A-5C64-3F43-8D6D-A2B42DD03D0E}"/>
+              </a:ext>
+            </a:extLst>
+          </p:cNvPr>
+          <p:cNvSpPr/>
+          <p:nvPr/>
+        </p:nvSpPr>
+        <p:spPr>
+          <a:xfrm>
+            <a:off x="8809496" y="5495979"/>
+            <a:ext cx="2160000" cy="108000"/>
+          </a:xfrm>
+          <a:prstGeom prst="rect">
+            <a:avLst/>
+          </a:prstGeom>
+          <a:solidFill>
+            <a:srgbClr val="F59E9E"/>
+          </a:solidFill>
+          <a:ln w="12700">
+            <a:noFill/>
+          </a:ln>
+        </p:spPr>
+        <p:style>
+          <a:lnRef idx="2">
+            <a:schemeClr val="accent1">
+              <a:shade val="50000"/>
+            </a:schemeClr>
+          </a:lnRef>
+          <a:fillRef idx="1">
+            <a:schemeClr val="accent1"/>
+          </a:fillRef>
+          <a:effectRef idx="0">
+            <a:schemeClr val="accent1"/>
+          </a:effectRef>
+          <a:fontRef idx="minor">
+            <a:schemeClr val="lt1"/>
+          </a:fontRef>
+        </p:style>
+        <p:txBody>
+          <a:bodyPr rtlCol="0" anchor="ctr"/>
+          <a:lstStyle/>
+          <a:p>
+            <a:pPr algn="ctr"/>
+            <a:endParaRPr lang="en-US"/>
+          </a:p>
+        </p:txBody>
+      </p:sp>
+      <p:sp>
+        <p:nvSpPr>
+          <p:cNvPr id="19" name="Rectangle 18">
+            <a:extLst>
+              <a:ext uri="{FF2B5EF4-FFF2-40B4-BE49-F238E27FC236}">
+                <a16:creationId xmlns:a16="http://schemas.microsoft.com/office/drawing/2014/main" id="{E6E91D9A-3F17-CD48-80AF-BE2201A25D59}"/>
+              </a:ext>
+            </a:extLst>
+          </p:cNvPr>
+          <p:cNvSpPr/>
+          <p:nvPr/>
+        </p:nvSpPr>
+        <p:spPr>
+          <a:xfrm>
+            <a:off x="10883897" y="612828"/>
+            <a:ext cx="108000" cy="2160000"/>
+          </a:xfrm>
+          <a:prstGeom prst="rect">
+            <a:avLst/>
+          </a:prstGeom>
+          <a:solidFill>
+            <a:srgbClr val="F1727F"/>
+          </a:solidFill>
+          <a:ln w="12700">
+            <a:noFill/>
+          </a:ln>
+        </p:spPr>
+        <p:style>
+          <a:lnRef idx="2">
+            <a:schemeClr val="accent1">
+              <a:shade val="50000"/>
+            </a:schemeClr>
+          </a:lnRef>
+          <a:fillRef idx="1">
+            <a:schemeClr val="accent1"/>
+          </a:fillRef>
+          <a:effectRef idx="0">
+            <a:schemeClr val="accent1"/>
+          </a:effectRef>
+          <a:fontRef idx="minor">
+            <a:schemeClr val="lt1"/>
+          </a:fontRef>
+        </p:style>
+        <p:txBody>
+          <a:bodyPr rtlCol="0" anchor="ctr"/>
+          <a:lstStyle/>
+          <a:p>
+            <a:pPr algn="ctr"/>
+            <a:endParaRPr lang="en-US"/>
+          </a:p>
+        </p:txBody>
+      </p:sp>
+      <p:sp>
+        <p:nvSpPr>
+          <p:cNvPr id="20" name="Rectangle 19">
+            <a:extLst>
+              <a:ext uri="{FF2B5EF4-FFF2-40B4-BE49-F238E27FC236}">
+                <a16:creationId xmlns:a16="http://schemas.microsoft.com/office/drawing/2014/main" id="{7E7A09BF-47D5-7249-8FDD-25D8B773A542}"/>
+              </a:ext>
+            </a:extLst>
+          </p:cNvPr>
+          <p:cNvSpPr/>
+          <p:nvPr/>
+        </p:nvSpPr>
+        <p:spPr>
+          <a:xfrm>
+            <a:off x="5965395" y="612828"/>
+            <a:ext cx="2160000" cy="108000"/>
+          </a:xfrm>
+          <a:prstGeom prst="rect">
+            <a:avLst/>
+          </a:prstGeom>
+          <a:solidFill>
+            <a:srgbClr val="C16C86"/>
+          </a:solidFill>
+          <a:ln w="12700">
+            <a:noFill/>
+          </a:ln>
+        </p:spPr>
+        <p:style>
+          <a:lnRef idx="2">
+            <a:schemeClr val="accent1">
+              <a:shade val="50000"/>
+            </a:schemeClr>
+          </a:lnRef>
+          <a:fillRef idx="1">
+            <a:schemeClr val="accent1"/>
+          </a:fillRef>
+          <a:effectRef idx="0">
+            <a:schemeClr val="accent1"/>
+          </a:effectRef>
+          <a:fontRef idx="minor">
+            <a:schemeClr val="lt1"/>
+          </a:fontRef>
+        </p:style>
+        <p:txBody>
+          <a:bodyPr rtlCol="0" anchor="ctr"/>
+          <a:lstStyle/>
+          <a:p>
+            <a:pPr algn="ctr"/>
+            <a:endParaRPr lang="en-US"/>
+          </a:p>
+        </p:txBody>
+      </p:sp>
+      <p:sp>
+        <p:nvSpPr>
+          <p:cNvPr id="21" name="Rectangle 20">
+            <a:extLst>
+              <a:ext uri="{FF2B5EF4-FFF2-40B4-BE49-F238E27FC236}">
+                <a16:creationId xmlns:a16="http://schemas.microsoft.com/office/drawing/2014/main" id="{8AF850E0-8C52-7B4C-A384-A31B2EAC3111}"/>
+              </a:ext>
+            </a:extLst>
+          </p:cNvPr>
+          <p:cNvSpPr/>
+          <p:nvPr/>
+        </p:nvSpPr>
+        <p:spPr>
+          <a:xfrm>
+            <a:off x="5965395" y="3432036"/>
+            <a:ext cx="108000" cy="2160000"/>
+          </a:xfrm>
+          <a:prstGeom prst="rect">
+            <a:avLst/>
+          </a:prstGeom>
+          <a:solidFill>
+            <a:srgbClr val="335C7E"/>
+          </a:solidFill>
+          <a:ln w="12700">
+            <a:noFill/>
+          </a:ln>
+        </p:spPr>
+        <p:style>
+          <a:lnRef idx="2">
+            <a:schemeClr val="accent1">
+              <a:shade val="50000"/>
+            </a:schemeClr>
+          </a:lnRef>
+          <a:fillRef idx="1">
+            <a:schemeClr val="accent1"/>
+          </a:fillRef>
+          <a:effectRef idx="0">
+            <a:schemeClr val="accent1"/>
+          </a:effectRef>
+          <a:fontRef idx="minor">
+            <a:schemeClr val="lt1"/>
+          </a:fontRef>
+        </p:style>
+        <p:txBody>
+          <a:bodyPr rtlCol="0" anchor="ctr"/>
+          <a:lstStyle/>
+          <a:p>
+            <a:pPr algn="ctr"/>
+            <a:endParaRPr lang="en-US"/>
+          </a:p>
+        </p:txBody>
+      </p:sp>
+      <p:sp>
+        <p:nvSpPr>
+          <p:cNvPr id="3" name="L-shape 2">
+            <a:extLst>
+              <a:ext uri="{FF2B5EF4-FFF2-40B4-BE49-F238E27FC236}">
+                <a16:creationId xmlns:a16="http://schemas.microsoft.com/office/drawing/2014/main" id="{9DAFBCD1-02A0-C243-AD90-AE00844EA27C}"/>
+              </a:ext>
+            </a:extLst>
+          </p:cNvPr>
+          <p:cNvSpPr/>
+          <p:nvPr/>
+        </p:nvSpPr>
+        <p:spPr>
+          <a:xfrm rot="2652370">
+            <a:off x="7264995" y="2242032"/>
+            <a:ext cx="1720800" cy="1720800"/>
+          </a:xfrm>
+          <a:prstGeom prst="corner">
+            <a:avLst>
+              <a:gd name="adj1" fmla="val 28205"/>
+              <a:gd name="adj2" fmla="val 27564"/>
+            </a:avLst>
+          </a:prstGeom>
+          <a:solidFill>
+            <a:srgbClr val="335C7E"/>
+          </a:solidFill>
+          <a:ln>
+            <a:noFill/>
+          </a:ln>
+        </p:spPr>
+        <p:style>
+          <a:lnRef idx="2">
+            <a:schemeClr val="accent1">
+              <a:shade val="50000"/>
+            </a:schemeClr>
+          </a:lnRef>
+          <a:fillRef idx="1">
+            <a:schemeClr val="accent1"/>
+          </a:fillRef>
+          <a:effectRef idx="0">
+            <a:schemeClr val="accent1"/>
+          </a:effectRef>
+          <a:fontRef idx="minor">
+            <a:schemeClr val="lt1"/>
+          </a:fontRef>
+        </p:style>
+        <p:txBody>
+          <a:bodyPr rtlCol="0" anchor="ctr"/>
+          <a:lstStyle/>
+          <a:p>
+            <a:pPr algn="ctr"/>
+            <a:endParaRPr lang="en-US"/>
+          </a:p>
+        </p:txBody>
+      </p:sp>
+      <p:sp>
+        <p:nvSpPr>
+          <p:cNvPr id="7" name="Rectangle 6">
+            <a:extLst>
+              <a:ext uri="{FF2B5EF4-FFF2-40B4-BE49-F238E27FC236}">
+                <a16:creationId xmlns:a16="http://schemas.microsoft.com/office/drawing/2014/main" id="{3F22B226-3D3D-0C4D-A38D-EAFD59989359}"/>
+              </a:ext>
+            </a:extLst>
+          </p:cNvPr>
+          <p:cNvSpPr/>
+          <p:nvPr/>
+        </p:nvSpPr>
+        <p:spPr>
+          <a:xfrm>
+            <a:off x="7409009" y="2825903"/>
+            <a:ext cx="2069182" cy="553057"/>
+          </a:xfrm>
+          <a:prstGeom prst="rect">
+            <a:avLst/>
+          </a:prstGeom>
+          <a:solidFill>
+            <a:srgbClr val="335C7E"/>
+          </a:solidFill>
+          <a:ln>
+            <a:noFill/>
+          </a:ln>
+        </p:spPr>
+        <p:style>
+          <a:lnRef idx="2">
+            <a:schemeClr val="accent1">
+              <a:shade val="50000"/>
+            </a:schemeClr>
+          </a:lnRef>
+          <a:fillRef idx="1">
+            <a:schemeClr val="accent1"/>
+          </a:fillRef>
+          <a:effectRef idx="0">
+            <a:schemeClr val="accent1"/>
+          </a:effectRef>
+          <a:fontRef idx="minor">
+            <a:schemeClr val="lt1"/>
+          </a:fontRef>
+        </p:style>
+        <p:txBody>
+          <a:bodyPr rtlCol="0" anchor="ctr"/>
+          <a:lstStyle/>
+          <a:p>
+            <a:pPr algn="ctr"/>
+            <a:endParaRPr lang="en-US"/>
+          </a:p>
+        </p:txBody>
+      </p:sp>
+    </p:spTree>
+    <p:extLst>
+      <p:ext uri="{BB962C8B-B14F-4D97-AF65-F5344CB8AC3E}">
+        <p14:creationId xmlns:p14="http://schemas.microsoft.com/office/powerpoint/2010/main" val="1818785394"/>
+      </p:ext>
+    </p:extLst>
+  </p:cSld>
+  <p:clrMapOvr>
+    <a:masterClrMapping/>
+  </p:clrMapOvr>
+</p:sld>
+</file>
+
+<file path=ppt/slides/slide8.xml><?xml version="1.0" encoding="utf-8"?>
+<p:sld xmlns:a="http://schemas.openxmlformats.org/drawingml/2006/main" xmlns:r="http://schemas.openxmlformats.org/officeDocument/2006/relationships" xmlns:p="http://schemas.openxmlformats.org/presentationml/2006/main">
+  <p:cSld>
+    <p:spTree>
+      <p:nvGrpSpPr>
+        <p:cNvPr id="1" name=""/>
+        <p:cNvGrpSpPr/>
+        <p:nvPr/>
+      </p:nvGrpSpPr>
+      <p:grpSpPr>
+        <a:xfrm>
+          <a:off x="0" y="0"/>
+          <a:ext cx="0" cy="0"/>
+          <a:chOff x="0" y="0"/>
+          <a:chExt cx="0" cy="0"/>
+        </a:xfrm>
+      </p:grpSpPr>
+      <p:sp>
+        <p:nvSpPr>
+          <p:cNvPr id="6" name="Rectangle 5">
+            <a:extLst>
+              <a:ext uri="{FF2B5EF4-FFF2-40B4-BE49-F238E27FC236}">
+                <a16:creationId xmlns:a16="http://schemas.microsoft.com/office/drawing/2014/main" id="{F68F3E1A-564F-0945-A6DE-D9139DAF94D4}"/>
+              </a:ext>
+            </a:extLst>
+          </p:cNvPr>
+          <p:cNvSpPr/>
+          <p:nvPr/>
+        </p:nvSpPr>
+        <p:spPr>
+          <a:xfrm>
             <a:off x="7064877" y="612828"/>
             <a:ext cx="4996593" cy="4979208"/>
           </a:xfrm>
@@ -6155,7 +6944,7 @@
 </p:sld>
 </file>
 
-<file path=ppt/slides/slide7.xml><?xml version="1.0" encoding="utf-8"?>
+<file path=ppt/slides/slide9.xml><?xml version="1.0" encoding="utf-8"?>
 <p:sld xmlns:a="http://schemas.openxmlformats.org/drawingml/2006/main" xmlns:r="http://schemas.openxmlformats.org/officeDocument/2006/relationships" xmlns:p="http://schemas.openxmlformats.org/presentationml/2006/main">
   <p:cSld>
     <p:spTree>

--- a/images/Logo.pptx
+++ b/images/Logo.pptx
@@ -10,10 +10,11 @@
     <p:sldId id="258" r:id="rId4"/>
     <p:sldId id="259" r:id="rId5"/>
     <p:sldId id="263" r:id="rId6"/>
-    <p:sldId id="264" r:id="rId7"/>
-    <p:sldId id="260" r:id="rId8"/>
-    <p:sldId id="261" r:id="rId9"/>
-    <p:sldId id="262" r:id="rId10"/>
+    <p:sldId id="265" r:id="rId7"/>
+    <p:sldId id="266" r:id="rId8"/>
+    <p:sldId id="260" r:id="rId9"/>
+    <p:sldId id="261" r:id="rId10"/>
+    <p:sldId id="262" r:id="rId11"/>
   </p:sldIdLst>
   <p:sldSz cx="12192000" cy="6858000"/>
   <p:notesSz cx="6858000" cy="9144000"/>
@@ -3809,6 +3810,138 @@
 </p:sld>
 </file>
 
+<file path=ppt/slides/slide10.xml><?xml version="1.0" encoding="utf-8"?>
+<p:sld xmlns:a="http://schemas.openxmlformats.org/drawingml/2006/main" xmlns:r="http://schemas.openxmlformats.org/officeDocument/2006/relationships" xmlns:p="http://schemas.openxmlformats.org/presentationml/2006/main">
+  <p:cSld>
+    <p:spTree>
+      <p:nvGrpSpPr>
+        <p:cNvPr id="1" name=""/>
+        <p:cNvGrpSpPr/>
+        <p:nvPr/>
+      </p:nvGrpSpPr>
+      <p:grpSpPr>
+        <a:xfrm>
+          <a:off x="0" y="0"/>
+          <a:ext cx="0" cy="0"/>
+          <a:chOff x="0" y="0"/>
+          <a:chExt cx="0" cy="0"/>
+        </a:xfrm>
+      </p:grpSpPr>
+      <p:sp>
+        <p:nvSpPr>
+          <p:cNvPr id="5" name="Rectangle 4">
+            <a:extLst>
+              <a:ext uri="{FF2B5EF4-FFF2-40B4-BE49-F238E27FC236}">
+                <a16:creationId xmlns:a16="http://schemas.microsoft.com/office/drawing/2014/main" id="{9A427F68-04E0-7C40-B84B-D8B8ADB897CF}"/>
+              </a:ext>
+            </a:extLst>
+          </p:cNvPr>
+          <p:cNvSpPr/>
+          <p:nvPr/>
+        </p:nvSpPr>
+        <p:spPr>
+          <a:xfrm>
+            <a:off x="154684" y="438303"/>
+            <a:ext cx="5756259" cy="4580011"/>
+          </a:xfrm>
+          <a:prstGeom prst="rect">
+            <a:avLst/>
+          </a:prstGeom>
+          <a:noFill/>
+          <a:ln>
+            <a:noFill/>
+          </a:ln>
+        </p:spPr>
+        <p:style>
+          <a:lnRef idx="2">
+            <a:schemeClr val="accent1">
+              <a:shade val="50000"/>
+            </a:schemeClr>
+          </a:lnRef>
+          <a:fillRef idx="1">
+            <a:schemeClr val="accent1"/>
+          </a:fillRef>
+          <a:effectRef idx="0">
+            <a:schemeClr val="accent1"/>
+          </a:effectRef>
+          <a:fontRef idx="minor">
+            <a:schemeClr val="lt1"/>
+          </a:fontRef>
+        </p:style>
+        <p:txBody>
+          <a:bodyPr rtlCol="0" anchor="ctr"/>
+          <a:lstStyle/>
+          <a:p>
+            <a:pPr algn="ctr"/>
+            <a:endParaRPr lang="en-US"/>
+          </a:p>
+        </p:txBody>
+      </p:sp>
+      <p:sp>
+        <p:nvSpPr>
+          <p:cNvPr id="8" name="Rectangle 7">
+            <a:extLst>
+              <a:ext uri="{FF2B5EF4-FFF2-40B4-BE49-F238E27FC236}">
+                <a16:creationId xmlns:a16="http://schemas.microsoft.com/office/drawing/2014/main" id="{A1685247-8415-414F-B3CE-089251D6C360}"/>
+              </a:ext>
+            </a:extLst>
+          </p:cNvPr>
+          <p:cNvSpPr/>
+          <p:nvPr/>
+        </p:nvSpPr>
+        <p:spPr>
+          <a:xfrm>
+            <a:off x="12700" y="3000375"/>
+            <a:ext cx="12166600" cy="148514"/>
+          </a:xfrm>
+          <a:prstGeom prst="rect">
+            <a:avLst/>
+          </a:prstGeom>
+          <a:solidFill>
+            <a:srgbClr val="339889"/>
+          </a:solidFill>
+          <a:ln>
+            <a:noFill/>
+          </a:ln>
+        </p:spPr>
+        <p:style>
+          <a:lnRef idx="2">
+            <a:schemeClr val="accent1">
+              <a:shade val="50000"/>
+            </a:schemeClr>
+          </a:lnRef>
+          <a:fillRef idx="1">
+            <a:schemeClr val="accent1"/>
+          </a:fillRef>
+          <a:effectRef idx="0">
+            <a:schemeClr val="accent1"/>
+          </a:effectRef>
+          <a:fontRef idx="minor">
+            <a:schemeClr val="lt1"/>
+          </a:fontRef>
+        </p:style>
+        <p:txBody>
+          <a:bodyPr rtlCol="0" anchor="ctr"/>
+          <a:lstStyle/>
+          <a:p>
+            <a:pPr algn="ctr"/>
+            <a:endParaRPr lang="en-US"/>
+          </a:p>
+        </p:txBody>
+      </p:sp>
+    </p:spTree>
+    <p:extLst>
+      <p:ext uri="{BB962C8B-B14F-4D97-AF65-F5344CB8AC3E}">
+        <p14:creationId xmlns:p14="http://schemas.microsoft.com/office/powerpoint/2010/main" val="4143478526"/>
+      </p:ext>
+    </p:extLst>
+  </p:cSld>
+  <p:clrMapOvr>
+    <a:masterClrMapping/>
+  </p:clrMapOvr>
+</p:sld>
+</file>
+
 <file path=ppt/slides/slide2.xml><?xml version="1.0" encoding="utf-8"?>
 <p:sld xmlns:a="http://schemas.openxmlformats.org/drawingml/2006/main" xmlns:r="http://schemas.openxmlformats.org/officeDocument/2006/relationships" xmlns:p="http://schemas.openxmlformats.org/presentationml/2006/main">
   <p:cSld>
@@ -5539,8 +5672,8 @@
         </p:nvSpPr>
         <p:spPr>
           <a:xfrm>
-            <a:off x="6240257" y="3106168"/>
-            <a:ext cx="4003064" cy="2666418"/>
+            <a:off x="6499121" y="3106168"/>
+            <a:ext cx="3744200" cy="2666418"/>
           </a:xfrm>
           <a:prstGeom prst="rect">
             <a:avLst/>
@@ -5740,8 +5873,8 @@
         </p:nvSpPr>
         <p:spPr>
           <a:xfrm>
-            <a:off x="6698589" y="4175609"/>
-            <a:ext cx="130686" cy="487423"/>
+            <a:off x="6704977" y="4164458"/>
+            <a:ext cx="130686" cy="899668"/>
           </a:xfrm>
           <a:prstGeom prst="rect">
             <a:avLst/>
@@ -5986,10 +6119,110 @@
           </a:p>
         </p:txBody>
       </p:sp>
+      <p:sp>
+        <p:nvSpPr>
+          <p:cNvPr id="11" name="TextBox 10">
+            <a:extLst>
+              <a:ext uri="{FF2B5EF4-FFF2-40B4-BE49-F238E27FC236}">
+                <a16:creationId xmlns:a16="http://schemas.microsoft.com/office/drawing/2014/main" id="{1A20B4DB-094C-8948-9EA3-B7A95F52CCD0}"/>
+              </a:ext>
+            </a:extLst>
+          </p:cNvPr>
+          <p:cNvSpPr txBox="1"/>
+          <p:nvPr/>
+        </p:nvSpPr>
+        <p:spPr>
+          <a:xfrm rot="10800000">
+            <a:off x="6534217" y="5041315"/>
+            <a:ext cx="790833" cy="923330"/>
+          </a:xfrm>
+          <a:prstGeom prst="rect">
+            <a:avLst/>
+          </a:prstGeom>
+          <a:noFill/>
+        </p:spPr>
+        <p:txBody>
+          <a:bodyPr wrap="square" rtlCol="0">
+            <a:spAutoFit/>
+          </a:bodyPr>
+          <a:lstStyle/>
+          <a:p>
+            <a:r>
+              <a:rPr lang="hi-IN" sz="2400" b="1" dirty="0">
+                <a:solidFill>
+                  <a:srgbClr val="339889"/>
+                </a:solidFill>
+              </a:rPr>
+              <a:t>जैन</a:t>
+            </a:r>
+            <a:r>
+              <a:rPr lang="en-US" sz="5400" b="1" dirty="0">
+                <a:solidFill>
+                  <a:srgbClr val="335C7E"/>
+                </a:solidFill>
+                <a:latin typeface="Google Sans Medium" panose="020B0503030502040204" pitchFamily="34" charset="0"/>
+              </a:rPr>
+              <a:t> </a:t>
+            </a:r>
+          </a:p>
+        </p:txBody>
+      </p:sp>
+      <p:sp>
+        <p:nvSpPr>
+          <p:cNvPr id="15" name="Rectangle 14">
+            <a:extLst>
+              <a:ext uri="{FF2B5EF4-FFF2-40B4-BE49-F238E27FC236}">
+                <a16:creationId xmlns:a16="http://schemas.microsoft.com/office/drawing/2014/main" id="{0894A55E-70FC-7A4D-BEA7-0731DFABF274}"/>
+              </a:ext>
+            </a:extLst>
+          </p:cNvPr>
+          <p:cNvSpPr/>
+          <p:nvPr/>
+        </p:nvSpPr>
+        <p:spPr>
+          <a:xfrm>
+            <a:off x="6639634" y="4614292"/>
+            <a:ext cx="130686" cy="899668"/>
+          </a:xfrm>
+          <a:prstGeom prst="rect">
+            <a:avLst/>
+          </a:prstGeom>
+          <a:solidFill>
+            <a:srgbClr val="F6F7F8"/>
+          </a:solidFill>
+          <a:ln w="12700">
+            <a:noFill/>
+          </a:ln>
+        </p:spPr>
+        <p:style>
+          <a:lnRef idx="2">
+            <a:schemeClr val="accent1">
+              <a:shade val="50000"/>
+            </a:schemeClr>
+          </a:lnRef>
+          <a:fillRef idx="1">
+            <a:schemeClr val="accent1"/>
+          </a:fillRef>
+          <a:effectRef idx="0">
+            <a:schemeClr val="accent1"/>
+          </a:effectRef>
+          <a:fontRef idx="minor">
+            <a:schemeClr val="lt1"/>
+          </a:fontRef>
+        </p:style>
+        <p:txBody>
+          <a:bodyPr rtlCol="0" anchor="ctr"/>
+          <a:lstStyle/>
+          <a:p>
+            <a:pPr algn="ctr"/>
+            <a:endParaRPr lang="en-US" dirty="0"/>
+          </a:p>
+        </p:txBody>
+      </p:sp>
     </p:spTree>
     <p:extLst>
       <p:ext uri="{BB962C8B-B14F-4D97-AF65-F5344CB8AC3E}">
-        <p14:creationId xmlns:p14="http://schemas.microsoft.com/office/powerpoint/2010/main" val="2276941650"/>
+        <p14:creationId xmlns:p14="http://schemas.microsoft.com/office/powerpoint/2010/main" val="4224123740"/>
       </p:ext>
     </p:extLst>
   </p:cSld>
@@ -6018,10 +6251,10 @@
       </p:grpSpPr>
       <p:sp>
         <p:nvSpPr>
-          <p:cNvPr id="6" name="Rectangle 5">
-            <a:extLst>
-              <a:ext uri="{FF2B5EF4-FFF2-40B4-BE49-F238E27FC236}">
-                <a16:creationId xmlns:a16="http://schemas.microsoft.com/office/drawing/2014/main" id="{F68F3E1A-564F-0945-A6DE-D9139DAF94D4}"/>
+          <p:cNvPr id="20" name="Rectangle 19">
+            <a:extLst>
+              <a:ext uri="{FF2B5EF4-FFF2-40B4-BE49-F238E27FC236}">
+                <a16:creationId xmlns:a16="http://schemas.microsoft.com/office/drawing/2014/main" id="{E80A1A0F-1EA1-6A4B-85BA-F7C43B130CD3}"/>
               </a:ext>
             </a:extLst>
           </p:cNvPr>
@@ -6030,8 +6263,8 @@
         </p:nvSpPr>
         <p:spPr>
           <a:xfrm>
-            <a:off x="5965419" y="612828"/>
-            <a:ext cx="4996593" cy="4979208"/>
+            <a:off x="838331" y="1382305"/>
+            <a:ext cx="5052672" cy="2243837"/>
           </a:xfrm>
           <a:prstGeom prst="rect">
             <a:avLst/>
@@ -6040,11 +6273,7 @@
             <a:srgbClr val="F6F7F8"/>
           </a:solidFill>
           <a:ln w="12700">
-            <a:solidFill>
-              <a:schemeClr val="bg2">
-                <a:lumMod val="75000"/>
-              </a:schemeClr>
-            </a:solidFill>
+            <a:noFill/>
           </a:ln>
         </p:spPr>
         <p:style>
@@ -6074,10 +6303,10 @@
       </p:sp>
       <p:sp>
         <p:nvSpPr>
-          <p:cNvPr id="15" name="Rectangle 14">
-            <a:extLst>
-              <a:ext uri="{FF2B5EF4-FFF2-40B4-BE49-F238E27FC236}">
-                <a16:creationId xmlns:a16="http://schemas.microsoft.com/office/drawing/2014/main" id="{BFC01515-0C75-A94E-A507-2C5D301A0614}"/>
+          <p:cNvPr id="6" name="Rectangle 5">
+            <a:extLst>
+              <a:ext uri="{FF2B5EF4-FFF2-40B4-BE49-F238E27FC236}">
+                <a16:creationId xmlns:a16="http://schemas.microsoft.com/office/drawing/2014/main" id="{F68F3E1A-564F-0945-A6DE-D9139DAF94D4}"/>
               </a:ext>
             </a:extLst>
           </p:cNvPr>
@@ -6086,13 +6315,15 @@
         </p:nvSpPr>
         <p:spPr>
           <a:xfrm>
-            <a:off x="5829296" y="503965"/>
-            <a:ext cx="5192486" cy="5178378"/>
-          </a:xfrm>
-          <a:prstGeom prst="rect">
-            <a:avLst/>
-          </a:prstGeom>
-          <a:noFill/>
+            <a:off x="6499121" y="3106168"/>
+            <a:ext cx="3744200" cy="2666418"/>
+          </a:xfrm>
+          <a:prstGeom prst="rect">
+            <a:avLst/>
+          </a:prstGeom>
+          <a:solidFill>
+            <a:srgbClr val="F6F7F8"/>
+          </a:solidFill>
           <a:ln w="12700">
             <a:noFill/>
           </a:ln>
@@ -6124,10 +6355,10 @@
       </p:sp>
       <p:sp>
         <p:nvSpPr>
-          <p:cNvPr id="16" name="TextBox 15">
-            <a:extLst>
-              <a:ext uri="{FF2B5EF4-FFF2-40B4-BE49-F238E27FC236}">
-                <a16:creationId xmlns:a16="http://schemas.microsoft.com/office/drawing/2014/main" id="{A829F524-8735-6445-BDB9-D34750F6F8E1}"/>
+          <p:cNvPr id="8" name="TextBox 7">
+            <a:extLst>
+              <a:ext uri="{FF2B5EF4-FFF2-40B4-BE49-F238E27FC236}">
+                <a16:creationId xmlns:a16="http://schemas.microsoft.com/office/drawing/2014/main" id="{102572D4-543B-C547-A8F1-ACBD4D0435CC}"/>
               </a:ext>
             </a:extLst>
           </p:cNvPr>
@@ -6135,9 +6366,9 @@
           <p:nvPr/>
         </p:nvSpPr>
         <p:spPr>
-          <a:xfrm>
-            <a:off x="8809496" y="4651176"/>
-            <a:ext cx="1412190" cy="584775"/>
+          <a:xfrm rot="10800000" flipH="1">
+            <a:off x="6368435" y="3823780"/>
+            <a:ext cx="3929204" cy="1785104"/>
           </a:xfrm>
           <a:prstGeom prst="rect">
             <a:avLst/>
@@ -6150,17 +6381,117 @@
           </a:bodyPr>
           <a:lstStyle/>
           <a:p>
-            <a:r>
-              <a:rPr lang="en-US" sz="3200" b="1" dirty="0">
+            <a:pPr algn="ctr"/>
+            <a:r>
+              <a:rPr lang="hi-IN" sz="11000" b="1" dirty="0">
                 <a:solidFill>
-                  <a:srgbClr val="335C7E"/>
+                  <a:srgbClr val="339889"/>
                 </a:solidFill>
                 <a:latin typeface="Google Sans" panose="020B0503030502040204" pitchFamily="34" charset="0"/>
               </a:rPr>
-              <a:t>BACK</a:t>
-            </a:r>
-            <a:r>
-              <a:rPr lang="en-US" sz="2400" b="1" dirty="0">
+              <a:t>अर्पित</a:t>
+            </a:r>
+            <a:r>
+              <a:rPr lang="en-US" sz="8000" b="1" dirty="0">
+                <a:solidFill>
+                  <a:srgbClr val="339889"/>
+                </a:solidFill>
+                <a:latin typeface="Google Sans" panose="020B0503030502040204" pitchFamily="34" charset="0"/>
+              </a:rPr>
+              <a:t> </a:t>
+            </a:r>
+          </a:p>
+        </p:txBody>
+      </p:sp>
+      <p:sp>
+        <p:nvSpPr>
+          <p:cNvPr id="7" name="TextBox 6">
+            <a:extLst>
+              <a:ext uri="{FF2B5EF4-FFF2-40B4-BE49-F238E27FC236}">
+                <a16:creationId xmlns:a16="http://schemas.microsoft.com/office/drawing/2014/main" id="{53902F90-FD5E-FF4C-AA58-8E79559E6E9D}"/>
+              </a:ext>
+            </a:extLst>
+          </p:cNvPr>
+          <p:cNvSpPr txBox="1"/>
+          <p:nvPr/>
+        </p:nvSpPr>
+        <p:spPr>
+          <a:xfrm>
+            <a:off x="6553439" y="3255761"/>
+            <a:ext cx="3689882" cy="1446550"/>
+          </a:xfrm>
+          <a:prstGeom prst="rect">
+            <a:avLst/>
+          </a:prstGeom>
+          <a:noFill/>
+        </p:spPr>
+        <p:txBody>
+          <a:bodyPr wrap="square" rtlCol="0">
+            <a:spAutoFit/>
+          </a:bodyPr>
+          <a:lstStyle/>
+          <a:p>
+            <a:pPr algn="ctr"/>
+            <a:r>
+              <a:rPr lang="en-US" sz="8800" b="1" dirty="0">
+                <a:solidFill>
+                  <a:srgbClr val="339889"/>
+                </a:solidFill>
+                <a:latin typeface="Google Sans" panose="020B0503030502040204" pitchFamily="34" charset="0"/>
+              </a:rPr>
+              <a:t>ARPIT</a:t>
+            </a:r>
+            <a:r>
+              <a:rPr lang="en-US" sz="8000" b="1" dirty="0">
+                <a:solidFill>
+                  <a:srgbClr val="339889"/>
+                </a:solidFill>
+                <a:latin typeface="Google Sans" panose="020B0503030502040204" pitchFamily="34" charset="0"/>
+              </a:rPr>
+              <a:t> </a:t>
+            </a:r>
+          </a:p>
+        </p:txBody>
+      </p:sp>
+      <p:sp>
+        <p:nvSpPr>
+          <p:cNvPr id="16" name="TextBox 15">
+            <a:extLst>
+              <a:ext uri="{FF2B5EF4-FFF2-40B4-BE49-F238E27FC236}">
+                <a16:creationId xmlns:a16="http://schemas.microsoft.com/office/drawing/2014/main" id="{A829F524-8735-6445-BDB9-D34750F6F8E1}"/>
+              </a:ext>
+            </a:extLst>
+          </p:cNvPr>
+          <p:cNvSpPr txBox="1"/>
+          <p:nvPr/>
+        </p:nvSpPr>
+        <p:spPr>
+          <a:xfrm>
+            <a:off x="9281527" y="2795937"/>
+            <a:ext cx="790833" cy="923330"/>
+          </a:xfrm>
+          <a:prstGeom prst="rect">
+            <a:avLst/>
+          </a:prstGeom>
+          <a:noFill/>
+        </p:spPr>
+        <p:txBody>
+          <a:bodyPr wrap="square" rtlCol="0">
+            <a:spAutoFit/>
+          </a:bodyPr>
+          <a:lstStyle/>
+          <a:p>
+            <a:r>
+              <a:rPr lang="en-US" sz="2000" b="1" dirty="0">
+                <a:solidFill>
+                  <a:srgbClr val="339889"/>
+                </a:solidFill>
+                <a:latin typeface="Google Sans" panose="020B0503030502040204" pitchFamily="34" charset="0"/>
+              </a:rPr>
+              <a:t>JAIN</a:t>
+            </a:r>
+            <a:r>
+              <a:rPr lang="en-US" sz="5400" b="1" dirty="0">
                 <a:solidFill>
                   <a:srgbClr val="335C7E"/>
                 </a:solidFill>
@@ -6173,10 +6504,10 @@
       </p:sp>
       <p:sp>
         <p:nvSpPr>
-          <p:cNvPr id="18" name="Rectangle 17">
-            <a:extLst>
-              <a:ext uri="{FF2B5EF4-FFF2-40B4-BE49-F238E27FC236}">
-                <a16:creationId xmlns:a16="http://schemas.microsoft.com/office/drawing/2014/main" id="{6D60967A-5C64-3F43-8D6D-A2B42DD03D0E}"/>
+          <p:cNvPr id="9" name="Rectangle 8">
+            <a:extLst>
+              <a:ext uri="{FF2B5EF4-FFF2-40B4-BE49-F238E27FC236}">
+                <a16:creationId xmlns:a16="http://schemas.microsoft.com/office/drawing/2014/main" id="{9C0332C3-83A8-6448-ACCE-4B373BF094FA}"/>
               </a:ext>
             </a:extLst>
           </p:cNvPr>
@@ -6185,14 +6516,14 @@
         </p:nvSpPr>
         <p:spPr>
           <a:xfrm>
-            <a:off x="8809496" y="5495979"/>
-            <a:ext cx="2160000" cy="108000"/>
+            <a:off x="6704977" y="4164458"/>
+            <a:ext cx="130686" cy="899668"/>
           </a:xfrm>
           <a:prstGeom prst="rect">
             <a:avLst/>
           </a:prstGeom>
           <a:solidFill>
-            <a:srgbClr val="F59E9E"/>
+            <a:srgbClr val="F6F7F8"/>
           </a:solidFill>
           <a:ln w="12700">
             <a:noFill/>
@@ -6219,16 +6550,16 @@
           <a:lstStyle/>
           <a:p>
             <a:pPr algn="ctr"/>
-            <a:endParaRPr lang="en-US"/>
-          </a:p>
-        </p:txBody>
-      </p:sp>
-      <p:sp>
-        <p:nvSpPr>
-          <p:cNvPr id="19" name="Rectangle 18">
-            <a:extLst>
-              <a:ext uri="{FF2B5EF4-FFF2-40B4-BE49-F238E27FC236}">
-                <a16:creationId xmlns:a16="http://schemas.microsoft.com/office/drawing/2014/main" id="{E6E91D9A-3F17-CD48-80AF-BE2201A25D59}"/>
+            <a:endParaRPr lang="en-US" dirty="0"/>
+          </a:p>
+        </p:txBody>
+      </p:sp>
+      <p:sp>
+        <p:nvSpPr>
+          <p:cNvPr id="10" name="Rectangle 9">
+            <a:extLst>
+              <a:ext uri="{FF2B5EF4-FFF2-40B4-BE49-F238E27FC236}">
+                <a16:creationId xmlns:a16="http://schemas.microsoft.com/office/drawing/2014/main" id="{2C6D7C0E-C3B4-4B4A-93ED-A445237BE813}"/>
               </a:ext>
             </a:extLst>
           </p:cNvPr>
@@ -6237,14 +6568,14 @@
         </p:nvSpPr>
         <p:spPr>
           <a:xfrm>
-            <a:off x="10883897" y="612828"/>
-            <a:ext cx="108000" cy="2160000"/>
+            <a:off x="6995141" y="4322233"/>
+            <a:ext cx="130686" cy="405341"/>
           </a:xfrm>
           <a:prstGeom prst="rect">
             <a:avLst/>
           </a:prstGeom>
           <a:solidFill>
-            <a:srgbClr val="F1727F"/>
+            <a:srgbClr val="F6F7F8"/>
           </a:solidFill>
           <a:ln w="12700">
             <a:noFill/>
@@ -6271,16 +6602,16 @@
           <a:lstStyle/>
           <a:p>
             <a:pPr algn="ctr"/>
-            <a:endParaRPr lang="en-US"/>
-          </a:p>
-        </p:txBody>
-      </p:sp>
-      <p:sp>
-        <p:nvSpPr>
-          <p:cNvPr id="20" name="Rectangle 19">
-            <a:extLst>
-              <a:ext uri="{FF2B5EF4-FFF2-40B4-BE49-F238E27FC236}">
-                <a16:creationId xmlns:a16="http://schemas.microsoft.com/office/drawing/2014/main" id="{7E7A09BF-47D5-7249-8FDD-25D8B773A542}"/>
+            <a:endParaRPr lang="en-US" dirty="0"/>
+          </a:p>
+        </p:txBody>
+      </p:sp>
+      <p:sp>
+        <p:nvSpPr>
+          <p:cNvPr id="12" name="Rectangle 11">
+            <a:extLst>
+              <a:ext uri="{FF2B5EF4-FFF2-40B4-BE49-F238E27FC236}">
+                <a16:creationId xmlns:a16="http://schemas.microsoft.com/office/drawing/2014/main" id="{AED9B19C-967A-D146-94CB-6138C259257F}"/>
               </a:ext>
             </a:extLst>
           </p:cNvPr>
@@ -6289,14 +6620,14 @@
         </p:nvSpPr>
         <p:spPr>
           <a:xfrm>
-            <a:off x="5965395" y="612828"/>
-            <a:ext cx="2160000" cy="108000"/>
+            <a:off x="9032875" y="3514726"/>
+            <a:ext cx="63540" cy="1549400"/>
           </a:xfrm>
           <a:prstGeom prst="rect">
             <a:avLst/>
           </a:prstGeom>
           <a:solidFill>
-            <a:srgbClr val="C16C86"/>
+            <a:srgbClr val="F6F7F8"/>
           </a:solidFill>
           <a:ln w="12700">
             <a:noFill/>
@@ -6323,16 +6654,16 @@
           <a:lstStyle/>
           <a:p>
             <a:pPr algn="ctr"/>
-            <a:endParaRPr lang="en-US"/>
-          </a:p>
-        </p:txBody>
-      </p:sp>
-      <p:sp>
-        <p:nvSpPr>
-          <p:cNvPr id="21" name="Rectangle 20">
-            <a:extLst>
-              <a:ext uri="{FF2B5EF4-FFF2-40B4-BE49-F238E27FC236}">
-                <a16:creationId xmlns:a16="http://schemas.microsoft.com/office/drawing/2014/main" id="{8AF850E0-8C52-7B4C-A384-A31B2EAC3111}"/>
+            <a:endParaRPr lang="en-US" dirty="0"/>
+          </a:p>
+        </p:txBody>
+      </p:sp>
+      <p:sp>
+        <p:nvSpPr>
+          <p:cNvPr id="13" name="Rectangle 12">
+            <a:extLst>
+              <a:ext uri="{FF2B5EF4-FFF2-40B4-BE49-F238E27FC236}">
+                <a16:creationId xmlns:a16="http://schemas.microsoft.com/office/drawing/2014/main" id="{36E8FF7F-B4C3-C84F-ADD1-39A58A04296A}"/>
               </a:ext>
             </a:extLst>
           </p:cNvPr>
@@ -6341,14 +6672,14 @@
         </p:nvSpPr>
         <p:spPr>
           <a:xfrm>
-            <a:off x="5965395" y="3432036"/>
-            <a:ext cx="108000" cy="2160000"/>
+            <a:off x="7635342" y="3458030"/>
+            <a:ext cx="130686" cy="972456"/>
           </a:xfrm>
           <a:prstGeom prst="rect">
             <a:avLst/>
           </a:prstGeom>
           <a:solidFill>
-            <a:srgbClr val="335C7E"/>
+            <a:srgbClr val="F6F7F8"/>
           </a:solidFill>
           <a:ln w="12700">
             <a:noFill/>
@@ -6375,16 +6706,16 @@
           <a:lstStyle/>
           <a:p>
             <a:pPr algn="ctr"/>
-            <a:endParaRPr lang="en-US"/>
-          </a:p>
-        </p:txBody>
-      </p:sp>
-      <p:sp>
-        <p:nvSpPr>
-          <p:cNvPr id="3" name="L-shape 2">
-            <a:extLst>
-              <a:ext uri="{FF2B5EF4-FFF2-40B4-BE49-F238E27FC236}">
-                <a16:creationId xmlns:a16="http://schemas.microsoft.com/office/drawing/2014/main" id="{9DAFBCD1-02A0-C243-AD90-AE00844EA27C}"/>
+            <a:endParaRPr lang="en-US" dirty="0"/>
+          </a:p>
+        </p:txBody>
+      </p:sp>
+      <p:sp>
+        <p:nvSpPr>
+          <p:cNvPr id="14" name="Rectangle 13">
+            <a:extLst>
+              <a:ext uri="{FF2B5EF4-FFF2-40B4-BE49-F238E27FC236}">
+                <a16:creationId xmlns:a16="http://schemas.microsoft.com/office/drawing/2014/main" id="{4D8046A0-6631-E342-9604-76B471D4492E}"/>
               </a:ext>
             </a:extLst>
           </p:cNvPr>
@@ -6392,20 +6723,17 @@
           <p:nvPr/>
         </p:nvSpPr>
         <p:spPr>
-          <a:xfrm rot="2652370">
-            <a:off x="7264995" y="2242032"/>
-            <a:ext cx="1720800" cy="1720800"/>
-          </a:xfrm>
-          <a:prstGeom prst="corner">
-            <a:avLst>
-              <a:gd name="adj1" fmla="val 28205"/>
-              <a:gd name="adj2" fmla="val 27564"/>
-            </a:avLst>
+          <a:xfrm>
+            <a:off x="7808466" y="3542156"/>
+            <a:ext cx="130686" cy="837530"/>
+          </a:xfrm>
+          <a:prstGeom prst="rect">
+            <a:avLst/>
           </a:prstGeom>
           <a:solidFill>
-            <a:srgbClr val="335C7E"/>
+            <a:srgbClr val="339889"/>
           </a:solidFill>
-          <a:ln>
+          <a:ln w="12700">
             <a:noFill/>
           </a:ln>
         </p:spPr>
@@ -6430,16 +6758,64 @@
           <a:lstStyle/>
           <a:p>
             <a:pPr algn="ctr"/>
-            <a:endParaRPr lang="en-US"/>
-          </a:p>
-        </p:txBody>
-      </p:sp>
-      <p:sp>
-        <p:nvSpPr>
-          <p:cNvPr id="7" name="Rectangle 6">
-            <a:extLst>
-              <a:ext uri="{FF2B5EF4-FFF2-40B4-BE49-F238E27FC236}">
-                <a16:creationId xmlns:a16="http://schemas.microsoft.com/office/drawing/2014/main" id="{3F22B226-3D3D-0C4D-A38D-EAFD59989359}"/>
+            <a:endParaRPr lang="en-US" dirty="0"/>
+          </a:p>
+        </p:txBody>
+      </p:sp>
+      <p:sp>
+        <p:nvSpPr>
+          <p:cNvPr id="11" name="TextBox 10">
+            <a:extLst>
+              <a:ext uri="{FF2B5EF4-FFF2-40B4-BE49-F238E27FC236}">
+                <a16:creationId xmlns:a16="http://schemas.microsoft.com/office/drawing/2014/main" id="{1A20B4DB-094C-8948-9EA3-B7A95F52CCD0}"/>
+              </a:ext>
+            </a:extLst>
+          </p:cNvPr>
+          <p:cNvSpPr txBox="1"/>
+          <p:nvPr/>
+        </p:nvSpPr>
+        <p:spPr>
+          <a:xfrm>
+            <a:off x="997745" y="584981"/>
+            <a:ext cx="3626344" cy="2646878"/>
+          </a:xfrm>
+          <a:prstGeom prst="rect">
+            <a:avLst/>
+          </a:prstGeom>
+          <a:noFill/>
+        </p:spPr>
+        <p:txBody>
+          <a:bodyPr wrap="square" rtlCol="0">
+            <a:spAutoFit/>
+          </a:bodyPr>
+          <a:lstStyle/>
+          <a:p>
+            <a:r>
+              <a:rPr lang="hi-IN" sz="8800" b="1" dirty="0">
+                <a:solidFill>
+                  <a:srgbClr val="339889"/>
+                </a:solidFill>
+              </a:rPr>
+              <a:t>नमस्ते</a:t>
+            </a:r>
+            <a:r>
+              <a:rPr lang="en-US" sz="16600" b="1" dirty="0">
+                <a:solidFill>
+                  <a:srgbClr val="335C7E"/>
+                </a:solidFill>
+                <a:latin typeface="Google Sans Medium" panose="020B0503030502040204" pitchFamily="34" charset="0"/>
+              </a:rPr>
+              <a:t> </a:t>
+            </a:r>
+          </a:p>
+        </p:txBody>
+      </p:sp>
+      <p:sp>
+        <p:nvSpPr>
+          <p:cNvPr id="15" name="Rectangle 14">
+            <a:extLst>
+              <a:ext uri="{FF2B5EF4-FFF2-40B4-BE49-F238E27FC236}">
+                <a16:creationId xmlns:a16="http://schemas.microsoft.com/office/drawing/2014/main" id="{0894A55E-70FC-7A4D-BEA7-0731DFABF274}"/>
               </a:ext>
             </a:extLst>
           </p:cNvPr>
@@ -6448,16 +6824,16 @@
         </p:nvSpPr>
         <p:spPr>
           <a:xfrm>
-            <a:off x="7409009" y="2825903"/>
-            <a:ext cx="2069182" cy="553057"/>
+            <a:off x="6639634" y="4614292"/>
+            <a:ext cx="130686" cy="899668"/>
           </a:xfrm>
           <a:prstGeom prst="rect">
             <a:avLst/>
           </a:prstGeom>
           <a:solidFill>
-            <a:srgbClr val="335C7E"/>
+            <a:srgbClr val="F6F7F8"/>
           </a:solidFill>
-          <a:ln>
+          <a:ln w="12700">
             <a:noFill/>
           </a:ln>
         </p:spPr>
@@ -6482,14 +6858,428 @@
           <a:lstStyle/>
           <a:p>
             <a:pPr algn="ctr"/>
-            <a:endParaRPr lang="en-US"/>
+            <a:endParaRPr lang="en-US" dirty="0"/>
+          </a:p>
+        </p:txBody>
+      </p:sp>
+      <p:sp>
+        <p:nvSpPr>
+          <p:cNvPr id="17" name="TextBox 16">
+            <a:extLst>
+              <a:ext uri="{FF2B5EF4-FFF2-40B4-BE49-F238E27FC236}">
+                <a16:creationId xmlns:a16="http://schemas.microsoft.com/office/drawing/2014/main" id="{0DC5ADFD-DCCF-2749-9642-1FD2736A46E4}"/>
+              </a:ext>
+            </a:extLst>
+          </p:cNvPr>
+          <p:cNvSpPr txBox="1"/>
+          <p:nvPr/>
+        </p:nvSpPr>
+        <p:spPr>
+          <a:xfrm>
+            <a:off x="882229" y="2349037"/>
+            <a:ext cx="5113930" cy="1169551"/>
+          </a:xfrm>
+          <a:prstGeom prst="rect">
+            <a:avLst/>
+          </a:prstGeom>
+          <a:noFill/>
+        </p:spPr>
+        <p:txBody>
+          <a:bodyPr wrap="square" rtlCol="0">
+            <a:spAutoFit/>
+          </a:bodyPr>
+          <a:lstStyle/>
+          <a:p>
+            <a:pPr algn="ctr"/>
+            <a:r>
+              <a:rPr lang="en-US" sz="7000" b="1" dirty="0">
+                <a:solidFill>
+                  <a:srgbClr val="339889"/>
+                </a:solidFill>
+                <a:latin typeface="Google Sans" panose="020B0503030502040204" pitchFamily="34" charset="0"/>
+              </a:rPr>
+              <a:t>NAMASTE.</a:t>
+            </a:r>
+            <a:r>
+              <a:rPr lang="en-US" sz="6900" b="1" dirty="0">
+                <a:solidFill>
+                  <a:srgbClr val="339889"/>
+                </a:solidFill>
+                <a:latin typeface="Google Sans" panose="020B0503030502040204" pitchFamily="34" charset="0"/>
+              </a:rPr>
+              <a:t> </a:t>
+            </a:r>
+          </a:p>
+        </p:txBody>
+      </p:sp>
+      <p:sp>
+        <p:nvSpPr>
+          <p:cNvPr id="18" name="Rectangle 17">
+            <a:extLst>
+              <a:ext uri="{FF2B5EF4-FFF2-40B4-BE49-F238E27FC236}">
+                <a16:creationId xmlns:a16="http://schemas.microsoft.com/office/drawing/2014/main" id="{D6A34D92-C254-FC42-A1AB-ACDBB7F8E0AF}"/>
+              </a:ext>
+            </a:extLst>
+          </p:cNvPr>
+          <p:cNvSpPr/>
+          <p:nvPr/>
+        </p:nvSpPr>
+        <p:spPr>
+          <a:xfrm>
+            <a:off x="1630395" y="1956419"/>
+            <a:ext cx="112058" cy="1258836"/>
+          </a:xfrm>
+          <a:prstGeom prst="rect">
+            <a:avLst/>
+          </a:prstGeom>
+          <a:solidFill>
+            <a:srgbClr val="339889"/>
+          </a:solidFill>
+          <a:ln w="12700">
+            <a:noFill/>
+          </a:ln>
+        </p:spPr>
+        <p:style>
+          <a:lnRef idx="2">
+            <a:schemeClr val="accent1">
+              <a:shade val="50000"/>
+            </a:schemeClr>
+          </a:lnRef>
+          <a:fillRef idx="1">
+            <a:schemeClr val="accent1"/>
+          </a:fillRef>
+          <a:effectRef idx="0">
+            <a:schemeClr val="accent1"/>
+          </a:effectRef>
+          <a:fontRef idx="minor">
+            <a:schemeClr val="lt1"/>
+          </a:fontRef>
+        </p:style>
+        <p:txBody>
+          <a:bodyPr rtlCol="0" anchor="ctr"/>
+          <a:lstStyle/>
+          <a:p>
+            <a:pPr algn="ctr"/>
+            <a:endParaRPr lang="en-US" dirty="0"/>
+          </a:p>
+        </p:txBody>
+      </p:sp>
+      <p:sp>
+        <p:nvSpPr>
+          <p:cNvPr id="19" name="Rectangle 18">
+            <a:extLst>
+              <a:ext uri="{FF2B5EF4-FFF2-40B4-BE49-F238E27FC236}">
+                <a16:creationId xmlns:a16="http://schemas.microsoft.com/office/drawing/2014/main" id="{AEA741D0-658C-AA4F-B52B-B69B3FD500EC}"/>
+              </a:ext>
+            </a:extLst>
+          </p:cNvPr>
+          <p:cNvSpPr/>
+          <p:nvPr/>
+        </p:nvSpPr>
+        <p:spPr>
+          <a:xfrm>
+            <a:off x="1499708" y="2257831"/>
+            <a:ext cx="130686" cy="758939"/>
+          </a:xfrm>
+          <a:prstGeom prst="rect">
+            <a:avLst/>
+          </a:prstGeom>
+          <a:solidFill>
+            <a:srgbClr val="F6F7F8"/>
+          </a:solidFill>
+          <a:ln w="12700">
+            <a:noFill/>
+          </a:ln>
+        </p:spPr>
+        <p:style>
+          <a:lnRef idx="2">
+            <a:schemeClr val="accent1">
+              <a:shade val="50000"/>
+            </a:schemeClr>
+          </a:lnRef>
+          <a:fillRef idx="1">
+            <a:schemeClr val="accent1"/>
+          </a:fillRef>
+          <a:effectRef idx="0">
+            <a:schemeClr val="accent1"/>
+          </a:effectRef>
+          <a:fontRef idx="minor">
+            <a:schemeClr val="lt1"/>
+          </a:fontRef>
+        </p:style>
+        <p:txBody>
+          <a:bodyPr rtlCol="0" anchor="ctr"/>
+          <a:lstStyle/>
+          <a:p>
+            <a:pPr algn="ctr"/>
+            <a:endParaRPr lang="en-US" dirty="0"/>
+          </a:p>
+        </p:txBody>
+      </p:sp>
+      <p:sp>
+        <p:nvSpPr>
+          <p:cNvPr id="21" name="Rectangle 20">
+            <a:extLst>
+              <a:ext uri="{FF2B5EF4-FFF2-40B4-BE49-F238E27FC236}">
+                <a16:creationId xmlns:a16="http://schemas.microsoft.com/office/drawing/2014/main" id="{E24CB61D-5924-5044-B179-5F58BB36E97A}"/>
+              </a:ext>
+            </a:extLst>
+          </p:cNvPr>
+          <p:cNvSpPr/>
+          <p:nvPr/>
+        </p:nvSpPr>
+        <p:spPr>
+          <a:xfrm>
+            <a:off x="1499708" y="1990892"/>
+            <a:ext cx="130686" cy="142874"/>
+          </a:xfrm>
+          <a:prstGeom prst="rect">
+            <a:avLst/>
+          </a:prstGeom>
+          <a:solidFill>
+            <a:srgbClr val="F6F7F8"/>
+          </a:solidFill>
+          <a:ln w="12700">
+            <a:noFill/>
+          </a:ln>
+        </p:spPr>
+        <p:style>
+          <a:lnRef idx="2">
+            <a:schemeClr val="accent1">
+              <a:shade val="50000"/>
+            </a:schemeClr>
+          </a:lnRef>
+          <a:fillRef idx="1">
+            <a:schemeClr val="accent1"/>
+          </a:fillRef>
+          <a:effectRef idx="0">
+            <a:schemeClr val="accent1"/>
+          </a:effectRef>
+          <a:fontRef idx="minor">
+            <a:schemeClr val="lt1"/>
+          </a:fontRef>
+        </p:style>
+        <p:txBody>
+          <a:bodyPr rtlCol="0" anchor="ctr"/>
+          <a:lstStyle/>
+          <a:p>
+            <a:pPr algn="ctr"/>
+            <a:endParaRPr lang="en-US" dirty="0"/>
+          </a:p>
+        </p:txBody>
+      </p:sp>
+      <p:sp>
+        <p:nvSpPr>
+          <p:cNvPr id="22" name="Rectangle 21">
+            <a:extLst>
+              <a:ext uri="{FF2B5EF4-FFF2-40B4-BE49-F238E27FC236}">
+                <a16:creationId xmlns:a16="http://schemas.microsoft.com/office/drawing/2014/main" id="{6CDB1660-A3B6-454D-B913-D2B3415FE912}"/>
+              </a:ext>
+            </a:extLst>
+          </p:cNvPr>
+          <p:cNvSpPr/>
+          <p:nvPr/>
+        </p:nvSpPr>
+        <p:spPr>
+          <a:xfrm rot="19731961">
+            <a:off x="1471089" y="2788943"/>
+            <a:ext cx="112058" cy="327290"/>
+          </a:xfrm>
+          <a:prstGeom prst="rect">
+            <a:avLst/>
+          </a:prstGeom>
+          <a:solidFill>
+            <a:srgbClr val="339889"/>
+          </a:solidFill>
+          <a:ln w="12700">
+            <a:noFill/>
+          </a:ln>
+        </p:spPr>
+        <p:style>
+          <a:lnRef idx="2">
+            <a:schemeClr val="accent1">
+              <a:shade val="50000"/>
+            </a:schemeClr>
+          </a:lnRef>
+          <a:fillRef idx="1">
+            <a:schemeClr val="accent1"/>
+          </a:fillRef>
+          <a:effectRef idx="0">
+            <a:schemeClr val="accent1"/>
+          </a:effectRef>
+          <a:fontRef idx="minor">
+            <a:schemeClr val="lt1"/>
+          </a:fontRef>
+        </p:style>
+        <p:txBody>
+          <a:bodyPr rtlCol="0" anchor="ctr"/>
+          <a:lstStyle/>
+          <a:p>
+            <a:pPr algn="ctr"/>
+            <a:endParaRPr lang="en-US" dirty="0"/>
+          </a:p>
+        </p:txBody>
+      </p:sp>
+      <p:sp>
+        <p:nvSpPr>
+          <p:cNvPr id="23" name="Rectangle 22">
+            <a:extLst>
+              <a:ext uri="{FF2B5EF4-FFF2-40B4-BE49-F238E27FC236}">
+                <a16:creationId xmlns:a16="http://schemas.microsoft.com/office/drawing/2014/main" id="{C6D78E92-C3F7-284C-B5A7-CA1637D6E7CE}"/>
+              </a:ext>
+            </a:extLst>
+          </p:cNvPr>
+          <p:cNvSpPr/>
+          <p:nvPr/>
+        </p:nvSpPr>
+        <p:spPr>
+          <a:xfrm rot="20329332">
+            <a:off x="3578899" y="2547330"/>
+            <a:ext cx="112058" cy="327290"/>
+          </a:xfrm>
+          <a:prstGeom prst="rect">
+            <a:avLst/>
+          </a:prstGeom>
+          <a:solidFill>
+            <a:srgbClr val="339889"/>
+          </a:solidFill>
+          <a:ln w="12700">
+            <a:noFill/>
+          </a:ln>
+        </p:spPr>
+        <p:style>
+          <a:lnRef idx="2">
+            <a:schemeClr val="accent1">
+              <a:shade val="50000"/>
+            </a:schemeClr>
+          </a:lnRef>
+          <a:fillRef idx="1">
+            <a:schemeClr val="accent1"/>
+          </a:fillRef>
+          <a:effectRef idx="0">
+            <a:schemeClr val="accent1"/>
+          </a:effectRef>
+          <a:fontRef idx="minor">
+            <a:schemeClr val="lt1"/>
+          </a:fontRef>
+        </p:style>
+        <p:txBody>
+          <a:bodyPr rtlCol="0" anchor="ctr"/>
+          <a:lstStyle/>
+          <a:p>
+            <a:pPr algn="ctr"/>
+            <a:endParaRPr lang="en-US" dirty="0"/>
+          </a:p>
+        </p:txBody>
+      </p:sp>
+      <p:sp>
+        <p:nvSpPr>
+          <p:cNvPr id="24" name="Rectangle 23">
+            <a:extLst>
+              <a:ext uri="{FF2B5EF4-FFF2-40B4-BE49-F238E27FC236}">
+                <a16:creationId xmlns:a16="http://schemas.microsoft.com/office/drawing/2014/main" id="{96C8524E-9F7D-B54E-8454-621C6CF3C87C}"/>
+              </a:ext>
+            </a:extLst>
+          </p:cNvPr>
+          <p:cNvSpPr/>
+          <p:nvPr/>
+        </p:nvSpPr>
+        <p:spPr>
+          <a:xfrm rot="19107136">
+            <a:off x="2962295" y="2500606"/>
+            <a:ext cx="137559" cy="152215"/>
+          </a:xfrm>
+          <a:prstGeom prst="rect">
+            <a:avLst/>
+          </a:prstGeom>
+          <a:solidFill>
+            <a:srgbClr val="339889"/>
+          </a:solidFill>
+          <a:ln w="12700">
+            <a:noFill/>
+          </a:ln>
+        </p:spPr>
+        <p:style>
+          <a:lnRef idx="2">
+            <a:schemeClr val="accent1">
+              <a:shade val="50000"/>
+            </a:schemeClr>
+          </a:lnRef>
+          <a:fillRef idx="1">
+            <a:schemeClr val="accent1"/>
+          </a:fillRef>
+          <a:effectRef idx="0">
+            <a:schemeClr val="accent1"/>
+          </a:effectRef>
+          <a:fontRef idx="minor">
+            <a:schemeClr val="lt1"/>
+          </a:fontRef>
+        </p:style>
+        <p:txBody>
+          <a:bodyPr rtlCol="0" anchor="ctr"/>
+          <a:lstStyle/>
+          <a:p>
+            <a:pPr algn="ctr"/>
+            <a:endParaRPr lang="en-US" dirty="0"/>
+          </a:p>
+        </p:txBody>
+      </p:sp>
+      <p:sp>
+        <p:nvSpPr>
+          <p:cNvPr id="25" name="Rectangle 24">
+            <a:extLst>
+              <a:ext uri="{FF2B5EF4-FFF2-40B4-BE49-F238E27FC236}">
+                <a16:creationId xmlns:a16="http://schemas.microsoft.com/office/drawing/2014/main" id="{DECE0C50-4ED7-B54F-99EF-4E66380C2156}"/>
+              </a:ext>
+            </a:extLst>
+          </p:cNvPr>
+          <p:cNvSpPr/>
+          <p:nvPr/>
+        </p:nvSpPr>
+        <p:spPr>
+          <a:xfrm rot="20354526">
+            <a:off x="3644676" y="2449034"/>
+            <a:ext cx="66518" cy="247925"/>
+          </a:xfrm>
+          <a:prstGeom prst="rect">
+            <a:avLst/>
+          </a:prstGeom>
+          <a:solidFill>
+            <a:srgbClr val="F6F7F8"/>
+          </a:solidFill>
+          <a:ln w="12700">
+            <a:noFill/>
+          </a:ln>
+        </p:spPr>
+        <p:style>
+          <a:lnRef idx="2">
+            <a:schemeClr val="accent1">
+              <a:shade val="50000"/>
+            </a:schemeClr>
+          </a:lnRef>
+          <a:fillRef idx="1">
+            <a:schemeClr val="accent1"/>
+          </a:fillRef>
+          <a:effectRef idx="0">
+            <a:schemeClr val="accent1"/>
+          </a:effectRef>
+          <a:fontRef idx="minor">
+            <a:schemeClr val="lt1"/>
+          </a:fontRef>
+        </p:style>
+        <p:txBody>
+          <a:bodyPr rtlCol="0" anchor="ctr"/>
+          <a:lstStyle/>
+          <a:p>
+            <a:pPr algn="ctr"/>
+            <a:endParaRPr lang="en-US" dirty="0"/>
           </a:p>
         </p:txBody>
       </p:sp>
     </p:spTree>
     <p:extLst>
       <p:ext uri="{BB962C8B-B14F-4D97-AF65-F5344CB8AC3E}">
-        <p14:creationId xmlns:p14="http://schemas.microsoft.com/office/powerpoint/2010/main" val="1818785394"/>
+        <p14:creationId xmlns:p14="http://schemas.microsoft.com/office/powerpoint/2010/main" val="3960193486"/>
       </p:ext>
     </p:extLst>
   </p:cSld>
@@ -6530,7 +7320,7 @@
         </p:nvSpPr>
         <p:spPr>
           <a:xfrm>
-            <a:off x="7064877" y="612828"/>
+            <a:off x="5965419" y="612828"/>
             <a:ext cx="4996593" cy="4979208"/>
           </a:xfrm>
           <a:prstGeom prst="rect">
@@ -6540,7 +7330,11 @@
             <a:srgbClr val="F6F7F8"/>
           </a:solidFill>
           <a:ln w="12700">
-            <a:noFill/>
+            <a:solidFill>
+              <a:schemeClr val="bg2">
+                <a:lumMod val="75000"/>
+              </a:schemeClr>
+            </a:solidFill>
           </a:ln>
         </p:spPr>
         <p:style>
@@ -6582,7 +7376,7 @@
         </p:nvSpPr>
         <p:spPr>
           <a:xfrm>
-            <a:off x="6928754" y="503965"/>
+            <a:off x="5829296" y="503965"/>
             <a:ext cx="5192486" cy="5178378"/>
           </a:xfrm>
           <a:prstGeom prst="rect">
@@ -6632,7 +7426,7 @@
         </p:nvSpPr>
         <p:spPr>
           <a:xfrm>
-            <a:off x="9908954" y="4651176"/>
+            <a:off x="8809496" y="4651176"/>
             <a:ext cx="1412190" cy="584775"/>
           </a:xfrm>
           <a:prstGeom prst="rect">
@@ -6669,10 +7463,10 @@
       </p:sp>
       <p:sp>
         <p:nvSpPr>
-          <p:cNvPr id="3" name="L-shape 2">
-            <a:extLst>
-              <a:ext uri="{FF2B5EF4-FFF2-40B4-BE49-F238E27FC236}">
-                <a16:creationId xmlns:a16="http://schemas.microsoft.com/office/drawing/2014/main" id="{9DAFBCD1-02A0-C243-AD90-AE00844EA27C}"/>
+          <p:cNvPr id="18" name="Rectangle 17">
+            <a:extLst>
+              <a:ext uri="{FF2B5EF4-FFF2-40B4-BE49-F238E27FC236}">
+                <a16:creationId xmlns:a16="http://schemas.microsoft.com/office/drawing/2014/main" id="{6D60967A-5C64-3F43-8D6D-A2B42DD03D0E}"/>
               </a:ext>
             </a:extLst>
           </p:cNvPr>
@@ -6680,20 +7474,17 @@
           <p:nvPr/>
         </p:nvSpPr>
         <p:spPr>
-          <a:xfrm rot="2652370">
-            <a:off x="8364453" y="2242032"/>
-            <a:ext cx="1720800" cy="1720800"/>
-          </a:xfrm>
-          <a:prstGeom prst="corner">
-            <a:avLst>
-              <a:gd name="adj1" fmla="val 28205"/>
-              <a:gd name="adj2" fmla="val 27564"/>
-            </a:avLst>
+          <a:xfrm>
+            <a:off x="8809496" y="5495979"/>
+            <a:ext cx="2160000" cy="108000"/>
+          </a:xfrm>
+          <a:prstGeom prst="rect">
+            <a:avLst/>
           </a:prstGeom>
           <a:solidFill>
-            <a:srgbClr val="335C7E"/>
+            <a:srgbClr val="F59E9E"/>
           </a:solidFill>
-          <a:ln>
+          <a:ln w="12700">
             <a:noFill/>
           </a:ln>
         </p:spPr>
@@ -6724,10 +7515,10 @@
       </p:sp>
       <p:sp>
         <p:nvSpPr>
-          <p:cNvPr id="7" name="Rectangle 6">
-            <a:extLst>
-              <a:ext uri="{FF2B5EF4-FFF2-40B4-BE49-F238E27FC236}">
-                <a16:creationId xmlns:a16="http://schemas.microsoft.com/office/drawing/2014/main" id="{3F22B226-3D3D-0C4D-A38D-EAFD59989359}"/>
+          <p:cNvPr id="19" name="Rectangle 18">
+            <a:extLst>
+              <a:ext uri="{FF2B5EF4-FFF2-40B4-BE49-F238E27FC236}">
+                <a16:creationId xmlns:a16="http://schemas.microsoft.com/office/drawing/2014/main" id="{E6E91D9A-3F17-CD48-80AF-BE2201A25D59}"/>
               </a:ext>
             </a:extLst>
           </p:cNvPr>
@@ -6736,16 +7527,16 @@
         </p:nvSpPr>
         <p:spPr>
           <a:xfrm>
-            <a:off x="8508467" y="2825903"/>
-            <a:ext cx="2069182" cy="553057"/>
+            <a:off x="10883897" y="612828"/>
+            <a:ext cx="108000" cy="2160000"/>
           </a:xfrm>
           <a:prstGeom prst="rect">
             <a:avLst/>
           </a:prstGeom>
           <a:solidFill>
-            <a:srgbClr val="335C7E"/>
+            <a:srgbClr val="F1727F"/>
           </a:solidFill>
-          <a:ln>
+          <a:ln w="12700">
             <a:noFill/>
           </a:ln>
         </p:spPr>
@@ -6776,10 +7567,10 @@
       </p:sp>
       <p:sp>
         <p:nvSpPr>
-          <p:cNvPr id="14" name="L-shape 13">
-            <a:extLst>
-              <a:ext uri="{FF2B5EF4-FFF2-40B4-BE49-F238E27FC236}">
-                <a16:creationId xmlns:a16="http://schemas.microsoft.com/office/drawing/2014/main" id="{485B310F-9058-C34C-857B-7E8BBF30E2DF}"/>
+          <p:cNvPr id="20" name="Rectangle 19">
+            <a:extLst>
+              <a:ext uri="{FF2B5EF4-FFF2-40B4-BE49-F238E27FC236}">
+                <a16:creationId xmlns:a16="http://schemas.microsoft.com/office/drawing/2014/main" id="{7E7A09BF-47D5-7249-8FDD-25D8B773A542}"/>
               </a:ext>
             </a:extLst>
           </p:cNvPr>
@@ -6787,20 +7578,17 @@
           <p:nvPr/>
         </p:nvSpPr>
         <p:spPr>
-          <a:xfrm rot="2652370">
-            <a:off x="1243808" y="1642009"/>
-            <a:ext cx="1720800" cy="1720800"/>
-          </a:xfrm>
-          <a:prstGeom prst="corner">
-            <a:avLst>
-              <a:gd name="adj1" fmla="val 23254"/>
-              <a:gd name="adj2" fmla="val 21743"/>
-            </a:avLst>
+          <a:xfrm>
+            <a:off x="5965395" y="612828"/>
+            <a:ext cx="2160000" cy="108000"/>
+          </a:xfrm>
+          <a:prstGeom prst="rect">
+            <a:avLst/>
           </a:prstGeom>
           <a:solidFill>
-            <a:srgbClr val="F3F1F4"/>
+            <a:srgbClr val="C16C86"/>
           </a:solidFill>
-          <a:ln>
+          <a:ln w="12700">
             <a:noFill/>
           </a:ln>
         </p:spPr>
@@ -6831,10 +7619,10 @@
       </p:sp>
       <p:sp>
         <p:nvSpPr>
-          <p:cNvPr id="17" name="Rectangle 16">
-            <a:extLst>
-              <a:ext uri="{FF2B5EF4-FFF2-40B4-BE49-F238E27FC236}">
-                <a16:creationId xmlns:a16="http://schemas.microsoft.com/office/drawing/2014/main" id="{057DA880-815F-7147-B000-379DD7AB3ACF}"/>
+          <p:cNvPr id="21" name="Rectangle 20">
+            <a:extLst>
+              <a:ext uri="{FF2B5EF4-FFF2-40B4-BE49-F238E27FC236}">
+                <a16:creationId xmlns:a16="http://schemas.microsoft.com/office/drawing/2014/main" id="{8AF850E0-8C52-7B4C-A384-A31B2EAC3111}"/>
               </a:ext>
             </a:extLst>
           </p:cNvPr>
@@ -6843,16 +7631,16 @@
         </p:nvSpPr>
         <p:spPr>
           <a:xfrm>
-            <a:off x="1387822" y="2299483"/>
-            <a:ext cx="2069182" cy="405851"/>
+            <a:off x="5965395" y="3432036"/>
+            <a:ext cx="108000" cy="2160000"/>
           </a:xfrm>
           <a:prstGeom prst="rect">
             <a:avLst/>
           </a:prstGeom>
           <a:solidFill>
-            <a:srgbClr val="F3F1F4"/>
+            <a:srgbClr val="335C7E"/>
           </a:solidFill>
-          <a:ln>
+          <a:ln w="12700">
             <a:noFill/>
           </a:ln>
         </p:spPr>
@@ -6883,10 +7671,10 @@
       </p:sp>
       <p:sp>
         <p:nvSpPr>
-          <p:cNvPr id="5" name="Rectangle 4">
-            <a:extLst>
-              <a:ext uri="{FF2B5EF4-FFF2-40B4-BE49-F238E27FC236}">
-                <a16:creationId xmlns:a16="http://schemas.microsoft.com/office/drawing/2014/main" id="{9A427F68-04E0-7C40-B84B-D8B8ADB897CF}"/>
+          <p:cNvPr id="3" name="L-shape 2">
+            <a:extLst>
+              <a:ext uri="{FF2B5EF4-FFF2-40B4-BE49-F238E27FC236}">
+                <a16:creationId xmlns:a16="http://schemas.microsoft.com/office/drawing/2014/main" id="{9DAFBCD1-02A0-C243-AD90-AE00844EA27C}"/>
               </a:ext>
             </a:extLst>
           </p:cNvPr>
@@ -6894,14 +7682,19 @@
           <p:nvPr/>
         </p:nvSpPr>
         <p:spPr>
-          <a:xfrm>
-            <a:off x="154684" y="438303"/>
-            <a:ext cx="5756259" cy="4580011"/>
-          </a:xfrm>
-          <a:prstGeom prst="rect">
-            <a:avLst/>
-          </a:prstGeom>
-          <a:noFill/>
+          <a:xfrm rot="2652370">
+            <a:off x="7264995" y="2242032"/>
+            <a:ext cx="1720800" cy="1720800"/>
+          </a:xfrm>
+          <a:prstGeom prst="corner">
+            <a:avLst>
+              <a:gd name="adj1" fmla="val 28205"/>
+              <a:gd name="adj2" fmla="val 27564"/>
+            </a:avLst>
+          </a:prstGeom>
+          <a:solidFill>
+            <a:srgbClr val="335C7E"/>
+          </a:solidFill>
           <a:ln>
             <a:noFill/>
           </a:ln>
@@ -6931,10 +7724,62 @@
           </a:p>
         </p:txBody>
       </p:sp>
+      <p:sp>
+        <p:nvSpPr>
+          <p:cNvPr id="7" name="Rectangle 6">
+            <a:extLst>
+              <a:ext uri="{FF2B5EF4-FFF2-40B4-BE49-F238E27FC236}">
+                <a16:creationId xmlns:a16="http://schemas.microsoft.com/office/drawing/2014/main" id="{3F22B226-3D3D-0C4D-A38D-EAFD59989359}"/>
+              </a:ext>
+            </a:extLst>
+          </p:cNvPr>
+          <p:cNvSpPr/>
+          <p:nvPr/>
+        </p:nvSpPr>
+        <p:spPr>
+          <a:xfrm>
+            <a:off x="7409009" y="2825903"/>
+            <a:ext cx="2069182" cy="553057"/>
+          </a:xfrm>
+          <a:prstGeom prst="rect">
+            <a:avLst/>
+          </a:prstGeom>
+          <a:solidFill>
+            <a:srgbClr val="335C7E"/>
+          </a:solidFill>
+          <a:ln>
+            <a:noFill/>
+          </a:ln>
+        </p:spPr>
+        <p:style>
+          <a:lnRef idx="2">
+            <a:schemeClr val="accent1">
+              <a:shade val="50000"/>
+            </a:schemeClr>
+          </a:lnRef>
+          <a:fillRef idx="1">
+            <a:schemeClr val="accent1"/>
+          </a:fillRef>
+          <a:effectRef idx="0">
+            <a:schemeClr val="accent1"/>
+          </a:effectRef>
+          <a:fontRef idx="minor">
+            <a:schemeClr val="lt1"/>
+          </a:fontRef>
+        </p:style>
+        <p:txBody>
+          <a:bodyPr rtlCol="0" anchor="ctr"/>
+          <a:lstStyle/>
+          <a:p>
+            <a:pPr algn="ctr"/>
+            <a:endParaRPr lang="en-US"/>
+          </a:p>
+        </p:txBody>
+      </p:sp>
     </p:spTree>
     <p:extLst>
       <p:ext uri="{BB962C8B-B14F-4D97-AF65-F5344CB8AC3E}">
-        <p14:creationId xmlns:p14="http://schemas.microsoft.com/office/powerpoint/2010/main" val="4276385129"/>
+        <p14:creationId xmlns:p14="http://schemas.microsoft.com/office/powerpoint/2010/main" val="1818785394"/>
       </p:ext>
     </p:extLst>
   </p:cSld>
@@ -6963,10 +7808,10 @@
       </p:grpSpPr>
       <p:sp>
         <p:nvSpPr>
-          <p:cNvPr id="5" name="Rectangle 4">
-            <a:extLst>
-              <a:ext uri="{FF2B5EF4-FFF2-40B4-BE49-F238E27FC236}">
-                <a16:creationId xmlns:a16="http://schemas.microsoft.com/office/drawing/2014/main" id="{9A427F68-04E0-7C40-B84B-D8B8ADB897CF}"/>
+          <p:cNvPr id="6" name="Rectangle 5">
+            <a:extLst>
+              <a:ext uri="{FF2B5EF4-FFF2-40B4-BE49-F238E27FC236}">
+                <a16:creationId xmlns:a16="http://schemas.microsoft.com/office/drawing/2014/main" id="{F68F3E1A-564F-0945-A6DE-D9139DAF94D4}"/>
               </a:ext>
             </a:extLst>
           </p:cNvPr>
@@ -6975,14 +7820,16 @@
         </p:nvSpPr>
         <p:spPr>
           <a:xfrm>
-            <a:off x="154684" y="438303"/>
-            <a:ext cx="5756259" cy="4580011"/>
-          </a:xfrm>
-          <a:prstGeom prst="rect">
-            <a:avLst/>
-          </a:prstGeom>
-          <a:noFill/>
-          <a:ln>
+            <a:off x="7064877" y="612828"/>
+            <a:ext cx="4996593" cy="4979208"/>
+          </a:xfrm>
+          <a:prstGeom prst="rect">
+            <a:avLst/>
+          </a:prstGeom>
+          <a:solidFill>
+            <a:srgbClr val="F6F7F8"/>
+          </a:solidFill>
+          <a:ln w="12700">
             <a:noFill/>
           </a:ln>
         </p:spPr>
@@ -7007,16 +7854,16 @@
           <a:lstStyle/>
           <a:p>
             <a:pPr algn="ctr"/>
-            <a:endParaRPr lang="en-US"/>
-          </a:p>
-        </p:txBody>
-      </p:sp>
-      <p:sp>
-        <p:nvSpPr>
-          <p:cNvPr id="8" name="Rectangle 7">
-            <a:extLst>
-              <a:ext uri="{FF2B5EF4-FFF2-40B4-BE49-F238E27FC236}">
-                <a16:creationId xmlns:a16="http://schemas.microsoft.com/office/drawing/2014/main" id="{A1685247-8415-414F-B3CE-089251D6C360}"/>
+            <a:endParaRPr lang="en-US" dirty="0"/>
+          </a:p>
+        </p:txBody>
+      </p:sp>
+      <p:sp>
+        <p:nvSpPr>
+          <p:cNvPr id="15" name="Rectangle 14">
+            <a:extLst>
+              <a:ext uri="{FF2B5EF4-FFF2-40B4-BE49-F238E27FC236}">
+                <a16:creationId xmlns:a16="http://schemas.microsoft.com/office/drawing/2014/main" id="{BFC01515-0C75-A94E-A507-2C5D301A0614}"/>
               </a:ext>
             </a:extLst>
           </p:cNvPr>
@@ -7025,16 +7872,14 @@
         </p:nvSpPr>
         <p:spPr>
           <a:xfrm>
-            <a:off x="12700" y="3000375"/>
-            <a:ext cx="12166600" cy="148514"/>
-          </a:xfrm>
-          <a:prstGeom prst="rect">
-            <a:avLst/>
-          </a:prstGeom>
-          <a:solidFill>
-            <a:srgbClr val="339889"/>
-          </a:solidFill>
-          <a:ln>
+            <a:off x="6928754" y="503965"/>
+            <a:ext cx="5192486" cy="5178378"/>
+          </a:xfrm>
+          <a:prstGeom prst="rect">
+            <a:avLst/>
+          </a:prstGeom>
+          <a:noFill/>
+          <a:ln w="12700">
             <a:noFill/>
           </a:ln>
         </p:spPr>
@@ -7059,6 +7904,319 @@
           <a:lstStyle/>
           <a:p>
             <a:pPr algn="ctr"/>
+            <a:endParaRPr lang="en-US" dirty="0"/>
+          </a:p>
+        </p:txBody>
+      </p:sp>
+      <p:sp>
+        <p:nvSpPr>
+          <p:cNvPr id="16" name="TextBox 15">
+            <a:extLst>
+              <a:ext uri="{FF2B5EF4-FFF2-40B4-BE49-F238E27FC236}">
+                <a16:creationId xmlns:a16="http://schemas.microsoft.com/office/drawing/2014/main" id="{A829F524-8735-6445-BDB9-D34750F6F8E1}"/>
+              </a:ext>
+            </a:extLst>
+          </p:cNvPr>
+          <p:cNvSpPr txBox="1"/>
+          <p:nvPr/>
+        </p:nvSpPr>
+        <p:spPr>
+          <a:xfrm>
+            <a:off x="9908954" y="4651176"/>
+            <a:ext cx="1412190" cy="584775"/>
+          </a:xfrm>
+          <a:prstGeom prst="rect">
+            <a:avLst/>
+          </a:prstGeom>
+          <a:noFill/>
+        </p:spPr>
+        <p:txBody>
+          <a:bodyPr wrap="square" rtlCol="0">
+            <a:spAutoFit/>
+          </a:bodyPr>
+          <a:lstStyle/>
+          <a:p>
+            <a:r>
+              <a:rPr lang="en-US" sz="3200" b="1" dirty="0">
+                <a:solidFill>
+                  <a:srgbClr val="335C7E"/>
+                </a:solidFill>
+                <a:latin typeface="Google Sans" panose="020B0503030502040204" pitchFamily="34" charset="0"/>
+              </a:rPr>
+              <a:t>BACK</a:t>
+            </a:r>
+            <a:r>
+              <a:rPr lang="en-US" sz="2400" b="1" dirty="0">
+                <a:solidFill>
+                  <a:srgbClr val="335C7E"/>
+                </a:solidFill>
+                <a:latin typeface="Google Sans Medium" panose="020B0503030502040204" pitchFamily="34" charset="0"/>
+              </a:rPr>
+              <a:t> </a:t>
+            </a:r>
+          </a:p>
+        </p:txBody>
+      </p:sp>
+      <p:sp>
+        <p:nvSpPr>
+          <p:cNvPr id="3" name="L-shape 2">
+            <a:extLst>
+              <a:ext uri="{FF2B5EF4-FFF2-40B4-BE49-F238E27FC236}">
+                <a16:creationId xmlns:a16="http://schemas.microsoft.com/office/drawing/2014/main" id="{9DAFBCD1-02A0-C243-AD90-AE00844EA27C}"/>
+              </a:ext>
+            </a:extLst>
+          </p:cNvPr>
+          <p:cNvSpPr/>
+          <p:nvPr/>
+        </p:nvSpPr>
+        <p:spPr>
+          <a:xfrm rot="2652370">
+            <a:off x="8364453" y="2242032"/>
+            <a:ext cx="1720800" cy="1720800"/>
+          </a:xfrm>
+          <a:prstGeom prst="corner">
+            <a:avLst>
+              <a:gd name="adj1" fmla="val 28205"/>
+              <a:gd name="adj2" fmla="val 27564"/>
+            </a:avLst>
+          </a:prstGeom>
+          <a:solidFill>
+            <a:srgbClr val="335C7E"/>
+          </a:solidFill>
+          <a:ln>
+            <a:noFill/>
+          </a:ln>
+        </p:spPr>
+        <p:style>
+          <a:lnRef idx="2">
+            <a:schemeClr val="accent1">
+              <a:shade val="50000"/>
+            </a:schemeClr>
+          </a:lnRef>
+          <a:fillRef idx="1">
+            <a:schemeClr val="accent1"/>
+          </a:fillRef>
+          <a:effectRef idx="0">
+            <a:schemeClr val="accent1"/>
+          </a:effectRef>
+          <a:fontRef idx="minor">
+            <a:schemeClr val="lt1"/>
+          </a:fontRef>
+        </p:style>
+        <p:txBody>
+          <a:bodyPr rtlCol="0" anchor="ctr"/>
+          <a:lstStyle/>
+          <a:p>
+            <a:pPr algn="ctr"/>
+            <a:endParaRPr lang="en-US"/>
+          </a:p>
+        </p:txBody>
+      </p:sp>
+      <p:sp>
+        <p:nvSpPr>
+          <p:cNvPr id="7" name="Rectangle 6">
+            <a:extLst>
+              <a:ext uri="{FF2B5EF4-FFF2-40B4-BE49-F238E27FC236}">
+                <a16:creationId xmlns:a16="http://schemas.microsoft.com/office/drawing/2014/main" id="{3F22B226-3D3D-0C4D-A38D-EAFD59989359}"/>
+              </a:ext>
+            </a:extLst>
+          </p:cNvPr>
+          <p:cNvSpPr/>
+          <p:nvPr/>
+        </p:nvSpPr>
+        <p:spPr>
+          <a:xfrm>
+            <a:off x="8508467" y="2825903"/>
+            <a:ext cx="2069182" cy="553057"/>
+          </a:xfrm>
+          <a:prstGeom prst="rect">
+            <a:avLst/>
+          </a:prstGeom>
+          <a:solidFill>
+            <a:srgbClr val="335C7E"/>
+          </a:solidFill>
+          <a:ln>
+            <a:noFill/>
+          </a:ln>
+        </p:spPr>
+        <p:style>
+          <a:lnRef idx="2">
+            <a:schemeClr val="accent1">
+              <a:shade val="50000"/>
+            </a:schemeClr>
+          </a:lnRef>
+          <a:fillRef idx="1">
+            <a:schemeClr val="accent1"/>
+          </a:fillRef>
+          <a:effectRef idx="0">
+            <a:schemeClr val="accent1"/>
+          </a:effectRef>
+          <a:fontRef idx="minor">
+            <a:schemeClr val="lt1"/>
+          </a:fontRef>
+        </p:style>
+        <p:txBody>
+          <a:bodyPr rtlCol="0" anchor="ctr"/>
+          <a:lstStyle/>
+          <a:p>
+            <a:pPr algn="ctr"/>
+            <a:endParaRPr lang="en-US"/>
+          </a:p>
+        </p:txBody>
+      </p:sp>
+      <p:sp>
+        <p:nvSpPr>
+          <p:cNvPr id="14" name="L-shape 13">
+            <a:extLst>
+              <a:ext uri="{FF2B5EF4-FFF2-40B4-BE49-F238E27FC236}">
+                <a16:creationId xmlns:a16="http://schemas.microsoft.com/office/drawing/2014/main" id="{485B310F-9058-C34C-857B-7E8BBF30E2DF}"/>
+              </a:ext>
+            </a:extLst>
+          </p:cNvPr>
+          <p:cNvSpPr/>
+          <p:nvPr/>
+        </p:nvSpPr>
+        <p:spPr>
+          <a:xfrm rot="2652370">
+            <a:off x="1243808" y="1642009"/>
+            <a:ext cx="1720800" cy="1720800"/>
+          </a:xfrm>
+          <a:prstGeom prst="corner">
+            <a:avLst>
+              <a:gd name="adj1" fmla="val 23254"/>
+              <a:gd name="adj2" fmla="val 21743"/>
+            </a:avLst>
+          </a:prstGeom>
+          <a:solidFill>
+            <a:srgbClr val="F3F1F4"/>
+          </a:solidFill>
+          <a:ln>
+            <a:noFill/>
+          </a:ln>
+        </p:spPr>
+        <p:style>
+          <a:lnRef idx="2">
+            <a:schemeClr val="accent1">
+              <a:shade val="50000"/>
+            </a:schemeClr>
+          </a:lnRef>
+          <a:fillRef idx="1">
+            <a:schemeClr val="accent1"/>
+          </a:fillRef>
+          <a:effectRef idx="0">
+            <a:schemeClr val="accent1"/>
+          </a:effectRef>
+          <a:fontRef idx="minor">
+            <a:schemeClr val="lt1"/>
+          </a:fontRef>
+        </p:style>
+        <p:txBody>
+          <a:bodyPr rtlCol="0" anchor="ctr"/>
+          <a:lstStyle/>
+          <a:p>
+            <a:pPr algn="ctr"/>
+            <a:endParaRPr lang="en-US"/>
+          </a:p>
+        </p:txBody>
+      </p:sp>
+      <p:sp>
+        <p:nvSpPr>
+          <p:cNvPr id="17" name="Rectangle 16">
+            <a:extLst>
+              <a:ext uri="{FF2B5EF4-FFF2-40B4-BE49-F238E27FC236}">
+                <a16:creationId xmlns:a16="http://schemas.microsoft.com/office/drawing/2014/main" id="{057DA880-815F-7147-B000-379DD7AB3ACF}"/>
+              </a:ext>
+            </a:extLst>
+          </p:cNvPr>
+          <p:cNvSpPr/>
+          <p:nvPr/>
+        </p:nvSpPr>
+        <p:spPr>
+          <a:xfrm>
+            <a:off x="1387822" y="2299483"/>
+            <a:ext cx="2069182" cy="405851"/>
+          </a:xfrm>
+          <a:prstGeom prst="rect">
+            <a:avLst/>
+          </a:prstGeom>
+          <a:solidFill>
+            <a:srgbClr val="F3F1F4"/>
+          </a:solidFill>
+          <a:ln>
+            <a:noFill/>
+          </a:ln>
+        </p:spPr>
+        <p:style>
+          <a:lnRef idx="2">
+            <a:schemeClr val="accent1">
+              <a:shade val="50000"/>
+            </a:schemeClr>
+          </a:lnRef>
+          <a:fillRef idx="1">
+            <a:schemeClr val="accent1"/>
+          </a:fillRef>
+          <a:effectRef idx="0">
+            <a:schemeClr val="accent1"/>
+          </a:effectRef>
+          <a:fontRef idx="minor">
+            <a:schemeClr val="lt1"/>
+          </a:fontRef>
+        </p:style>
+        <p:txBody>
+          <a:bodyPr rtlCol="0" anchor="ctr"/>
+          <a:lstStyle/>
+          <a:p>
+            <a:pPr algn="ctr"/>
+            <a:endParaRPr lang="en-US"/>
+          </a:p>
+        </p:txBody>
+      </p:sp>
+      <p:sp>
+        <p:nvSpPr>
+          <p:cNvPr id="5" name="Rectangle 4">
+            <a:extLst>
+              <a:ext uri="{FF2B5EF4-FFF2-40B4-BE49-F238E27FC236}">
+                <a16:creationId xmlns:a16="http://schemas.microsoft.com/office/drawing/2014/main" id="{9A427F68-04E0-7C40-B84B-D8B8ADB897CF}"/>
+              </a:ext>
+            </a:extLst>
+          </p:cNvPr>
+          <p:cNvSpPr/>
+          <p:nvPr/>
+        </p:nvSpPr>
+        <p:spPr>
+          <a:xfrm>
+            <a:off x="154684" y="438303"/>
+            <a:ext cx="5756259" cy="4580011"/>
+          </a:xfrm>
+          <a:prstGeom prst="rect">
+            <a:avLst/>
+          </a:prstGeom>
+          <a:noFill/>
+          <a:ln>
+            <a:noFill/>
+          </a:ln>
+        </p:spPr>
+        <p:style>
+          <a:lnRef idx="2">
+            <a:schemeClr val="accent1">
+              <a:shade val="50000"/>
+            </a:schemeClr>
+          </a:lnRef>
+          <a:fillRef idx="1">
+            <a:schemeClr val="accent1"/>
+          </a:fillRef>
+          <a:effectRef idx="0">
+            <a:schemeClr val="accent1"/>
+          </a:effectRef>
+          <a:fontRef idx="minor">
+            <a:schemeClr val="lt1"/>
+          </a:fontRef>
+        </p:style>
+        <p:txBody>
+          <a:bodyPr rtlCol="0" anchor="ctr"/>
+          <a:lstStyle/>
+          <a:p>
+            <a:pPr algn="ctr"/>
             <a:endParaRPr lang="en-US"/>
           </a:p>
         </p:txBody>
@@ -7066,7 +8224,7 @@
     </p:spTree>
     <p:extLst>
       <p:ext uri="{BB962C8B-B14F-4D97-AF65-F5344CB8AC3E}">
-        <p14:creationId xmlns:p14="http://schemas.microsoft.com/office/powerpoint/2010/main" val="4143478526"/>
+        <p14:creationId xmlns:p14="http://schemas.microsoft.com/office/powerpoint/2010/main" val="4276385129"/>
       </p:ext>
     </p:extLst>
   </p:cSld>

--- a/images/Logo.pptx
+++ b/images/Logo.pptx
@@ -270,7 +270,7 @@
           <a:p>
             <a:fld id="{C7B30B39-B25F-9241-B1FA-1A9268F493D8}" type="datetimeFigureOut">
               <a:rPr lang="en-US" smtClean="0"/>
-              <a:t>4/27/20</a:t>
+              <a:t>4/29/20</a:t>
             </a:fld>
             <a:endParaRPr lang="en-US"/>
           </a:p>
@@ -470,7 +470,7 @@
           <a:p>
             <a:fld id="{C7B30B39-B25F-9241-B1FA-1A9268F493D8}" type="datetimeFigureOut">
               <a:rPr lang="en-US" smtClean="0"/>
-              <a:t>4/27/20</a:t>
+              <a:t>4/29/20</a:t>
             </a:fld>
             <a:endParaRPr lang="en-US"/>
           </a:p>
@@ -680,7 +680,7 @@
           <a:p>
             <a:fld id="{C7B30B39-B25F-9241-B1FA-1A9268F493D8}" type="datetimeFigureOut">
               <a:rPr lang="en-US" smtClean="0"/>
-              <a:t>4/27/20</a:t>
+              <a:t>4/29/20</a:t>
             </a:fld>
             <a:endParaRPr lang="en-US"/>
           </a:p>
@@ -880,7 +880,7 @@
           <a:p>
             <a:fld id="{C7B30B39-B25F-9241-B1FA-1A9268F493D8}" type="datetimeFigureOut">
               <a:rPr lang="en-US" smtClean="0"/>
-              <a:t>4/27/20</a:t>
+              <a:t>4/29/20</a:t>
             </a:fld>
             <a:endParaRPr lang="en-US"/>
           </a:p>
@@ -1156,7 +1156,7 @@
           <a:p>
             <a:fld id="{C7B30B39-B25F-9241-B1FA-1A9268F493D8}" type="datetimeFigureOut">
               <a:rPr lang="en-US" smtClean="0"/>
-              <a:t>4/27/20</a:t>
+              <a:t>4/29/20</a:t>
             </a:fld>
             <a:endParaRPr lang="en-US"/>
           </a:p>
@@ -1424,7 +1424,7 @@
           <a:p>
             <a:fld id="{C7B30B39-B25F-9241-B1FA-1A9268F493D8}" type="datetimeFigureOut">
               <a:rPr lang="en-US" smtClean="0"/>
-              <a:t>4/27/20</a:t>
+              <a:t>4/29/20</a:t>
             </a:fld>
             <a:endParaRPr lang="en-US"/>
           </a:p>
@@ -1839,7 +1839,7 @@
           <a:p>
             <a:fld id="{C7B30B39-B25F-9241-B1FA-1A9268F493D8}" type="datetimeFigureOut">
               <a:rPr lang="en-US" smtClean="0"/>
-              <a:t>4/27/20</a:t>
+              <a:t>4/29/20</a:t>
             </a:fld>
             <a:endParaRPr lang="en-US"/>
           </a:p>
@@ -1981,7 +1981,7 @@
           <a:p>
             <a:fld id="{C7B30B39-B25F-9241-B1FA-1A9268F493D8}" type="datetimeFigureOut">
               <a:rPr lang="en-US" smtClean="0"/>
-              <a:t>4/27/20</a:t>
+              <a:t>4/29/20</a:t>
             </a:fld>
             <a:endParaRPr lang="en-US"/>
           </a:p>
@@ -2094,7 +2094,7 @@
           <a:p>
             <a:fld id="{C7B30B39-B25F-9241-B1FA-1A9268F493D8}" type="datetimeFigureOut">
               <a:rPr lang="en-US" smtClean="0"/>
-              <a:t>4/27/20</a:t>
+              <a:t>4/29/20</a:t>
             </a:fld>
             <a:endParaRPr lang="en-US"/>
           </a:p>
@@ -2407,7 +2407,7 @@
           <a:p>
             <a:fld id="{C7B30B39-B25F-9241-B1FA-1A9268F493D8}" type="datetimeFigureOut">
               <a:rPr lang="en-US" smtClean="0"/>
-              <a:t>4/27/20</a:t>
+              <a:t>4/29/20</a:t>
             </a:fld>
             <a:endParaRPr lang="en-US"/>
           </a:p>
@@ -2696,7 +2696,7 @@
           <a:p>
             <a:fld id="{C7B30B39-B25F-9241-B1FA-1A9268F493D8}" type="datetimeFigureOut">
               <a:rPr lang="en-US" smtClean="0"/>
-              <a:t>4/27/20</a:t>
+              <a:t>4/29/20</a:t>
             </a:fld>
             <a:endParaRPr lang="en-US"/>
           </a:p>
@@ -2939,7 +2939,7 @@
           <a:p>
             <a:fld id="{C7B30B39-B25F-9241-B1FA-1A9268F493D8}" type="datetimeFigureOut">
               <a:rPr lang="en-US" smtClean="0"/>
-              <a:t>4/27/20</a:t>
+              <a:t>4/29/20</a:t>
             </a:fld>
             <a:endParaRPr lang="en-US"/>
           </a:p>
@@ -6303,10 +6303,108 @@
       </p:sp>
       <p:sp>
         <p:nvSpPr>
-          <p:cNvPr id="6" name="Rectangle 5">
-            <a:extLst>
-              <a:ext uri="{FF2B5EF4-FFF2-40B4-BE49-F238E27FC236}">
-                <a16:creationId xmlns:a16="http://schemas.microsoft.com/office/drawing/2014/main" id="{F68F3E1A-564F-0945-A6DE-D9139DAF94D4}"/>
+          <p:cNvPr id="11" name="TextBox 10">
+            <a:extLst>
+              <a:ext uri="{FF2B5EF4-FFF2-40B4-BE49-F238E27FC236}">
+                <a16:creationId xmlns:a16="http://schemas.microsoft.com/office/drawing/2014/main" id="{1A20B4DB-094C-8948-9EA3-B7A95F52CCD0}"/>
+              </a:ext>
+            </a:extLst>
+          </p:cNvPr>
+          <p:cNvSpPr txBox="1"/>
+          <p:nvPr/>
+        </p:nvSpPr>
+        <p:spPr>
+          <a:xfrm>
+            <a:off x="997745" y="584981"/>
+            <a:ext cx="3626344" cy="2646878"/>
+          </a:xfrm>
+          <a:prstGeom prst="rect">
+            <a:avLst/>
+          </a:prstGeom>
+          <a:noFill/>
+        </p:spPr>
+        <p:txBody>
+          <a:bodyPr wrap="square" rtlCol="0">
+            <a:spAutoFit/>
+          </a:bodyPr>
+          <a:lstStyle/>
+          <a:p>
+            <a:r>
+              <a:rPr lang="hi-IN" sz="8800" b="1" dirty="0">
+                <a:solidFill>
+                  <a:srgbClr val="339889"/>
+                </a:solidFill>
+              </a:rPr>
+              <a:t>नमस्ते</a:t>
+            </a:r>
+            <a:r>
+              <a:rPr lang="en-US" sz="16600" b="1" dirty="0">
+                <a:solidFill>
+                  <a:srgbClr val="335C7E"/>
+                </a:solidFill>
+                <a:latin typeface="Google Sans Medium" panose="020B0503030502040204" pitchFamily="34" charset="0"/>
+              </a:rPr>
+              <a:t> </a:t>
+            </a:r>
+          </a:p>
+        </p:txBody>
+      </p:sp>
+      <p:sp>
+        <p:nvSpPr>
+          <p:cNvPr id="17" name="TextBox 16">
+            <a:extLst>
+              <a:ext uri="{FF2B5EF4-FFF2-40B4-BE49-F238E27FC236}">
+                <a16:creationId xmlns:a16="http://schemas.microsoft.com/office/drawing/2014/main" id="{0DC5ADFD-DCCF-2749-9642-1FD2736A46E4}"/>
+              </a:ext>
+            </a:extLst>
+          </p:cNvPr>
+          <p:cNvSpPr txBox="1"/>
+          <p:nvPr/>
+        </p:nvSpPr>
+        <p:spPr>
+          <a:xfrm>
+            <a:off x="882229" y="2349037"/>
+            <a:ext cx="5113930" cy="1169551"/>
+          </a:xfrm>
+          <a:prstGeom prst="rect">
+            <a:avLst/>
+          </a:prstGeom>
+          <a:noFill/>
+        </p:spPr>
+        <p:txBody>
+          <a:bodyPr wrap="square" rtlCol="0">
+            <a:spAutoFit/>
+          </a:bodyPr>
+          <a:lstStyle/>
+          <a:p>
+            <a:pPr algn="ctr"/>
+            <a:r>
+              <a:rPr lang="en-US" sz="7000" b="1" dirty="0">
+                <a:solidFill>
+                  <a:srgbClr val="339889"/>
+                </a:solidFill>
+                <a:latin typeface="Google Sans" panose="020B0503030502040204" pitchFamily="34" charset="0"/>
+              </a:rPr>
+              <a:t>NAMASTE.</a:t>
+            </a:r>
+            <a:r>
+              <a:rPr lang="en-US" sz="6900" b="1" dirty="0">
+                <a:solidFill>
+                  <a:srgbClr val="339889"/>
+                </a:solidFill>
+                <a:latin typeface="Google Sans" panose="020B0503030502040204" pitchFamily="34" charset="0"/>
+              </a:rPr>
+              <a:t> </a:t>
+            </a:r>
+          </a:p>
+        </p:txBody>
+      </p:sp>
+      <p:sp>
+        <p:nvSpPr>
+          <p:cNvPr id="18" name="Rectangle 17">
+            <a:extLst>
+              <a:ext uri="{FF2B5EF4-FFF2-40B4-BE49-F238E27FC236}">
+                <a16:creationId xmlns:a16="http://schemas.microsoft.com/office/drawing/2014/main" id="{D6A34D92-C254-FC42-A1AB-ACDBB7F8E0AF}"/>
               </a:ext>
             </a:extLst>
           </p:cNvPr>
@@ -6315,14 +6413,14 @@
         </p:nvSpPr>
         <p:spPr>
           <a:xfrm>
-            <a:off x="6499121" y="3106168"/>
-            <a:ext cx="3744200" cy="2666418"/>
+            <a:off x="1630395" y="1956419"/>
+            <a:ext cx="112058" cy="1258836"/>
           </a:xfrm>
           <a:prstGeom prst="rect">
             <a:avLst/>
           </a:prstGeom>
           <a:solidFill>
-            <a:srgbClr val="F6F7F8"/>
+            <a:srgbClr val="339889"/>
           </a:solidFill>
           <a:ln w="12700">
             <a:noFill/>
@@ -6355,159 +6453,10 @@
       </p:sp>
       <p:sp>
         <p:nvSpPr>
-          <p:cNvPr id="8" name="TextBox 7">
-            <a:extLst>
-              <a:ext uri="{FF2B5EF4-FFF2-40B4-BE49-F238E27FC236}">
-                <a16:creationId xmlns:a16="http://schemas.microsoft.com/office/drawing/2014/main" id="{102572D4-543B-C547-A8F1-ACBD4D0435CC}"/>
-              </a:ext>
-            </a:extLst>
-          </p:cNvPr>
-          <p:cNvSpPr txBox="1"/>
-          <p:nvPr/>
-        </p:nvSpPr>
-        <p:spPr>
-          <a:xfrm rot="10800000" flipH="1">
-            <a:off x="6368435" y="3823780"/>
-            <a:ext cx="3929204" cy="1785104"/>
-          </a:xfrm>
-          <a:prstGeom prst="rect">
-            <a:avLst/>
-          </a:prstGeom>
-          <a:noFill/>
-        </p:spPr>
-        <p:txBody>
-          <a:bodyPr wrap="square" rtlCol="0">
-            <a:spAutoFit/>
-          </a:bodyPr>
-          <a:lstStyle/>
-          <a:p>
-            <a:pPr algn="ctr"/>
-            <a:r>
-              <a:rPr lang="hi-IN" sz="11000" b="1" dirty="0">
-                <a:solidFill>
-                  <a:srgbClr val="339889"/>
-                </a:solidFill>
-                <a:latin typeface="Google Sans" panose="020B0503030502040204" pitchFamily="34" charset="0"/>
-              </a:rPr>
-              <a:t>अर्पित</a:t>
-            </a:r>
-            <a:r>
-              <a:rPr lang="en-US" sz="8000" b="1" dirty="0">
-                <a:solidFill>
-                  <a:srgbClr val="339889"/>
-                </a:solidFill>
-                <a:latin typeface="Google Sans" panose="020B0503030502040204" pitchFamily="34" charset="0"/>
-              </a:rPr>
-              <a:t> </a:t>
-            </a:r>
-          </a:p>
-        </p:txBody>
-      </p:sp>
-      <p:sp>
-        <p:nvSpPr>
-          <p:cNvPr id="7" name="TextBox 6">
-            <a:extLst>
-              <a:ext uri="{FF2B5EF4-FFF2-40B4-BE49-F238E27FC236}">
-                <a16:creationId xmlns:a16="http://schemas.microsoft.com/office/drawing/2014/main" id="{53902F90-FD5E-FF4C-AA58-8E79559E6E9D}"/>
-              </a:ext>
-            </a:extLst>
-          </p:cNvPr>
-          <p:cNvSpPr txBox="1"/>
-          <p:nvPr/>
-        </p:nvSpPr>
-        <p:spPr>
-          <a:xfrm>
-            <a:off x="6553439" y="3255761"/>
-            <a:ext cx="3689882" cy="1446550"/>
-          </a:xfrm>
-          <a:prstGeom prst="rect">
-            <a:avLst/>
-          </a:prstGeom>
-          <a:noFill/>
-        </p:spPr>
-        <p:txBody>
-          <a:bodyPr wrap="square" rtlCol="0">
-            <a:spAutoFit/>
-          </a:bodyPr>
-          <a:lstStyle/>
-          <a:p>
-            <a:pPr algn="ctr"/>
-            <a:r>
-              <a:rPr lang="en-US" sz="8800" b="1" dirty="0">
-                <a:solidFill>
-                  <a:srgbClr val="339889"/>
-                </a:solidFill>
-                <a:latin typeface="Google Sans" panose="020B0503030502040204" pitchFamily="34" charset="0"/>
-              </a:rPr>
-              <a:t>ARPIT</a:t>
-            </a:r>
-            <a:r>
-              <a:rPr lang="en-US" sz="8000" b="1" dirty="0">
-                <a:solidFill>
-                  <a:srgbClr val="339889"/>
-                </a:solidFill>
-                <a:latin typeface="Google Sans" panose="020B0503030502040204" pitchFamily="34" charset="0"/>
-              </a:rPr>
-              <a:t> </a:t>
-            </a:r>
-          </a:p>
-        </p:txBody>
-      </p:sp>
-      <p:sp>
-        <p:nvSpPr>
-          <p:cNvPr id="16" name="TextBox 15">
-            <a:extLst>
-              <a:ext uri="{FF2B5EF4-FFF2-40B4-BE49-F238E27FC236}">
-                <a16:creationId xmlns:a16="http://schemas.microsoft.com/office/drawing/2014/main" id="{A829F524-8735-6445-BDB9-D34750F6F8E1}"/>
-              </a:ext>
-            </a:extLst>
-          </p:cNvPr>
-          <p:cNvSpPr txBox="1"/>
-          <p:nvPr/>
-        </p:nvSpPr>
-        <p:spPr>
-          <a:xfrm>
-            <a:off x="9281527" y="2795937"/>
-            <a:ext cx="790833" cy="923330"/>
-          </a:xfrm>
-          <a:prstGeom prst="rect">
-            <a:avLst/>
-          </a:prstGeom>
-          <a:noFill/>
-        </p:spPr>
-        <p:txBody>
-          <a:bodyPr wrap="square" rtlCol="0">
-            <a:spAutoFit/>
-          </a:bodyPr>
-          <a:lstStyle/>
-          <a:p>
-            <a:r>
-              <a:rPr lang="en-US" sz="2000" b="1" dirty="0">
-                <a:solidFill>
-                  <a:srgbClr val="339889"/>
-                </a:solidFill>
-                <a:latin typeface="Google Sans" panose="020B0503030502040204" pitchFamily="34" charset="0"/>
-              </a:rPr>
-              <a:t>JAIN</a:t>
-            </a:r>
-            <a:r>
-              <a:rPr lang="en-US" sz="5400" b="1" dirty="0">
-                <a:solidFill>
-                  <a:srgbClr val="335C7E"/>
-                </a:solidFill>
-                <a:latin typeface="Google Sans Medium" panose="020B0503030502040204" pitchFamily="34" charset="0"/>
-              </a:rPr>
-              <a:t> </a:t>
-            </a:r>
-          </a:p>
-        </p:txBody>
-      </p:sp>
-      <p:sp>
-        <p:nvSpPr>
-          <p:cNvPr id="9" name="Rectangle 8">
-            <a:extLst>
-              <a:ext uri="{FF2B5EF4-FFF2-40B4-BE49-F238E27FC236}">
-                <a16:creationId xmlns:a16="http://schemas.microsoft.com/office/drawing/2014/main" id="{9C0332C3-83A8-6448-ACCE-4B373BF094FA}"/>
+          <p:cNvPr id="19" name="Rectangle 18">
+            <a:extLst>
+              <a:ext uri="{FF2B5EF4-FFF2-40B4-BE49-F238E27FC236}">
+                <a16:creationId xmlns:a16="http://schemas.microsoft.com/office/drawing/2014/main" id="{AEA741D0-658C-AA4F-B52B-B69B3FD500EC}"/>
               </a:ext>
             </a:extLst>
           </p:cNvPr>
@@ -6516,8 +6465,8 @@
         </p:nvSpPr>
         <p:spPr>
           <a:xfrm>
-            <a:off x="6704977" y="4164458"/>
-            <a:ext cx="130686" cy="899668"/>
+            <a:off x="1499708" y="2263775"/>
+            <a:ext cx="130686" cy="750055"/>
           </a:xfrm>
           <a:prstGeom prst="rect">
             <a:avLst/>
@@ -6556,10 +6505,10 @@
       </p:sp>
       <p:sp>
         <p:nvSpPr>
-          <p:cNvPr id="10" name="Rectangle 9">
-            <a:extLst>
-              <a:ext uri="{FF2B5EF4-FFF2-40B4-BE49-F238E27FC236}">
-                <a16:creationId xmlns:a16="http://schemas.microsoft.com/office/drawing/2014/main" id="{2C6D7C0E-C3B4-4B4A-93ED-A445237BE813}"/>
+          <p:cNvPr id="21" name="Rectangle 20">
+            <a:extLst>
+              <a:ext uri="{FF2B5EF4-FFF2-40B4-BE49-F238E27FC236}">
+                <a16:creationId xmlns:a16="http://schemas.microsoft.com/office/drawing/2014/main" id="{E24CB61D-5924-5044-B179-5F58BB36E97A}"/>
               </a:ext>
             </a:extLst>
           </p:cNvPr>
@@ -6568,8 +6517,8 @@
         </p:nvSpPr>
         <p:spPr>
           <a:xfrm>
-            <a:off x="6995141" y="4322233"/>
-            <a:ext cx="130686" cy="405341"/>
+            <a:off x="1022277" y="1986511"/>
+            <a:ext cx="608117" cy="144000"/>
           </a:xfrm>
           <a:prstGeom prst="rect">
             <a:avLst/>
@@ -6608,10 +6557,10 @@
       </p:sp>
       <p:sp>
         <p:nvSpPr>
-          <p:cNvPr id="12" name="Rectangle 11">
-            <a:extLst>
-              <a:ext uri="{FF2B5EF4-FFF2-40B4-BE49-F238E27FC236}">
-                <a16:creationId xmlns:a16="http://schemas.microsoft.com/office/drawing/2014/main" id="{AED9B19C-967A-D146-94CB-6138C259257F}"/>
+          <p:cNvPr id="22" name="Rectangle 21">
+            <a:extLst>
+              <a:ext uri="{FF2B5EF4-FFF2-40B4-BE49-F238E27FC236}">
+                <a16:creationId xmlns:a16="http://schemas.microsoft.com/office/drawing/2014/main" id="{6CDB1660-A3B6-454D-B913-D2B3415FE912}"/>
               </a:ext>
             </a:extLst>
           </p:cNvPr>
@@ -6619,15 +6568,15 @@
           <p:nvPr/>
         </p:nvSpPr>
         <p:spPr>
-          <a:xfrm>
-            <a:off x="9032875" y="3514726"/>
-            <a:ext cx="63540" cy="1549400"/>
+          <a:xfrm rot="19731961">
+            <a:off x="1471089" y="2788943"/>
+            <a:ext cx="112058" cy="327290"/>
           </a:xfrm>
           <a:prstGeom prst="rect">
             <a:avLst/>
           </a:prstGeom>
           <a:solidFill>
-            <a:srgbClr val="F6F7F8"/>
+            <a:srgbClr val="339889"/>
           </a:solidFill>
           <a:ln w="12700">
             <a:noFill/>
@@ -6660,10 +6609,10 @@
       </p:sp>
       <p:sp>
         <p:nvSpPr>
-          <p:cNvPr id="13" name="Rectangle 12">
-            <a:extLst>
-              <a:ext uri="{FF2B5EF4-FFF2-40B4-BE49-F238E27FC236}">
-                <a16:creationId xmlns:a16="http://schemas.microsoft.com/office/drawing/2014/main" id="{36E8FF7F-B4C3-C84F-ADD1-39A58A04296A}"/>
+          <p:cNvPr id="23" name="Rectangle 22">
+            <a:extLst>
+              <a:ext uri="{FF2B5EF4-FFF2-40B4-BE49-F238E27FC236}">
+                <a16:creationId xmlns:a16="http://schemas.microsoft.com/office/drawing/2014/main" id="{C6D78E92-C3F7-284C-B5A7-CA1637D6E7CE}"/>
               </a:ext>
             </a:extLst>
           </p:cNvPr>
@@ -6671,15 +6620,15 @@
           <p:nvPr/>
         </p:nvSpPr>
         <p:spPr>
-          <a:xfrm>
-            <a:off x="7635342" y="3458030"/>
-            <a:ext cx="130686" cy="972456"/>
+          <a:xfrm rot="20329332">
+            <a:off x="3578899" y="2547330"/>
+            <a:ext cx="112058" cy="327290"/>
           </a:xfrm>
           <a:prstGeom prst="rect">
             <a:avLst/>
           </a:prstGeom>
           <a:solidFill>
-            <a:srgbClr val="F6F7F8"/>
+            <a:srgbClr val="339889"/>
           </a:solidFill>
           <a:ln w="12700">
             <a:noFill/>
@@ -6712,10 +6661,10 @@
       </p:sp>
       <p:sp>
         <p:nvSpPr>
-          <p:cNvPr id="14" name="Rectangle 13">
-            <a:extLst>
-              <a:ext uri="{FF2B5EF4-FFF2-40B4-BE49-F238E27FC236}">
-                <a16:creationId xmlns:a16="http://schemas.microsoft.com/office/drawing/2014/main" id="{4D8046A0-6631-E342-9604-76B471D4492E}"/>
+          <p:cNvPr id="24" name="Rectangle 23">
+            <a:extLst>
+              <a:ext uri="{FF2B5EF4-FFF2-40B4-BE49-F238E27FC236}">
+                <a16:creationId xmlns:a16="http://schemas.microsoft.com/office/drawing/2014/main" id="{96C8524E-9F7D-B54E-8454-621C6CF3C87C}"/>
               </a:ext>
             </a:extLst>
           </p:cNvPr>
@@ -6723,9 +6672,9 @@
           <p:nvPr/>
         </p:nvSpPr>
         <p:spPr>
-          <a:xfrm>
-            <a:off x="7808466" y="3542156"/>
-            <a:ext cx="130686" cy="837530"/>
+          <a:xfrm rot="19107136">
+            <a:off x="2962295" y="2500606"/>
+            <a:ext cx="137559" cy="152215"/>
           </a:xfrm>
           <a:prstGeom prst="rect">
             <a:avLst/>
@@ -6764,58 +6713,10 @@
       </p:sp>
       <p:sp>
         <p:nvSpPr>
-          <p:cNvPr id="11" name="TextBox 10">
-            <a:extLst>
-              <a:ext uri="{FF2B5EF4-FFF2-40B4-BE49-F238E27FC236}">
-                <a16:creationId xmlns:a16="http://schemas.microsoft.com/office/drawing/2014/main" id="{1A20B4DB-094C-8948-9EA3-B7A95F52CCD0}"/>
-              </a:ext>
-            </a:extLst>
-          </p:cNvPr>
-          <p:cNvSpPr txBox="1"/>
-          <p:nvPr/>
-        </p:nvSpPr>
-        <p:spPr>
-          <a:xfrm>
-            <a:off x="997745" y="584981"/>
-            <a:ext cx="3626344" cy="2646878"/>
-          </a:xfrm>
-          <a:prstGeom prst="rect">
-            <a:avLst/>
-          </a:prstGeom>
-          <a:noFill/>
-        </p:spPr>
-        <p:txBody>
-          <a:bodyPr wrap="square" rtlCol="0">
-            <a:spAutoFit/>
-          </a:bodyPr>
-          <a:lstStyle/>
-          <a:p>
-            <a:r>
-              <a:rPr lang="hi-IN" sz="8800" b="1" dirty="0">
-                <a:solidFill>
-                  <a:srgbClr val="339889"/>
-                </a:solidFill>
-              </a:rPr>
-              <a:t>नमस्ते</a:t>
-            </a:r>
-            <a:r>
-              <a:rPr lang="en-US" sz="16600" b="1" dirty="0">
-                <a:solidFill>
-                  <a:srgbClr val="335C7E"/>
-                </a:solidFill>
-                <a:latin typeface="Google Sans Medium" panose="020B0503030502040204" pitchFamily="34" charset="0"/>
-              </a:rPr>
-              <a:t> </a:t>
-            </a:r>
-          </a:p>
-        </p:txBody>
-      </p:sp>
-      <p:sp>
-        <p:nvSpPr>
-          <p:cNvPr id="15" name="Rectangle 14">
-            <a:extLst>
-              <a:ext uri="{FF2B5EF4-FFF2-40B4-BE49-F238E27FC236}">
-                <a16:creationId xmlns:a16="http://schemas.microsoft.com/office/drawing/2014/main" id="{0894A55E-70FC-7A4D-BEA7-0731DFABF274}"/>
+          <p:cNvPr id="25" name="Rectangle 24">
+            <a:extLst>
+              <a:ext uri="{FF2B5EF4-FFF2-40B4-BE49-F238E27FC236}">
+                <a16:creationId xmlns:a16="http://schemas.microsoft.com/office/drawing/2014/main" id="{DECE0C50-4ED7-B54F-99EF-4E66380C2156}"/>
               </a:ext>
             </a:extLst>
           </p:cNvPr>
@@ -6823,9 +6724,9 @@
           <p:nvPr/>
         </p:nvSpPr>
         <p:spPr>
-          <a:xfrm>
-            <a:off x="6639634" y="4614292"/>
-            <a:ext cx="130686" cy="899668"/>
+          <a:xfrm rot="20354526">
+            <a:off x="3644676" y="2449034"/>
+            <a:ext cx="66518" cy="247925"/>
           </a:xfrm>
           <a:prstGeom prst="rect">
             <a:avLst/>
@@ -6864,60 +6765,10 @@
       </p:sp>
       <p:sp>
         <p:nvSpPr>
-          <p:cNvPr id="17" name="TextBox 16">
-            <a:extLst>
-              <a:ext uri="{FF2B5EF4-FFF2-40B4-BE49-F238E27FC236}">
-                <a16:creationId xmlns:a16="http://schemas.microsoft.com/office/drawing/2014/main" id="{0DC5ADFD-DCCF-2749-9642-1FD2736A46E4}"/>
-              </a:ext>
-            </a:extLst>
-          </p:cNvPr>
-          <p:cNvSpPr txBox="1"/>
-          <p:nvPr/>
-        </p:nvSpPr>
-        <p:spPr>
-          <a:xfrm>
-            <a:off x="882229" y="2349037"/>
-            <a:ext cx="5113930" cy="1169551"/>
-          </a:xfrm>
-          <a:prstGeom prst="rect">
-            <a:avLst/>
-          </a:prstGeom>
-          <a:noFill/>
-        </p:spPr>
-        <p:txBody>
-          <a:bodyPr wrap="square" rtlCol="0">
-            <a:spAutoFit/>
-          </a:bodyPr>
-          <a:lstStyle/>
-          <a:p>
-            <a:pPr algn="ctr"/>
-            <a:r>
-              <a:rPr lang="en-US" sz="7000" b="1" dirty="0">
-                <a:solidFill>
-                  <a:srgbClr val="339889"/>
-                </a:solidFill>
-                <a:latin typeface="Google Sans" panose="020B0503030502040204" pitchFamily="34" charset="0"/>
-              </a:rPr>
-              <a:t>NAMASTE.</a:t>
-            </a:r>
-            <a:r>
-              <a:rPr lang="en-US" sz="6900" b="1" dirty="0">
-                <a:solidFill>
-                  <a:srgbClr val="339889"/>
-                </a:solidFill>
-                <a:latin typeface="Google Sans" panose="020B0503030502040204" pitchFamily="34" charset="0"/>
-              </a:rPr>
-              <a:t> </a:t>
-            </a:r>
-          </a:p>
-        </p:txBody>
-      </p:sp>
-      <p:sp>
-        <p:nvSpPr>
-          <p:cNvPr id="18" name="Rectangle 17">
-            <a:extLst>
-              <a:ext uri="{FF2B5EF4-FFF2-40B4-BE49-F238E27FC236}">
-                <a16:creationId xmlns:a16="http://schemas.microsoft.com/office/drawing/2014/main" id="{D6A34D92-C254-FC42-A1AB-ACDBB7F8E0AF}"/>
+          <p:cNvPr id="26" name="Rectangle 25">
+            <a:extLst>
+              <a:ext uri="{FF2B5EF4-FFF2-40B4-BE49-F238E27FC236}">
+                <a16:creationId xmlns:a16="http://schemas.microsoft.com/office/drawing/2014/main" id="{FE384B5F-4FFC-DA4E-AD63-4AE6AA2EAB4A}"/>
               </a:ext>
             </a:extLst>
           </p:cNvPr>
@@ -6925,9 +6776,9 @@
           <p:nvPr/>
         </p:nvSpPr>
         <p:spPr>
-          <a:xfrm>
-            <a:off x="1630395" y="1956419"/>
-            <a:ext cx="112058" cy="1258836"/>
+          <a:xfrm rot="5400000">
+            <a:off x="1478560" y="2048855"/>
+            <a:ext cx="112058" cy="327290"/>
           </a:xfrm>
           <a:prstGeom prst="rect">
             <a:avLst/>
@@ -6966,10 +6817,10 @@
       </p:sp>
       <p:sp>
         <p:nvSpPr>
-          <p:cNvPr id="19" name="Rectangle 18">
-            <a:extLst>
-              <a:ext uri="{FF2B5EF4-FFF2-40B4-BE49-F238E27FC236}">
-                <a16:creationId xmlns:a16="http://schemas.microsoft.com/office/drawing/2014/main" id="{AEA741D0-658C-AA4F-B52B-B69B3FD500EC}"/>
+          <p:cNvPr id="27" name="Rectangle 26">
+            <a:extLst>
+              <a:ext uri="{FF2B5EF4-FFF2-40B4-BE49-F238E27FC236}">
+                <a16:creationId xmlns:a16="http://schemas.microsoft.com/office/drawing/2014/main" id="{A17F3847-CB06-7340-85D6-8C2C1147AE9D}"/>
               </a:ext>
             </a:extLst>
           </p:cNvPr>
@@ -6977,15 +6828,15 @@
           <p:nvPr/>
         </p:nvSpPr>
         <p:spPr>
-          <a:xfrm>
-            <a:off x="1499708" y="2257831"/>
-            <a:ext cx="130686" cy="758939"/>
+          <a:xfrm rot="5400000">
+            <a:off x="1080021" y="2533842"/>
+            <a:ext cx="1238400" cy="126000"/>
           </a:xfrm>
           <a:prstGeom prst="rect">
             <a:avLst/>
           </a:prstGeom>
           <a:solidFill>
-            <a:srgbClr val="F6F7F8"/>
+            <a:srgbClr val="339889"/>
           </a:solidFill>
           <a:ln w="12700">
             <a:noFill/>
@@ -7018,10 +6869,10 @@
       </p:sp>
       <p:sp>
         <p:nvSpPr>
-          <p:cNvPr id="21" name="Rectangle 20">
-            <a:extLst>
-              <a:ext uri="{FF2B5EF4-FFF2-40B4-BE49-F238E27FC236}">
-                <a16:creationId xmlns:a16="http://schemas.microsoft.com/office/drawing/2014/main" id="{E24CB61D-5924-5044-B179-5F58BB36E97A}"/>
+          <p:cNvPr id="3" name="Oval 2">
+            <a:extLst>
+              <a:ext uri="{FF2B5EF4-FFF2-40B4-BE49-F238E27FC236}">
+                <a16:creationId xmlns:a16="http://schemas.microsoft.com/office/drawing/2014/main" id="{11FEFAC8-7FCF-4B4B-A4DD-7238A1D38A71}"/>
               </a:ext>
             </a:extLst>
           </p:cNvPr>
@@ -7030,16 +6881,16 @@
         </p:nvSpPr>
         <p:spPr>
           <a:xfrm>
-            <a:off x="1499708" y="1990892"/>
-            <a:ext cx="130686" cy="142874"/>
-          </a:xfrm>
-          <a:prstGeom prst="rect">
+            <a:off x="1198776" y="2251008"/>
+            <a:ext cx="129600" cy="129600"/>
+          </a:xfrm>
+          <a:prstGeom prst="ellipse">
             <a:avLst/>
           </a:prstGeom>
           <a:solidFill>
-            <a:srgbClr val="F6F7F8"/>
+            <a:srgbClr val="F6F7F9"/>
           </a:solidFill>
-          <a:ln w="12700">
+          <a:ln>
             <a:noFill/>
           </a:ln>
         </p:spPr>
@@ -7064,16 +6915,16 @@
           <a:lstStyle/>
           <a:p>
             <a:pPr algn="ctr"/>
-            <a:endParaRPr lang="en-US" dirty="0"/>
-          </a:p>
-        </p:txBody>
-      </p:sp>
-      <p:sp>
-        <p:nvSpPr>
-          <p:cNvPr id="22" name="Rectangle 21">
-            <a:extLst>
-              <a:ext uri="{FF2B5EF4-FFF2-40B4-BE49-F238E27FC236}">
-                <a16:creationId xmlns:a16="http://schemas.microsoft.com/office/drawing/2014/main" id="{6CDB1660-A3B6-454D-B913-D2B3415FE912}"/>
+            <a:endParaRPr lang="en-US"/>
+          </a:p>
+        </p:txBody>
+      </p:sp>
+      <p:sp>
+        <p:nvSpPr>
+          <p:cNvPr id="28" name="Oval 27">
+            <a:extLst>
+              <a:ext uri="{FF2B5EF4-FFF2-40B4-BE49-F238E27FC236}">
+                <a16:creationId xmlns:a16="http://schemas.microsoft.com/office/drawing/2014/main" id="{4F085F0B-3CBD-4649-8B5C-C58B27E83155}"/>
               </a:ext>
             </a:extLst>
           </p:cNvPr>
@@ -7081,17 +6932,17 @@
           <p:nvPr/>
         </p:nvSpPr>
         <p:spPr>
-          <a:xfrm rot="19731961">
-            <a:off x="1471089" y="2788943"/>
-            <a:ext cx="112058" cy="327290"/>
-          </a:xfrm>
-          <a:prstGeom prst="rect">
+          <a:xfrm>
+            <a:off x="1970301" y="2279583"/>
+            <a:ext cx="111600" cy="111600"/>
+          </a:xfrm>
+          <a:prstGeom prst="ellipse">
             <a:avLst/>
           </a:prstGeom>
           <a:solidFill>
-            <a:srgbClr val="339889"/>
+            <a:srgbClr val="F6F7F9"/>
           </a:solidFill>
-          <a:ln w="12700">
+          <a:ln>
             <a:noFill/>
           </a:ln>
         </p:spPr>
@@ -7116,163 +6967,7 @@
           <a:lstStyle/>
           <a:p>
             <a:pPr algn="ctr"/>
-            <a:endParaRPr lang="en-US" dirty="0"/>
-          </a:p>
-        </p:txBody>
-      </p:sp>
-      <p:sp>
-        <p:nvSpPr>
-          <p:cNvPr id="23" name="Rectangle 22">
-            <a:extLst>
-              <a:ext uri="{FF2B5EF4-FFF2-40B4-BE49-F238E27FC236}">
-                <a16:creationId xmlns:a16="http://schemas.microsoft.com/office/drawing/2014/main" id="{C6D78E92-C3F7-284C-B5A7-CA1637D6E7CE}"/>
-              </a:ext>
-            </a:extLst>
-          </p:cNvPr>
-          <p:cNvSpPr/>
-          <p:nvPr/>
-        </p:nvSpPr>
-        <p:spPr>
-          <a:xfrm rot="20329332">
-            <a:off x="3578899" y="2547330"/>
-            <a:ext cx="112058" cy="327290"/>
-          </a:xfrm>
-          <a:prstGeom prst="rect">
-            <a:avLst/>
-          </a:prstGeom>
-          <a:solidFill>
-            <a:srgbClr val="339889"/>
-          </a:solidFill>
-          <a:ln w="12700">
-            <a:noFill/>
-          </a:ln>
-        </p:spPr>
-        <p:style>
-          <a:lnRef idx="2">
-            <a:schemeClr val="accent1">
-              <a:shade val="50000"/>
-            </a:schemeClr>
-          </a:lnRef>
-          <a:fillRef idx="1">
-            <a:schemeClr val="accent1"/>
-          </a:fillRef>
-          <a:effectRef idx="0">
-            <a:schemeClr val="accent1"/>
-          </a:effectRef>
-          <a:fontRef idx="minor">
-            <a:schemeClr val="lt1"/>
-          </a:fontRef>
-        </p:style>
-        <p:txBody>
-          <a:bodyPr rtlCol="0" anchor="ctr"/>
-          <a:lstStyle/>
-          <a:p>
-            <a:pPr algn="ctr"/>
-            <a:endParaRPr lang="en-US" dirty="0"/>
-          </a:p>
-        </p:txBody>
-      </p:sp>
-      <p:sp>
-        <p:nvSpPr>
-          <p:cNvPr id="24" name="Rectangle 23">
-            <a:extLst>
-              <a:ext uri="{FF2B5EF4-FFF2-40B4-BE49-F238E27FC236}">
-                <a16:creationId xmlns:a16="http://schemas.microsoft.com/office/drawing/2014/main" id="{96C8524E-9F7D-B54E-8454-621C6CF3C87C}"/>
-              </a:ext>
-            </a:extLst>
-          </p:cNvPr>
-          <p:cNvSpPr/>
-          <p:nvPr/>
-        </p:nvSpPr>
-        <p:spPr>
-          <a:xfrm rot="19107136">
-            <a:off x="2962295" y="2500606"/>
-            <a:ext cx="137559" cy="152215"/>
-          </a:xfrm>
-          <a:prstGeom prst="rect">
-            <a:avLst/>
-          </a:prstGeom>
-          <a:solidFill>
-            <a:srgbClr val="339889"/>
-          </a:solidFill>
-          <a:ln w="12700">
-            <a:noFill/>
-          </a:ln>
-        </p:spPr>
-        <p:style>
-          <a:lnRef idx="2">
-            <a:schemeClr val="accent1">
-              <a:shade val="50000"/>
-            </a:schemeClr>
-          </a:lnRef>
-          <a:fillRef idx="1">
-            <a:schemeClr val="accent1"/>
-          </a:fillRef>
-          <a:effectRef idx="0">
-            <a:schemeClr val="accent1"/>
-          </a:effectRef>
-          <a:fontRef idx="minor">
-            <a:schemeClr val="lt1"/>
-          </a:fontRef>
-        </p:style>
-        <p:txBody>
-          <a:bodyPr rtlCol="0" anchor="ctr"/>
-          <a:lstStyle/>
-          <a:p>
-            <a:pPr algn="ctr"/>
-            <a:endParaRPr lang="en-US" dirty="0"/>
-          </a:p>
-        </p:txBody>
-      </p:sp>
-      <p:sp>
-        <p:nvSpPr>
-          <p:cNvPr id="25" name="Rectangle 24">
-            <a:extLst>
-              <a:ext uri="{FF2B5EF4-FFF2-40B4-BE49-F238E27FC236}">
-                <a16:creationId xmlns:a16="http://schemas.microsoft.com/office/drawing/2014/main" id="{DECE0C50-4ED7-B54F-99EF-4E66380C2156}"/>
-              </a:ext>
-            </a:extLst>
-          </p:cNvPr>
-          <p:cNvSpPr/>
-          <p:nvPr/>
-        </p:nvSpPr>
-        <p:spPr>
-          <a:xfrm rot="20354526">
-            <a:off x="3644676" y="2449034"/>
-            <a:ext cx="66518" cy="247925"/>
-          </a:xfrm>
-          <a:prstGeom prst="rect">
-            <a:avLst/>
-          </a:prstGeom>
-          <a:solidFill>
-            <a:srgbClr val="F6F7F8"/>
-          </a:solidFill>
-          <a:ln w="12700">
-            <a:noFill/>
-          </a:ln>
-        </p:spPr>
-        <p:style>
-          <a:lnRef idx="2">
-            <a:schemeClr val="accent1">
-              <a:shade val="50000"/>
-            </a:schemeClr>
-          </a:lnRef>
-          <a:fillRef idx="1">
-            <a:schemeClr val="accent1"/>
-          </a:fillRef>
-          <a:effectRef idx="0">
-            <a:schemeClr val="accent1"/>
-          </a:effectRef>
-          <a:fontRef idx="minor">
-            <a:schemeClr val="lt1"/>
-          </a:fontRef>
-        </p:style>
-        <p:txBody>
-          <a:bodyPr rtlCol="0" anchor="ctr"/>
-          <a:lstStyle/>
-          <a:p>
-            <a:pPr algn="ctr"/>
-            <a:endParaRPr lang="en-US" dirty="0"/>
+            <a:endParaRPr lang="en-US"/>
           </a:p>
         </p:txBody>
       </p:sp>

--- a/images/Logo.pptx
+++ b/images/Logo.pptx
@@ -14,7 +14,8 @@
     <p:sldId id="266" r:id="rId8"/>
     <p:sldId id="260" r:id="rId9"/>
     <p:sldId id="261" r:id="rId10"/>
-    <p:sldId id="262" r:id="rId11"/>
+    <p:sldId id="267" r:id="rId11"/>
+    <p:sldId id="262" r:id="rId12"/>
   </p:sldIdLst>
   <p:sldSz cx="12192000" cy="6858000"/>
   <p:notesSz cx="6858000" cy="9144000"/>
@@ -270,7 +271,7 @@
           <a:p>
             <a:fld id="{C7B30B39-B25F-9241-B1FA-1A9268F493D8}" type="datetimeFigureOut">
               <a:rPr lang="en-US" smtClean="0"/>
-              <a:t>4/29/20</a:t>
+              <a:t>5/1/20</a:t>
             </a:fld>
             <a:endParaRPr lang="en-US"/>
           </a:p>
@@ -470,7 +471,7 @@
           <a:p>
             <a:fld id="{C7B30B39-B25F-9241-B1FA-1A9268F493D8}" type="datetimeFigureOut">
               <a:rPr lang="en-US" smtClean="0"/>
-              <a:t>4/29/20</a:t>
+              <a:t>5/1/20</a:t>
             </a:fld>
             <a:endParaRPr lang="en-US"/>
           </a:p>
@@ -680,7 +681,7 @@
           <a:p>
             <a:fld id="{C7B30B39-B25F-9241-B1FA-1A9268F493D8}" type="datetimeFigureOut">
               <a:rPr lang="en-US" smtClean="0"/>
-              <a:t>4/29/20</a:t>
+              <a:t>5/1/20</a:t>
             </a:fld>
             <a:endParaRPr lang="en-US"/>
           </a:p>
@@ -880,7 +881,7 @@
           <a:p>
             <a:fld id="{C7B30B39-B25F-9241-B1FA-1A9268F493D8}" type="datetimeFigureOut">
               <a:rPr lang="en-US" smtClean="0"/>
-              <a:t>4/29/20</a:t>
+              <a:t>5/1/20</a:t>
             </a:fld>
             <a:endParaRPr lang="en-US"/>
           </a:p>
@@ -1156,7 +1157,7 @@
           <a:p>
             <a:fld id="{C7B30B39-B25F-9241-B1FA-1A9268F493D8}" type="datetimeFigureOut">
               <a:rPr lang="en-US" smtClean="0"/>
-              <a:t>4/29/20</a:t>
+              <a:t>5/1/20</a:t>
             </a:fld>
             <a:endParaRPr lang="en-US"/>
           </a:p>
@@ -1424,7 +1425,7 @@
           <a:p>
             <a:fld id="{C7B30B39-B25F-9241-B1FA-1A9268F493D8}" type="datetimeFigureOut">
               <a:rPr lang="en-US" smtClean="0"/>
-              <a:t>4/29/20</a:t>
+              <a:t>5/1/20</a:t>
             </a:fld>
             <a:endParaRPr lang="en-US"/>
           </a:p>
@@ -1839,7 +1840,7 @@
           <a:p>
             <a:fld id="{C7B30B39-B25F-9241-B1FA-1A9268F493D8}" type="datetimeFigureOut">
               <a:rPr lang="en-US" smtClean="0"/>
-              <a:t>4/29/20</a:t>
+              <a:t>5/1/20</a:t>
             </a:fld>
             <a:endParaRPr lang="en-US"/>
           </a:p>
@@ -1981,7 +1982,7 @@
           <a:p>
             <a:fld id="{C7B30B39-B25F-9241-B1FA-1A9268F493D8}" type="datetimeFigureOut">
               <a:rPr lang="en-US" smtClean="0"/>
-              <a:t>4/29/20</a:t>
+              <a:t>5/1/20</a:t>
             </a:fld>
             <a:endParaRPr lang="en-US"/>
           </a:p>
@@ -2094,7 +2095,7 @@
           <a:p>
             <a:fld id="{C7B30B39-B25F-9241-B1FA-1A9268F493D8}" type="datetimeFigureOut">
               <a:rPr lang="en-US" smtClean="0"/>
-              <a:t>4/29/20</a:t>
+              <a:t>5/1/20</a:t>
             </a:fld>
             <a:endParaRPr lang="en-US"/>
           </a:p>
@@ -2407,7 +2408,7 @@
           <a:p>
             <a:fld id="{C7B30B39-B25F-9241-B1FA-1A9268F493D8}" type="datetimeFigureOut">
               <a:rPr lang="en-US" smtClean="0"/>
-              <a:t>4/29/20</a:t>
+              <a:t>5/1/20</a:t>
             </a:fld>
             <a:endParaRPr lang="en-US"/>
           </a:p>
@@ -2696,7 +2697,7 @@
           <a:p>
             <a:fld id="{C7B30B39-B25F-9241-B1FA-1A9268F493D8}" type="datetimeFigureOut">
               <a:rPr lang="en-US" smtClean="0"/>
-              <a:t>4/29/20</a:t>
+              <a:t>5/1/20</a:t>
             </a:fld>
             <a:endParaRPr lang="en-US"/>
           </a:p>
@@ -2939,7 +2940,7 @@
           <a:p>
             <a:fld id="{C7B30B39-B25F-9241-B1FA-1A9268F493D8}" type="datetimeFigureOut">
               <a:rPr lang="en-US" smtClean="0"/>
-              <a:t>4/29/20</a:t>
+              <a:t>5/1/20</a:t>
             </a:fld>
             <a:endParaRPr lang="en-US"/>
           </a:p>
@@ -3829,10 +3830,10 @@
       </p:grpSpPr>
       <p:sp>
         <p:nvSpPr>
-          <p:cNvPr id="5" name="Rectangle 4">
-            <a:extLst>
-              <a:ext uri="{FF2B5EF4-FFF2-40B4-BE49-F238E27FC236}">
-                <a16:creationId xmlns:a16="http://schemas.microsoft.com/office/drawing/2014/main" id="{9A427F68-04E0-7C40-B84B-D8B8ADB897CF}"/>
+          <p:cNvPr id="6" name="Rectangle 5">
+            <a:extLst>
+              <a:ext uri="{FF2B5EF4-FFF2-40B4-BE49-F238E27FC236}">
+                <a16:creationId xmlns:a16="http://schemas.microsoft.com/office/drawing/2014/main" id="{F68F3E1A-564F-0945-A6DE-D9139DAF94D4}"/>
               </a:ext>
             </a:extLst>
           </p:cNvPr>
@@ -3841,14 +3842,16 @@
         </p:nvSpPr>
         <p:spPr>
           <a:xfrm>
-            <a:off x="154684" y="438303"/>
-            <a:ext cx="5756259" cy="4580011"/>
-          </a:xfrm>
-          <a:prstGeom prst="rect">
-            <a:avLst/>
-          </a:prstGeom>
-          <a:noFill/>
-          <a:ln>
+            <a:off x="7064877" y="612828"/>
+            <a:ext cx="4996593" cy="4979208"/>
+          </a:xfrm>
+          <a:prstGeom prst="rect">
+            <a:avLst/>
+          </a:prstGeom>
+          <a:solidFill>
+            <a:srgbClr val="F6F7F8"/>
+          </a:solidFill>
+          <a:ln w="12700">
             <a:noFill/>
           </a:ln>
         </p:spPr>
@@ -3873,16 +3876,16 @@
           <a:lstStyle/>
           <a:p>
             <a:pPr algn="ctr"/>
-            <a:endParaRPr lang="en-US"/>
-          </a:p>
-        </p:txBody>
-      </p:sp>
-      <p:sp>
-        <p:nvSpPr>
-          <p:cNvPr id="8" name="Rectangle 7">
-            <a:extLst>
-              <a:ext uri="{FF2B5EF4-FFF2-40B4-BE49-F238E27FC236}">
-                <a16:creationId xmlns:a16="http://schemas.microsoft.com/office/drawing/2014/main" id="{A1685247-8415-414F-B3CE-089251D6C360}"/>
+            <a:endParaRPr lang="en-US" dirty="0"/>
+          </a:p>
+        </p:txBody>
+      </p:sp>
+      <p:sp>
+        <p:nvSpPr>
+          <p:cNvPr id="15" name="Rectangle 14">
+            <a:extLst>
+              <a:ext uri="{FF2B5EF4-FFF2-40B4-BE49-F238E27FC236}">
+                <a16:creationId xmlns:a16="http://schemas.microsoft.com/office/drawing/2014/main" id="{BFC01515-0C75-A94E-A507-2C5D301A0614}"/>
               </a:ext>
             </a:extLst>
           </p:cNvPr>
@@ -3891,16 +3894,14 @@
         </p:nvSpPr>
         <p:spPr>
           <a:xfrm>
-            <a:off x="12700" y="3000375"/>
-            <a:ext cx="12166600" cy="148514"/>
-          </a:xfrm>
-          <a:prstGeom prst="rect">
-            <a:avLst/>
-          </a:prstGeom>
-          <a:solidFill>
-            <a:srgbClr val="339889"/>
-          </a:solidFill>
-          <a:ln>
+            <a:off x="6928754" y="503965"/>
+            <a:ext cx="5192486" cy="5178378"/>
+          </a:xfrm>
+          <a:prstGeom prst="rect">
+            <a:avLst/>
+          </a:prstGeom>
+          <a:noFill/>
+          <a:ln w="12700">
             <a:noFill/>
           </a:ln>
         </p:spPr>
@@ -3925,10 +3926,495 @@
           <a:lstStyle/>
           <a:p>
             <a:pPr algn="ctr"/>
-            <a:endParaRPr lang="en-US"/>
-          </a:p>
-        </p:txBody>
-      </p:sp>
+            <a:endParaRPr lang="en-US" dirty="0"/>
+          </a:p>
+        </p:txBody>
+      </p:sp>
+      <p:sp>
+        <p:nvSpPr>
+          <p:cNvPr id="16" name="TextBox 15">
+            <a:extLst>
+              <a:ext uri="{FF2B5EF4-FFF2-40B4-BE49-F238E27FC236}">
+                <a16:creationId xmlns:a16="http://schemas.microsoft.com/office/drawing/2014/main" id="{A829F524-8735-6445-BDB9-D34750F6F8E1}"/>
+              </a:ext>
+            </a:extLst>
+          </p:cNvPr>
+          <p:cNvSpPr txBox="1"/>
+          <p:nvPr/>
+        </p:nvSpPr>
+        <p:spPr>
+          <a:xfrm>
+            <a:off x="9908954" y="4651176"/>
+            <a:ext cx="1412190" cy="584775"/>
+          </a:xfrm>
+          <a:prstGeom prst="rect">
+            <a:avLst/>
+          </a:prstGeom>
+          <a:noFill/>
+        </p:spPr>
+        <p:txBody>
+          <a:bodyPr wrap="square" rtlCol="0">
+            <a:spAutoFit/>
+          </a:bodyPr>
+          <a:lstStyle/>
+          <a:p>
+            <a:r>
+              <a:rPr lang="en-US" sz="3200" b="1" dirty="0">
+                <a:solidFill>
+                  <a:srgbClr val="335C7E"/>
+                </a:solidFill>
+                <a:latin typeface="Google Sans" panose="020B0503030502040204" pitchFamily="34" charset="0"/>
+              </a:rPr>
+              <a:t>BACK</a:t>
+            </a:r>
+            <a:r>
+              <a:rPr lang="en-US" sz="2400" b="1" dirty="0">
+                <a:solidFill>
+                  <a:srgbClr val="335C7E"/>
+                </a:solidFill>
+                <a:latin typeface="Google Sans Medium" panose="020B0503030502040204" pitchFamily="34" charset="0"/>
+              </a:rPr>
+              <a:t> </a:t>
+            </a:r>
+          </a:p>
+        </p:txBody>
+      </p:sp>
+      <p:sp>
+        <p:nvSpPr>
+          <p:cNvPr id="3" name="L-shape 2">
+            <a:extLst>
+              <a:ext uri="{FF2B5EF4-FFF2-40B4-BE49-F238E27FC236}">
+                <a16:creationId xmlns:a16="http://schemas.microsoft.com/office/drawing/2014/main" id="{9DAFBCD1-02A0-C243-AD90-AE00844EA27C}"/>
+              </a:ext>
+            </a:extLst>
+          </p:cNvPr>
+          <p:cNvSpPr/>
+          <p:nvPr/>
+        </p:nvSpPr>
+        <p:spPr>
+          <a:xfrm rot="2652370">
+            <a:off x="8364453" y="2242032"/>
+            <a:ext cx="1720800" cy="1720800"/>
+          </a:xfrm>
+          <a:prstGeom prst="corner">
+            <a:avLst>
+              <a:gd name="adj1" fmla="val 28205"/>
+              <a:gd name="adj2" fmla="val 27564"/>
+            </a:avLst>
+          </a:prstGeom>
+          <a:solidFill>
+            <a:srgbClr val="335C7E"/>
+          </a:solidFill>
+          <a:ln>
+            <a:noFill/>
+          </a:ln>
+        </p:spPr>
+        <p:style>
+          <a:lnRef idx="2">
+            <a:schemeClr val="accent1">
+              <a:shade val="50000"/>
+            </a:schemeClr>
+          </a:lnRef>
+          <a:fillRef idx="1">
+            <a:schemeClr val="accent1"/>
+          </a:fillRef>
+          <a:effectRef idx="0">
+            <a:schemeClr val="accent1"/>
+          </a:effectRef>
+          <a:fontRef idx="minor">
+            <a:schemeClr val="lt1"/>
+          </a:fontRef>
+        </p:style>
+        <p:txBody>
+          <a:bodyPr rtlCol="0" anchor="ctr"/>
+          <a:lstStyle/>
+          <a:p>
+            <a:pPr algn="ctr"/>
+            <a:endParaRPr lang="en-US"/>
+          </a:p>
+        </p:txBody>
+      </p:sp>
+      <p:sp>
+        <p:nvSpPr>
+          <p:cNvPr id="7" name="Rectangle 6">
+            <a:extLst>
+              <a:ext uri="{FF2B5EF4-FFF2-40B4-BE49-F238E27FC236}">
+                <a16:creationId xmlns:a16="http://schemas.microsoft.com/office/drawing/2014/main" id="{3F22B226-3D3D-0C4D-A38D-EAFD59989359}"/>
+              </a:ext>
+            </a:extLst>
+          </p:cNvPr>
+          <p:cNvSpPr/>
+          <p:nvPr/>
+        </p:nvSpPr>
+        <p:spPr>
+          <a:xfrm>
+            <a:off x="8508467" y="2825903"/>
+            <a:ext cx="2069182" cy="553057"/>
+          </a:xfrm>
+          <a:prstGeom prst="rect">
+            <a:avLst/>
+          </a:prstGeom>
+          <a:solidFill>
+            <a:srgbClr val="335C7E"/>
+          </a:solidFill>
+          <a:ln>
+            <a:noFill/>
+          </a:ln>
+        </p:spPr>
+        <p:style>
+          <a:lnRef idx="2">
+            <a:schemeClr val="accent1">
+              <a:shade val="50000"/>
+            </a:schemeClr>
+          </a:lnRef>
+          <a:fillRef idx="1">
+            <a:schemeClr val="accent1"/>
+          </a:fillRef>
+          <a:effectRef idx="0">
+            <a:schemeClr val="accent1"/>
+          </a:effectRef>
+          <a:fontRef idx="minor">
+            <a:schemeClr val="lt1"/>
+          </a:fontRef>
+        </p:style>
+        <p:txBody>
+          <a:bodyPr rtlCol="0" anchor="ctr"/>
+          <a:lstStyle/>
+          <a:p>
+            <a:pPr algn="ctr"/>
+            <a:endParaRPr lang="en-US"/>
+          </a:p>
+        </p:txBody>
+      </p:sp>
+      <p:sp>
+        <p:nvSpPr>
+          <p:cNvPr id="14" name="L-shape 13">
+            <a:extLst>
+              <a:ext uri="{FF2B5EF4-FFF2-40B4-BE49-F238E27FC236}">
+                <a16:creationId xmlns:a16="http://schemas.microsoft.com/office/drawing/2014/main" id="{485B310F-9058-C34C-857B-7E8BBF30E2DF}"/>
+              </a:ext>
+            </a:extLst>
+          </p:cNvPr>
+          <p:cNvSpPr/>
+          <p:nvPr/>
+        </p:nvSpPr>
+        <p:spPr>
+          <a:xfrm rot="2652370">
+            <a:off x="1243808" y="1642009"/>
+            <a:ext cx="1720800" cy="1720800"/>
+          </a:xfrm>
+          <a:prstGeom prst="corner">
+            <a:avLst>
+              <a:gd name="adj1" fmla="val 23254"/>
+              <a:gd name="adj2" fmla="val 21743"/>
+            </a:avLst>
+          </a:prstGeom>
+          <a:solidFill>
+            <a:srgbClr val="335C7E"/>
+          </a:solidFill>
+          <a:ln>
+            <a:noFill/>
+          </a:ln>
+        </p:spPr>
+        <p:style>
+          <a:lnRef idx="2">
+            <a:schemeClr val="accent1">
+              <a:shade val="50000"/>
+            </a:schemeClr>
+          </a:lnRef>
+          <a:fillRef idx="1">
+            <a:schemeClr val="accent1"/>
+          </a:fillRef>
+          <a:effectRef idx="0">
+            <a:schemeClr val="accent1"/>
+          </a:effectRef>
+          <a:fontRef idx="minor">
+            <a:schemeClr val="lt1"/>
+          </a:fontRef>
+        </p:style>
+        <p:txBody>
+          <a:bodyPr rtlCol="0" anchor="ctr"/>
+          <a:lstStyle/>
+          <a:p>
+            <a:pPr algn="ctr"/>
+            <a:endParaRPr lang="en-US"/>
+          </a:p>
+        </p:txBody>
+      </p:sp>
+      <p:sp>
+        <p:nvSpPr>
+          <p:cNvPr id="17" name="Rectangle 16">
+            <a:extLst>
+              <a:ext uri="{FF2B5EF4-FFF2-40B4-BE49-F238E27FC236}">
+                <a16:creationId xmlns:a16="http://schemas.microsoft.com/office/drawing/2014/main" id="{057DA880-815F-7147-B000-379DD7AB3ACF}"/>
+              </a:ext>
+            </a:extLst>
+          </p:cNvPr>
+          <p:cNvSpPr/>
+          <p:nvPr/>
+        </p:nvSpPr>
+        <p:spPr>
+          <a:xfrm>
+            <a:off x="1387822" y="2299483"/>
+            <a:ext cx="2069182" cy="405851"/>
+          </a:xfrm>
+          <a:prstGeom prst="rect">
+            <a:avLst/>
+          </a:prstGeom>
+          <a:solidFill>
+            <a:srgbClr val="335C7E"/>
+          </a:solidFill>
+          <a:ln>
+            <a:noFill/>
+          </a:ln>
+        </p:spPr>
+        <p:style>
+          <a:lnRef idx="2">
+            <a:schemeClr val="accent1">
+              <a:shade val="50000"/>
+            </a:schemeClr>
+          </a:lnRef>
+          <a:fillRef idx="1">
+            <a:schemeClr val="accent1"/>
+          </a:fillRef>
+          <a:effectRef idx="0">
+            <a:schemeClr val="accent1"/>
+          </a:effectRef>
+          <a:fontRef idx="minor">
+            <a:schemeClr val="lt1"/>
+          </a:fontRef>
+        </p:style>
+        <p:txBody>
+          <a:bodyPr rtlCol="0" anchor="ctr"/>
+          <a:lstStyle/>
+          <a:p>
+            <a:pPr algn="ctr"/>
+            <a:endParaRPr lang="en-US"/>
+          </a:p>
+        </p:txBody>
+      </p:sp>
+      <p:sp>
+        <p:nvSpPr>
+          <p:cNvPr id="5" name="Rectangle 4">
+            <a:extLst>
+              <a:ext uri="{FF2B5EF4-FFF2-40B4-BE49-F238E27FC236}">
+                <a16:creationId xmlns:a16="http://schemas.microsoft.com/office/drawing/2014/main" id="{9A427F68-04E0-7C40-B84B-D8B8ADB897CF}"/>
+              </a:ext>
+            </a:extLst>
+          </p:cNvPr>
+          <p:cNvSpPr/>
+          <p:nvPr/>
+        </p:nvSpPr>
+        <p:spPr>
+          <a:xfrm>
+            <a:off x="154684" y="438303"/>
+            <a:ext cx="5756259" cy="4580011"/>
+          </a:xfrm>
+          <a:prstGeom prst="rect">
+            <a:avLst/>
+          </a:prstGeom>
+          <a:noFill/>
+          <a:ln>
+            <a:noFill/>
+          </a:ln>
+        </p:spPr>
+        <p:style>
+          <a:lnRef idx="2">
+            <a:schemeClr val="accent1">
+              <a:shade val="50000"/>
+            </a:schemeClr>
+          </a:lnRef>
+          <a:fillRef idx="1">
+            <a:schemeClr val="accent1"/>
+          </a:fillRef>
+          <a:effectRef idx="0">
+            <a:schemeClr val="accent1"/>
+          </a:effectRef>
+          <a:fontRef idx="minor">
+            <a:schemeClr val="lt1"/>
+          </a:fontRef>
+        </p:style>
+        <p:txBody>
+          <a:bodyPr rtlCol="0" anchor="ctr"/>
+          <a:lstStyle/>
+          <a:p>
+            <a:pPr algn="ctr"/>
+            <a:endParaRPr lang="en-US"/>
+          </a:p>
+        </p:txBody>
+      </p:sp>
+    </p:spTree>
+    <p:extLst>
+      <p:ext uri="{BB962C8B-B14F-4D97-AF65-F5344CB8AC3E}">
+        <p14:creationId xmlns:p14="http://schemas.microsoft.com/office/powerpoint/2010/main" val="3687244628"/>
+      </p:ext>
+    </p:extLst>
+  </p:cSld>
+  <p:clrMapOvr>
+    <a:masterClrMapping/>
+  </p:clrMapOvr>
+</p:sld>
+</file>
+
+<file path=ppt/slides/slide11.xml><?xml version="1.0" encoding="utf-8"?>
+<p:sld xmlns:a="http://schemas.openxmlformats.org/drawingml/2006/main" xmlns:r="http://schemas.openxmlformats.org/officeDocument/2006/relationships" xmlns:p="http://schemas.openxmlformats.org/presentationml/2006/main">
+  <p:cSld>
+    <p:spTree>
+      <p:nvGrpSpPr>
+        <p:cNvPr id="1" name=""/>
+        <p:cNvGrpSpPr/>
+        <p:nvPr/>
+      </p:nvGrpSpPr>
+      <p:grpSpPr>
+        <a:xfrm>
+          <a:off x="0" y="0"/>
+          <a:ext cx="0" cy="0"/>
+          <a:chOff x="0" y="0"/>
+          <a:chExt cx="0" cy="0"/>
+        </a:xfrm>
+      </p:grpSpPr>
+      <p:sp>
+        <p:nvSpPr>
+          <p:cNvPr id="5" name="Rectangle 4">
+            <a:extLst>
+              <a:ext uri="{FF2B5EF4-FFF2-40B4-BE49-F238E27FC236}">
+                <a16:creationId xmlns:a16="http://schemas.microsoft.com/office/drawing/2014/main" id="{9A427F68-04E0-7C40-B84B-D8B8ADB897CF}"/>
+              </a:ext>
+            </a:extLst>
+          </p:cNvPr>
+          <p:cNvSpPr/>
+          <p:nvPr/>
+        </p:nvSpPr>
+        <p:spPr>
+          <a:xfrm>
+            <a:off x="154684" y="438303"/>
+            <a:ext cx="5756259" cy="4580011"/>
+          </a:xfrm>
+          <a:prstGeom prst="rect">
+            <a:avLst/>
+          </a:prstGeom>
+          <a:noFill/>
+          <a:ln>
+            <a:noFill/>
+          </a:ln>
+        </p:spPr>
+        <p:style>
+          <a:lnRef idx="2">
+            <a:schemeClr val="accent1">
+              <a:shade val="50000"/>
+            </a:schemeClr>
+          </a:lnRef>
+          <a:fillRef idx="1">
+            <a:schemeClr val="accent1"/>
+          </a:fillRef>
+          <a:effectRef idx="0">
+            <a:schemeClr val="accent1"/>
+          </a:effectRef>
+          <a:fontRef idx="minor">
+            <a:schemeClr val="lt1"/>
+          </a:fontRef>
+        </p:style>
+        <p:txBody>
+          <a:bodyPr rtlCol="0" anchor="ctr"/>
+          <a:lstStyle/>
+          <a:p>
+            <a:pPr algn="ctr"/>
+            <a:endParaRPr lang="en-US"/>
+          </a:p>
+        </p:txBody>
+      </p:sp>
+      <p:sp>
+        <p:nvSpPr>
+          <p:cNvPr id="8" name="Rectangle 7">
+            <a:extLst>
+              <a:ext uri="{FF2B5EF4-FFF2-40B4-BE49-F238E27FC236}">
+                <a16:creationId xmlns:a16="http://schemas.microsoft.com/office/drawing/2014/main" id="{A1685247-8415-414F-B3CE-089251D6C360}"/>
+              </a:ext>
+            </a:extLst>
+          </p:cNvPr>
+          <p:cNvSpPr/>
+          <p:nvPr/>
+        </p:nvSpPr>
+        <p:spPr>
+          <a:xfrm>
+            <a:off x="12700" y="3000375"/>
+            <a:ext cx="12166600" cy="148514"/>
+          </a:xfrm>
+          <a:prstGeom prst="rect">
+            <a:avLst/>
+          </a:prstGeom>
+          <a:solidFill>
+            <a:srgbClr val="339889"/>
+          </a:solidFill>
+          <a:ln>
+            <a:noFill/>
+          </a:ln>
+        </p:spPr>
+        <p:style>
+          <a:lnRef idx="2">
+            <a:schemeClr val="accent1">
+              <a:shade val="50000"/>
+            </a:schemeClr>
+          </a:lnRef>
+          <a:fillRef idx="1">
+            <a:schemeClr val="accent1"/>
+          </a:fillRef>
+          <a:effectRef idx="0">
+            <a:schemeClr val="accent1"/>
+          </a:effectRef>
+          <a:fontRef idx="minor">
+            <a:schemeClr val="lt1"/>
+          </a:fontRef>
+        </p:style>
+        <p:txBody>
+          <a:bodyPr rtlCol="0" anchor="ctr"/>
+          <a:lstStyle/>
+          <a:p>
+            <a:pPr algn="ctr"/>
+            <a:endParaRPr lang="en-US"/>
+          </a:p>
+        </p:txBody>
+      </p:sp>
+      <p:pic>
+        <p:nvPicPr>
+          <p:cNvPr id="3" name="Picture 2">
+            <a:extLst>
+              <a:ext uri="{FF2B5EF4-FFF2-40B4-BE49-F238E27FC236}">
+                <a16:creationId xmlns:a16="http://schemas.microsoft.com/office/drawing/2014/main" id="{2DDAE6E3-592C-E844-9605-640FB810F79D}"/>
+              </a:ext>
+            </a:extLst>
+          </p:cNvPr>
+          <p:cNvPicPr>
+            <a:picLocks noChangeAspect="1"/>
+          </p:cNvPicPr>
+          <p:nvPr/>
+        </p:nvPicPr>
+        <p:blipFill rotWithShape="1">
+          <a:blip r:embed="rId2">
+            <a:clrChange>
+              <a:clrFrom>
+                <a:srgbClr val="F6F7F8"/>
+              </a:clrFrom>
+              <a:clrTo>
+                <a:srgbClr val="F6F7F8">
+                  <a:alpha val="0"/>
+                </a:srgbClr>
+              </a:clrTo>
+            </a:clrChange>
+          </a:blip>
+          <a:srcRect l="3920"/>
+          <a:stretch/>
+        </p:blipFill>
+        <p:spPr>
+          <a:xfrm>
+            <a:off x="4404732" y="3429000"/>
+            <a:ext cx="3526418" cy="2616200"/>
+          </a:xfrm>
+          <a:prstGeom prst="rect">
+            <a:avLst/>
+          </a:prstGeom>
+        </p:spPr>
+      </p:pic>
     </p:spTree>
     <p:extLst>
       <p:ext uri="{BB962C8B-B14F-4D97-AF65-F5344CB8AC3E}">

--- a/images/Logo.pptx
+++ b/images/Logo.pptx
@@ -4207,8 +4207,8 @@
         </p:nvSpPr>
         <p:spPr>
           <a:xfrm>
-            <a:off x="154684" y="438303"/>
-            <a:ext cx="5756259" cy="4580011"/>
+            <a:off x="154684" y="724829"/>
+            <a:ext cx="5290249" cy="3735659"/>
           </a:xfrm>
           <a:prstGeom prst="rect">
             <a:avLst/>
